--- a/vkr/VKR_presentation.pptx
+++ b/vkr/VKR_presentation.pptx
@@ -522,12 +522,19 @@
           <a:lstStyle/>
           <a:p>
             <a:r>
-              <a:t>Стартовая фраза:</a:t>
-            </a:r>
-          </a:p>
-          <a:p>
-            <a:r>
-              <a:t>«Добрый день, уважаемые члены государственной экзаменационной комиссии. Меня зовут Пётр Камашев, я представляю выпускную квалификационную работу на тему "Конкурентная стратегия МТС Юрент на региональных рынках кикшеринга в России". Научный руководитель — профессор Иван Александрович Егоров».</a:t>
+              <a:t>Стартовая фраза (учить наизусть):</a:t>
+            </a:r>
+          </a:p>
+          <a:p/>
+          <a:p>
+            <a:r>
+              <a:t>«Добрый день, уважаемые члены государственной экзаменационной комиссии. Меня зовут Пётр Камашев, я представляю выпускную квалификационную работу на тему "Конкурентная стратегия МТС Юрент на региональных рынках кикшеринга в России". Научный руководитель — профессор Иван Александрович Егоров.</a:t>
+            </a:r>
+          </a:p>
+          <a:p/>
+          <a:p>
+            <a:r>
+              <a:t>Центральный вопрос работы — как МТС Юренту перейти от роста через расширение парка к управлению отдачей уже сформированного регионального портфеля. Работа выстроена как цепочка из пяти шагов: диагноз города, выбор режима, рычаги в сезоне, KPI и эффект».</a:t>
             </a:r>
           </a:p>
         </p:txBody>
@@ -4698,7 +4705,7 @@
               </a:lnSpc>
             </a:pPr>
             <a:r>
-              <a:rPr sz="1800" b="1">
+              <a:rPr sz="1800" b="1" i="0">
                 <a:solidFill>
                   <a:srgbClr val="FFFFFF"/>
                 </a:solidFill>
@@ -4737,7 +4744,7 @@
               </a:lnSpc>
             </a:pPr>
             <a:r>
-              <a:rPr sz="1400" b="0">
+              <a:rPr sz="1400" b="0" i="0">
                 <a:solidFill>
                   <a:srgbClr val="FFFFFF"/>
                 </a:solidFill>
@@ -4753,7 +4760,7 @@
               </a:lnSpc>
             </a:pPr>
             <a:r>
-              <a:rPr sz="1400" b="0">
+              <a:rPr sz="1400" b="0" i="0">
                 <a:solidFill>
                   <a:srgbClr val="FFFFFF"/>
                 </a:solidFill>
@@ -4792,7 +4799,7 @@
               </a:lnSpc>
             </a:pPr>
             <a:r>
-              <a:rPr sz="1200" b="0">
+              <a:rPr sz="1200" b="0" i="0">
                 <a:solidFill>
                   <a:srgbClr val="FFFFFF"/>
                 </a:solidFill>
@@ -4811,8 +4818,8 @@
         </p:nvSpPr>
         <p:spPr>
           <a:xfrm>
-            <a:off x="5486400" y="1371600"/>
-            <a:ext cx="6400800" cy="2926080"/>
+            <a:off x="5486400" y="822960"/>
+            <a:ext cx="6400800" cy="2286000"/>
           </a:xfrm>
           <a:prstGeom prst="rect">
             <a:avLst/>
@@ -4831,7 +4838,7 @@
               </a:lnSpc>
             </a:pPr>
             <a:r>
-              <a:rPr sz="3000" b="1">
+              <a:rPr sz="2800" b="1" i="0">
                 <a:solidFill>
                   <a:srgbClr val="1A1A1A"/>
                 </a:solidFill>
@@ -4847,7 +4854,7 @@
               </a:lnSpc>
             </a:pPr>
             <a:r>
-              <a:rPr sz="3000" b="1">
+              <a:rPr sz="2800" b="1" i="0">
                 <a:solidFill>
                   <a:srgbClr val="1A1A1A"/>
                 </a:solidFill>
@@ -4863,7 +4870,7 @@
               </a:lnSpc>
             </a:pPr>
             <a:r>
-              <a:rPr sz="3000" b="1">
+              <a:rPr sz="2800" b="1" i="0">
                 <a:solidFill>
                   <a:srgbClr val="1A1A1A"/>
                 </a:solidFill>
@@ -4882,7 +4889,461 @@
         </p:nvSpPr>
         <p:spPr>
           <a:xfrm>
+            <a:off x="5486400" y="3291840"/>
+            <a:ext cx="6400800" cy="914400"/>
+          </a:xfrm>
+          <a:prstGeom prst="rect">
+            <a:avLst/>
+          </a:prstGeom>
+          <a:noFill/>
+        </p:spPr>
+        <p:txBody>
+          <a:bodyPr wrap="square" lIns="25400" rIns="25400" tIns="25400" bIns="25400">
+            <a:spAutoFit/>
+          </a:bodyPr>
+          <a:lstStyle/>
+          <a:p>
+            <a:pPr algn="l">
+              <a:lnSpc>
+                <a:spcPct val="130000"/>
+              </a:lnSpc>
+            </a:pPr>
+            <a:r>
+              <a:rPr sz="1500" b="0" i="0">
+                <a:solidFill>
+                  <a:srgbClr val="595959"/>
+                </a:solidFill>
+                <a:latin typeface="Calibri"/>
+              </a:rPr>
+              <a:t>Как МТС Юренту перейти от роста через парк к управлению отдачей регионального портфеля?</a:t>
+            </a:r>
+          </a:p>
+        </p:txBody>
+      </p:sp>
+      <p:sp>
+        <p:nvSpPr>
+          <p:cNvPr id="9" name="Rectangle 8"/>
+          <p:cNvSpPr/>
+          <p:nvPr/>
+        </p:nvSpPr>
+        <p:spPr>
+          <a:xfrm>
             <a:off x="5486400" y="4572000"/>
+            <a:ext cx="1188720" cy="457200"/>
+          </a:xfrm>
+          <a:prstGeom prst="rect">
+            <a:avLst/>
+          </a:prstGeom>
+          <a:solidFill>
+            <a:srgbClr val="F2F2F2"/>
+          </a:solidFill>
+          <a:ln>
+            <a:noFill/>
+          </a:ln>
+          <a:effectLst/>
+        </p:spPr>
+        <p:style>
+          <a:lnRef idx="1">
+            <a:schemeClr val="accent1"/>
+          </a:lnRef>
+          <a:fillRef idx="3">
+            <a:schemeClr val="accent1"/>
+          </a:fillRef>
+          <a:effectRef idx="2">
+            <a:schemeClr val="accent1"/>
+          </a:effectRef>
+          <a:fontRef idx="minor">
+            <a:schemeClr val="lt1"/>
+          </a:fontRef>
+        </p:style>
+        <p:txBody>
+          <a:bodyPr rtlCol="0" anchor="ctr"/>
+          <a:lstStyle/>
+          <a:p>
+            <a:pPr algn="ctr"/>
+          </a:p>
+        </p:txBody>
+      </p:sp>
+      <p:sp>
+        <p:nvSpPr>
+          <p:cNvPr id="10" name="TextBox 9"/>
+          <p:cNvSpPr txBox="1"/>
+          <p:nvPr/>
+        </p:nvSpPr>
+        <p:spPr>
+          <a:xfrm>
+            <a:off x="5486400" y="4690872"/>
+            <a:ext cx="1188720" cy="274320"/>
+          </a:xfrm>
+          <a:prstGeom prst="rect">
+            <a:avLst/>
+          </a:prstGeom>
+          <a:noFill/>
+        </p:spPr>
+        <p:txBody>
+          <a:bodyPr wrap="square" lIns="25400" rIns="25400" tIns="25400" bIns="25400">
+            <a:spAutoFit/>
+          </a:bodyPr>
+          <a:lstStyle/>
+          <a:p>
+            <a:pPr algn="ctr">
+              <a:lnSpc>
+                <a:spcPct val="120000"/>
+              </a:lnSpc>
+            </a:pPr>
+            <a:r>
+              <a:rPr sz="900" b="1" i="0">
+                <a:solidFill>
+                  <a:srgbClr val="1A1A1A"/>
+                </a:solidFill>
+                <a:latin typeface="Calibri"/>
+              </a:rPr>
+              <a:t>Диагноз города</a:t>
+            </a:r>
+          </a:p>
+        </p:txBody>
+      </p:sp>
+      <p:sp>
+        <p:nvSpPr>
+          <p:cNvPr id="11" name="Rectangle 10"/>
+          <p:cNvSpPr/>
+          <p:nvPr/>
+        </p:nvSpPr>
+        <p:spPr>
+          <a:xfrm>
+            <a:off x="6720840" y="4572000"/>
+            <a:ext cx="1188720" cy="457200"/>
+          </a:xfrm>
+          <a:prstGeom prst="rect">
+            <a:avLst/>
+          </a:prstGeom>
+          <a:solidFill>
+            <a:srgbClr val="F2F2F2"/>
+          </a:solidFill>
+          <a:ln>
+            <a:noFill/>
+          </a:ln>
+          <a:effectLst/>
+        </p:spPr>
+        <p:style>
+          <a:lnRef idx="1">
+            <a:schemeClr val="accent1"/>
+          </a:lnRef>
+          <a:fillRef idx="3">
+            <a:schemeClr val="accent1"/>
+          </a:fillRef>
+          <a:effectRef idx="2">
+            <a:schemeClr val="accent1"/>
+          </a:effectRef>
+          <a:fontRef idx="minor">
+            <a:schemeClr val="lt1"/>
+          </a:fontRef>
+        </p:style>
+        <p:txBody>
+          <a:bodyPr rtlCol="0" anchor="ctr"/>
+          <a:lstStyle/>
+          <a:p>
+            <a:pPr algn="ctr"/>
+          </a:p>
+        </p:txBody>
+      </p:sp>
+      <p:sp>
+        <p:nvSpPr>
+          <p:cNvPr id="12" name="TextBox 11"/>
+          <p:cNvSpPr txBox="1"/>
+          <p:nvPr/>
+        </p:nvSpPr>
+        <p:spPr>
+          <a:xfrm>
+            <a:off x="6720840" y="4690872"/>
+            <a:ext cx="1188720" cy="274320"/>
+          </a:xfrm>
+          <a:prstGeom prst="rect">
+            <a:avLst/>
+          </a:prstGeom>
+          <a:noFill/>
+        </p:spPr>
+        <p:txBody>
+          <a:bodyPr wrap="square" lIns="25400" rIns="25400" tIns="25400" bIns="25400">
+            <a:spAutoFit/>
+          </a:bodyPr>
+          <a:lstStyle/>
+          <a:p>
+            <a:pPr algn="ctr">
+              <a:lnSpc>
+                <a:spcPct val="120000"/>
+              </a:lnSpc>
+            </a:pPr>
+            <a:r>
+              <a:rPr sz="900" b="1" i="0">
+                <a:solidFill>
+                  <a:srgbClr val="1A1A1A"/>
+                </a:solidFill>
+                <a:latin typeface="Calibri"/>
+              </a:rPr>
+              <a:t>Выбор режима</a:t>
+            </a:r>
+          </a:p>
+        </p:txBody>
+      </p:sp>
+      <p:sp>
+        <p:nvSpPr>
+          <p:cNvPr id="13" name="Rectangle 12"/>
+          <p:cNvSpPr/>
+          <p:nvPr/>
+        </p:nvSpPr>
+        <p:spPr>
+          <a:xfrm>
+            <a:off x="7955279" y="4572000"/>
+            <a:ext cx="1188720" cy="457200"/>
+          </a:xfrm>
+          <a:prstGeom prst="rect">
+            <a:avLst/>
+          </a:prstGeom>
+          <a:solidFill>
+            <a:srgbClr val="F2F2F2"/>
+          </a:solidFill>
+          <a:ln>
+            <a:noFill/>
+          </a:ln>
+          <a:effectLst/>
+        </p:spPr>
+        <p:style>
+          <a:lnRef idx="1">
+            <a:schemeClr val="accent1"/>
+          </a:lnRef>
+          <a:fillRef idx="3">
+            <a:schemeClr val="accent1"/>
+          </a:fillRef>
+          <a:effectRef idx="2">
+            <a:schemeClr val="accent1"/>
+          </a:effectRef>
+          <a:fontRef idx="minor">
+            <a:schemeClr val="lt1"/>
+          </a:fontRef>
+        </p:style>
+        <p:txBody>
+          <a:bodyPr rtlCol="0" anchor="ctr"/>
+          <a:lstStyle/>
+          <a:p>
+            <a:pPr algn="ctr"/>
+          </a:p>
+        </p:txBody>
+      </p:sp>
+      <p:sp>
+        <p:nvSpPr>
+          <p:cNvPr id="14" name="TextBox 13"/>
+          <p:cNvSpPr txBox="1"/>
+          <p:nvPr/>
+        </p:nvSpPr>
+        <p:spPr>
+          <a:xfrm>
+            <a:off x="7955279" y="4690872"/>
+            <a:ext cx="1188720" cy="274320"/>
+          </a:xfrm>
+          <a:prstGeom prst="rect">
+            <a:avLst/>
+          </a:prstGeom>
+          <a:noFill/>
+        </p:spPr>
+        <p:txBody>
+          <a:bodyPr wrap="square" lIns="25400" rIns="25400" tIns="25400" bIns="25400">
+            <a:spAutoFit/>
+          </a:bodyPr>
+          <a:lstStyle/>
+          <a:p>
+            <a:pPr algn="ctr">
+              <a:lnSpc>
+                <a:spcPct val="120000"/>
+              </a:lnSpc>
+            </a:pPr>
+            <a:r>
+              <a:rPr sz="900" b="1" i="0">
+                <a:solidFill>
+                  <a:srgbClr val="1A1A1A"/>
+                </a:solidFill>
+                <a:latin typeface="Calibri"/>
+              </a:rPr>
+              <a:t>Рычаги в сезоне</a:t>
+            </a:r>
+          </a:p>
+        </p:txBody>
+      </p:sp>
+      <p:sp>
+        <p:nvSpPr>
+          <p:cNvPr id="15" name="Rectangle 14"/>
+          <p:cNvSpPr/>
+          <p:nvPr/>
+        </p:nvSpPr>
+        <p:spPr>
+          <a:xfrm>
+            <a:off x="9189719" y="4572000"/>
+            <a:ext cx="1188720" cy="457200"/>
+          </a:xfrm>
+          <a:prstGeom prst="rect">
+            <a:avLst/>
+          </a:prstGeom>
+          <a:solidFill>
+            <a:srgbClr val="F2F2F2"/>
+          </a:solidFill>
+          <a:ln>
+            <a:noFill/>
+          </a:ln>
+          <a:effectLst/>
+        </p:spPr>
+        <p:style>
+          <a:lnRef idx="1">
+            <a:schemeClr val="accent1"/>
+          </a:lnRef>
+          <a:fillRef idx="3">
+            <a:schemeClr val="accent1"/>
+          </a:fillRef>
+          <a:effectRef idx="2">
+            <a:schemeClr val="accent1"/>
+          </a:effectRef>
+          <a:fontRef idx="minor">
+            <a:schemeClr val="lt1"/>
+          </a:fontRef>
+        </p:style>
+        <p:txBody>
+          <a:bodyPr rtlCol="0" anchor="ctr"/>
+          <a:lstStyle/>
+          <a:p>
+            <a:pPr algn="ctr"/>
+          </a:p>
+        </p:txBody>
+      </p:sp>
+      <p:sp>
+        <p:nvSpPr>
+          <p:cNvPr id="16" name="TextBox 15"/>
+          <p:cNvSpPr txBox="1"/>
+          <p:nvPr/>
+        </p:nvSpPr>
+        <p:spPr>
+          <a:xfrm>
+            <a:off x="9189719" y="4690872"/>
+            <a:ext cx="1188720" cy="274320"/>
+          </a:xfrm>
+          <a:prstGeom prst="rect">
+            <a:avLst/>
+          </a:prstGeom>
+          <a:noFill/>
+        </p:spPr>
+        <p:txBody>
+          <a:bodyPr wrap="square" lIns="25400" rIns="25400" tIns="25400" bIns="25400">
+            <a:spAutoFit/>
+          </a:bodyPr>
+          <a:lstStyle/>
+          <a:p>
+            <a:pPr algn="ctr">
+              <a:lnSpc>
+                <a:spcPct val="120000"/>
+              </a:lnSpc>
+            </a:pPr>
+            <a:r>
+              <a:rPr sz="900" b="1" i="0">
+                <a:solidFill>
+                  <a:srgbClr val="1A1A1A"/>
+                </a:solidFill>
+                <a:latin typeface="Calibri"/>
+              </a:rPr>
+              <a:t>KPI</a:t>
+            </a:r>
+          </a:p>
+        </p:txBody>
+      </p:sp>
+      <p:sp>
+        <p:nvSpPr>
+          <p:cNvPr id="17" name="Rectangle 16"/>
+          <p:cNvSpPr/>
+          <p:nvPr/>
+        </p:nvSpPr>
+        <p:spPr>
+          <a:xfrm>
+            <a:off x="10424159" y="4572000"/>
+            <a:ext cx="1188720" cy="457200"/>
+          </a:xfrm>
+          <a:prstGeom prst="rect">
+            <a:avLst/>
+          </a:prstGeom>
+          <a:solidFill>
+            <a:srgbClr val="F2F2F2"/>
+          </a:solidFill>
+          <a:ln>
+            <a:noFill/>
+          </a:ln>
+          <a:effectLst/>
+        </p:spPr>
+        <p:style>
+          <a:lnRef idx="1">
+            <a:schemeClr val="accent1"/>
+          </a:lnRef>
+          <a:fillRef idx="3">
+            <a:schemeClr val="accent1"/>
+          </a:fillRef>
+          <a:effectRef idx="2">
+            <a:schemeClr val="accent1"/>
+          </a:effectRef>
+          <a:fontRef idx="minor">
+            <a:schemeClr val="lt1"/>
+          </a:fontRef>
+        </p:style>
+        <p:txBody>
+          <a:bodyPr rtlCol="0" anchor="ctr"/>
+          <a:lstStyle/>
+          <a:p>
+            <a:pPr algn="ctr"/>
+          </a:p>
+        </p:txBody>
+      </p:sp>
+      <p:sp>
+        <p:nvSpPr>
+          <p:cNvPr id="18" name="TextBox 17"/>
+          <p:cNvSpPr txBox="1"/>
+          <p:nvPr/>
+        </p:nvSpPr>
+        <p:spPr>
+          <a:xfrm>
+            <a:off x="10424159" y="4690872"/>
+            <a:ext cx="1188720" cy="274320"/>
+          </a:xfrm>
+          <a:prstGeom prst="rect">
+            <a:avLst/>
+          </a:prstGeom>
+          <a:noFill/>
+        </p:spPr>
+        <p:txBody>
+          <a:bodyPr wrap="square" lIns="25400" rIns="25400" tIns="25400" bIns="25400">
+            <a:spAutoFit/>
+          </a:bodyPr>
+          <a:lstStyle/>
+          <a:p>
+            <a:pPr algn="ctr">
+              <a:lnSpc>
+                <a:spcPct val="120000"/>
+              </a:lnSpc>
+            </a:pPr>
+            <a:r>
+              <a:rPr sz="900" b="1" i="0">
+                <a:solidFill>
+                  <a:srgbClr val="1A1A1A"/>
+                </a:solidFill>
+                <a:latin typeface="Calibri"/>
+              </a:rPr>
+              <a:t>Эффект</a:t>
+            </a:r>
+          </a:p>
+        </p:txBody>
+      </p:sp>
+      <p:sp>
+        <p:nvSpPr>
+          <p:cNvPr id="19" name="TextBox 18"/>
+          <p:cNvSpPr txBox="1"/>
+          <p:nvPr/>
+        </p:nvSpPr>
+        <p:spPr>
+          <a:xfrm>
+            <a:off x="5486400" y="5303520"/>
             <a:ext cx="3200400" cy="274320"/>
           </a:xfrm>
           <a:prstGeom prst="rect">
@@ -4902,7 +5363,7 @@
               </a:lnSpc>
             </a:pPr>
             <a:r>
-              <a:rPr sz="1100" b="0">
+              <a:rPr sz="1100" b="0" i="0">
                 <a:solidFill>
                   <a:srgbClr val="595959"/>
                 </a:solidFill>
@@ -4915,13 +5376,13 @@
       </p:sp>
       <p:sp>
         <p:nvSpPr>
-          <p:cNvPr id="9" name="TextBox 8"/>
-          <p:cNvSpPr txBox="1"/>
-          <p:nvPr/>
-        </p:nvSpPr>
-        <p:spPr>
-          <a:xfrm>
-            <a:off x="5486400" y="4846320"/>
+          <p:cNvPr id="20" name="TextBox 19"/>
+          <p:cNvSpPr txBox="1"/>
+          <p:nvPr/>
+        </p:nvSpPr>
+        <p:spPr>
+          <a:xfrm>
+            <a:off x="5486400" y="5577840"/>
             <a:ext cx="3200400" cy="365760"/>
           </a:xfrm>
           <a:prstGeom prst="rect">
@@ -4941,7 +5402,7 @@
               </a:lnSpc>
             </a:pPr>
             <a:r>
-              <a:rPr sz="1600" b="1">
+              <a:rPr sz="1500" b="1" i="0">
                 <a:solidFill>
                   <a:srgbClr val="1A1A1A"/>
                 </a:solidFill>
@@ -4954,14 +5415,14 @@
       </p:sp>
       <p:sp>
         <p:nvSpPr>
-          <p:cNvPr id="10" name="TextBox 9"/>
-          <p:cNvSpPr txBox="1"/>
-          <p:nvPr/>
-        </p:nvSpPr>
-        <p:spPr>
-          <a:xfrm>
-            <a:off x="5486400" y="5394960"/>
-            <a:ext cx="4572000" cy="274320"/>
+          <p:cNvPr id="21" name="TextBox 20"/>
+          <p:cNvSpPr txBox="1"/>
+          <p:nvPr/>
+        </p:nvSpPr>
+        <p:spPr>
+          <a:xfrm>
+            <a:off x="8686800" y="5303520"/>
+            <a:ext cx="3657600" cy="274320"/>
           </a:xfrm>
           <a:prstGeom prst="rect">
             <a:avLst/>
@@ -4980,7 +5441,7 @@
               </a:lnSpc>
             </a:pPr>
             <a:r>
-              <a:rPr sz="1100" b="0">
+              <a:rPr sz="1100" b="0" i="0">
                 <a:solidFill>
                   <a:srgbClr val="595959"/>
                 </a:solidFill>
@@ -4993,14 +5454,14 @@
       </p:sp>
       <p:sp>
         <p:nvSpPr>
-          <p:cNvPr id="11" name="TextBox 10"/>
-          <p:cNvSpPr txBox="1"/>
-          <p:nvPr/>
-        </p:nvSpPr>
-        <p:spPr>
-          <a:xfrm>
-            <a:off x="5486400" y="5669280"/>
-            <a:ext cx="4572000" cy="365760"/>
+          <p:cNvPr id="22" name="TextBox 21"/>
+          <p:cNvSpPr txBox="1"/>
+          <p:nvPr/>
+        </p:nvSpPr>
+        <p:spPr>
+          <a:xfrm>
+            <a:off x="8686800" y="5577840"/>
+            <a:ext cx="3657600" cy="365760"/>
           </a:xfrm>
           <a:prstGeom prst="rect">
             <a:avLst/>
@@ -5019,7 +5480,7 @@
               </a:lnSpc>
             </a:pPr>
             <a:r>
-              <a:rPr sz="1600" b="1">
+              <a:rPr sz="1500" b="1" i="0">
                 <a:solidFill>
                   <a:srgbClr val="1A1A1A"/>
                 </a:solidFill>
@@ -5202,7 +5663,7 @@
               </a:lnSpc>
             </a:pPr>
             <a:r>
-              <a:rPr sz="2400" b="1">
+              <a:rPr sz="2400" b="1" i="0">
                 <a:solidFill>
                   <a:srgbClr val="1A1A1A"/>
                 </a:solidFill>
@@ -5241,7 +5702,7 @@
               </a:lnSpc>
             </a:pPr>
             <a:r>
-              <a:rPr sz="1200" b="1">
+              <a:rPr sz="1200" b="1" i="0">
                 <a:solidFill>
                   <a:srgbClr val="1A1A1A"/>
                 </a:solidFill>
@@ -5280,7 +5741,7 @@
               </a:lnSpc>
             </a:pPr>
             <a:r>
-              <a:rPr sz="1050" b="0">
+              <a:rPr sz="1050" b="0" i="0">
                 <a:solidFill>
                   <a:srgbClr val="595959"/>
                 </a:solidFill>
@@ -5363,7 +5824,7 @@
               </a:lnSpc>
             </a:pPr>
             <a:r>
-              <a:rPr sz="2400" b="1">
+              <a:rPr sz="2400" b="1" i="0">
                 <a:solidFill>
                   <a:srgbClr val="1A1A1A"/>
                 </a:solidFill>
@@ -5402,7 +5863,7 @@
               </a:lnSpc>
             </a:pPr>
             <a:r>
-              <a:rPr sz="1200" b="1">
+              <a:rPr sz="1200" b="1" i="0">
                 <a:solidFill>
                   <a:srgbClr val="1A1A1A"/>
                 </a:solidFill>
@@ -5441,7 +5902,7 @@
               </a:lnSpc>
             </a:pPr>
             <a:r>
-              <a:rPr sz="1050" b="0">
+              <a:rPr sz="1050" b="0" i="0">
                 <a:solidFill>
                   <a:srgbClr val="595959"/>
                 </a:solidFill>
@@ -5524,7 +5985,7 @@
               </a:lnSpc>
             </a:pPr>
             <a:r>
-              <a:rPr sz="2400" b="1">
+              <a:rPr sz="2400" b="1" i="0">
                 <a:solidFill>
                   <a:srgbClr val="FFFFFF"/>
                 </a:solidFill>
@@ -5563,7 +6024,7 @@
               </a:lnSpc>
             </a:pPr>
             <a:r>
-              <a:rPr sz="1200" b="1">
+              <a:rPr sz="1200" b="1" i="0">
                 <a:solidFill>
                   <a:srgbClr val="FFFFFF"/>
                 </a:solidFill>
@@ -5602,7 +6063,7 @@
               </a:lnSpc>
             </a:pPr>
             <a:r>
-              <a:rPr sz="1050" b="0">
+              <a:rPr sz="1050" b="0" i="0">
                 <a:solidFill>
                   <a:srgbClr val="FFFFFF"/>
                 </a:solidFill>
@@ -5685,7 +6146,7 @@
               </a:lnSpc>
             </a:pPr>
             <a:r>
-              <a:rPr sz="1100" b="1">
+              <a:rPr sz="1100" b="1" i="0">
                 <a:solidFill>
                   <a:srgbClr val="FFFFFF"/>
                 </a:solidFill>
@@ -5724,7 +6185,7 @@
               </a:lnSpc>
             </a:pPr>
             <a:r>
-              <a:rPr sz="1100" b="1">
+              <a:rPr sz="1100" b="1" i="0">
                 <a:solidFill>
                   <a:srgbClr val="FFFFFF"/>
                 </a:solidFill>
@@ -5763,7 +6224,7 @@
               </a:lnSpc>
             </a:pPr>
             <a:r>
-              <a:rPr sz="1100" b="1">
+              <a:rPr sz="1100" b="1" i="0">
                 <a:solidFill>
                   <a:srgbClr val="FFFFFF"/>
                 </a:solidFill>
@@ -5802,7 +6263,7 @@
               </a:lnSpc>
             </a:pPr>
             <a:r>
-              <a:rPr sz="1100" b="1">
+              <a:rPr sz="1100" b="1" i="0">
                 <a:solidFill>
                   <a:srgbClr val="FFFFFF"/>
                 </a:solidFill>
@@ -5885,7 +6346,7 @@
               </a:lnSpc>
             </a:pPr>
             <a:r>
-              <a:rPr sz="1100" b="1">
+              <a:rPr sz="1100" b="1" i="0">
                 <a:solidFill>
                   <a:srgbClr val="1A1A1A"/>
                 </a:solidFill>
@@ -5924,7 +6385,7 @@
               </a:lnSpc>
             </a:pPr>
             <a:r>
-              <a:rPr sz="1100" b="0">
+              <a:rPr sz="1100" b="0" i="0">
                 <a:solidFill>
                   <a:srgbClr val="1A1A1A"/>
                 </a:solidFill>
@@ -5963,7 +6424,7 @@
               </a:lnSpc>
             </a:pPr>
             <a:r>
-              <a:rPr sz="1100" b="0">
+              <a:rPr sz="1100" b="0" i="0">
                 <a:solidFill>
                   <a:srgbClr val="1A1A1A"/>
                 </a:solidFill>
@@ -6002,7 +6463,7 @@
               </a:lnSpc>
             </a:pPr>
             <a:r>
-              <a:rPr sz="1100" b="1">
+              <a:rPr sz="1100" b="1" i="0">
                 <a:solidFill>
                   <a:srgbClr val="1E7A3C"/>
                 </a:solidFill>
@@ -6085,7 +6546,7 @@
               </a:lnSpc>
             </a:pPr>
             <a:r>
-              <a:rPr sz="1100" b="1">
+              <a:rPr sz="1100" b="1" i="0">
                 <a:solidFill>
                   <a:srgbClr val="1A1A1A"/>
                 </a:solidFill>
@@ -6124,7 +6585,7 @@
               </a:lnSpc>
             </a:pPr>
             <a:r>
-              <a:rPr sz="1100" b="0">
+              <a:rPr sz="1100" b="0" i="0">
                 <a:solidFill>
                   <a:srgbClr val="1A1A1A"/>
                 </a:solidFill>
@@ -6163,7 +6624,7 @@
               </a:lnSpc>
             </a:pPr>
             <a:r>
-              <a:rPr sz="1100" b="0">
+              <a:rPr sz="1100" b="0" i="0">
                 <a:solidFill>
                   <a:srgbClr val="1A1A1A"/>
                 </a:solidFill>
@@ -6202,7 +6663,7 @@
               </a:lnSpc>
             </a:pPr>
             <a:r>
-              <a:rPr sz="1100" b="1">
+              <a:rPr sz="1100" b="1" i="0">
                 <a:solidFill>
                   <a:srgbClr val="1E7A3C"/>
                 </a:solidFill>
@@ -6285,7 +6746,7 @@
               </a:lnSpc>
             </a:pPr>
             <a:r>
-              <a:rPr sz="1100" b="1">
+              <a:rPr sz="1100" b="1" i="0">
                 <a:solidFill>
                   <a:srgbClr val="1A1A1A"/>
                 </a:solidFill>
@@ -6324,7 +6785,7 @@
               </a:lnSpc>
             </a:pPr>
             <a:r>
-              <a:rPr sz="1100" b="0">
+              <a:rPr sz="1100" b="0" i="0">
                 <a:solidFill>
                   <a:srgbClr val="1A1A1A"/>
                 </a:solidFill>
@@ -6363,7 +6824,7 @@
               </a:lnSpc>
             </a:pPr>
             <a:r>
-              <a:rPr sz="1100" b="0">
+              <a:rPr sz="1100" b="0" i="0">
                 <a:solidFill>
                   <a:srgbClr val="1A1A1A"/>
                 </a:solidFill>
@@ -6402,7 +6863,7 @@
               </a:lnSpc>
             </a:pPr>
             <a:r>
-              <a:rPr sz="1100" b="1">
+              <a:rPr sz="1100" b="1" i="0">
                 <a:solidFill>
                   <a:srgbClr val="ED0028"/>
                 </a:solidFill>
@@ -6485,7 +6946,7 @@
               </a:lnSpc>
             </a:pPr>
             <a:r>
-              <a:rPr sz="1100" b="1">
+              <a:rPr sz="1100" b="1" i="0">
                 <a:solidFill>
                   <a:srgbClr val="1A1A1A"/>
                 </a:solidFill>
@@ -6524,7 +6985,7 @@
               </a:lnSpc>
             </a:pPr>
             <a:r>
-              <a:rPr sz="1100" b="0">
+              <a:rPr sz="1100" b="0" i="0">
                 <a:solidFill>
                   <a:srgbClr val="1A1A1A"/>
                 </a:solidFill>
@@ -6563,7 +7024,7 @@
               </a:lnSpc>
             </a:pPr>
             <a:r>
-              <a:rPr sz="1100" b="0">
+              <a:rPr sz="1100" b="0" i="0">
                 <a:solidFill>
                   <a:srgbClr val="1A1A1A"/>
                 </a:solidFill>
@@ -6602,7 +7063,7 @@
               </a:lnSpc>
             </a:pPr>
             <a:r>
-              <a:rPr sz="1100" b="1">
+              <a:rPr sz="1100" b="1" i="0">
                 <a:solidFill>
                   <a:srgbClr val="1E7A3C"/>
                 </a:solidFill>
@@ -6685,7 +7146,7 @@
               </a:lnSpc>
             </a:pPr>
             <a:r>
-              <a:rPr sz="1100" b="1">
+              <a:rPr sz="1100" b="1" i="0">
                 <a:solidFill>
                   <a:srgbClr val="1A1A1A"/>
                 </a:solidFill>
@@ -6724,7 +7185,7 @@
               </a:lnSpc>
             </a:pPr>
             <a:r>
-              <a:rPr sz="1100" b="0">
+              <a:rPr sz="1100" b="0" i="0">
                 <a:solidFill>
                   <a:srgbClr val="1A1A1A"/>
                 </a:solidFill>
@@ -6763,7 +7224,7 @@
               </a:lnSpc>
             </a:pPr>
             <a:r>
-              <a:rPr sz="1100" b="0">
+              <a:rPr sz="1100" b="0" i="0">
                 <a:solidFill>
                   <a:srgbClr val="1A1A1A"/>
                 </a:solidFill>
@@ -6802,7 +7263,7 @@
               </a:lnSpc>
             </a:pPr>
             <a:r>
-              <a:rPr sz="1100" b="1">
+              <a:rPr sz="1100" b="1" i="0">
                 <a:solidFill>
                   <a:srgbClr val="1E7A3C"/>
                 </a:solidFill>
@@ -6821,14 +7282,14 @@
         </p:nvSpPr>
         <p:spPr>
           <a:xfrm>
-            <a:off x="457200" y="6126480"/>
+            <a:off x="457200" y="6080760"/>
             <a:ext cx="11274552" cy="365760"/>
           </a:xfrm>
           <a:prstGeom prst="rect">
             <a:avLst/>
           </a:prstGeom>
           <a:solidFill>
-            <a:srgbClr val="FAFAFA"/>
+            <a:srgbClr val="1A1A1A"/>
           </a:solidFill>
           <a:ln>
             <a:noFill/>
@@ -6865,7 +7326,7 @@
         </p:nvSpPr>
         <p:spPr>
           <a:xfrm>
-            <a:off x="457200" y="6172200"/>
+            <a:off x="457200" y="6126480"/>
             <a:ext cx="11274552" cy="274320"/>
           </a:xfrm>
           <a:prstGeom prst="rect">
@@ -6885,13 +7346,13 @@
               </a:lnSpc>
             </a:pPr>
             <a:r>
-              <a:rPr sz="1100" b="0">
-                <a:solidFill>
-                  <a:srgbClr val="1A1A1A"/>
-                </a:solidFill>
-                <a:latin typeface="Calibri"/>
-              </a:rPr>
-              <a:t>S3 уступает только по критерию 3 (исполнимость в горизонте перестройки) — адресовано управленческими компенсаторами (Слайд 15)</a:t>
+              <a:rPr sz="1100" b="1" i="0">
+                <a:solidFill>
+                  <a:srgbClr val="FFFFFF"/>
+                </a:solidFill>
+                <a:latin typeface="Calibri"/>
+              </a:rPr>
+              <a:t>S3 уступает только по критерию операционной исполнимости в горизонте перестройки — адресовано компенсаторами (Слайд 15)</a:t>
             </a:r>
           </a:p>
         </p:txBody>
@@ -7093,7 +7554,7 @@
               </a:lnSpc>
             </a:pPr>
             <a:r>
-              <a:rPr sz="1300" b="0">
+              <a:rPr sz="1300" b="0" i="0">
                 <a:solidFill>
                   <a:srgbClr val="595959"/>
                 </a:solidFill>
@@ -7176,7 +7637,7 @@
               </a:lnSpc>
             </a:pPr>
             <a:r>
-              <a:rPr sz="1300" b="1">
+              <a:rPr sz="1300" b="1" i="0">
                 <a:solidFill>
                   <a:srgbClr val="1A1A1A"/>
                 </a:solidFill>
@@ -7215,7 +7676,7 @@
               </a:lnSpc>
             </a:pPr>
             <a:r>
-              <a:rPr sz="1400" b="1">
+              <a:rPr sz="1400" b="1" i="0">
                 <a:solidFill>
                   <a:srgbClr val="ED0028"/>
                 </a:solidFill>
@@ -7254,7 +7715,7 @@
               </a:lnSpc>
             </a:pPr>
             <a:r>
-              <a:rPr sz="950" b="0">
+              <a:rPr sz="950" b="0" i="0">
                 <a:solidFill>
                   <a:srgbClr val="595959"/>
                 </a:solidFill>
@@ -7337,7 +7798,7 @@
               </a:lnSpc>
             </a:pPr>
             <a:r>
-              <a:rPr sz="1300" b="1">
+              <a:rPr sz="1300" b="1" i="0">
                 <a:solidFill>
                   <a:srgbClr val="1A1A1A"/>
                 </a:solidFill>
@@ -7376,7 +7837,7 @@
               </a:lnSpc>
             </a:pPr>
             <a:r>
-              <a:rPr sz="1400" b="1">
+              <a:rPr sz="1400" b="1" i="0">
                 <a:solidFill>
                   <a:srgbClr val="ED0028"/>
                 </a:solidFill>
@@ -7415,7 +7876,7 @@
               </a:lnSpc>
             </a:pPr>
             <a:r>
-              <a:rPr sz="950" b="0">
+              <a:rPr sz="950" b="0" i="0">
                 <a:solidFill>
                   <a:srgbClr val="595959"/>
                 </a:solidFill>
@@ -7498,7 +7959,7 @@
               </a:lnSpc>
             </a:pPr>
             <a:r>
-              <a:rPr sz="1300" b="1">
+              <a:rPr sz="1300" b="1" i="0">
                 <a:solidFill>
                   <a:srgbClr val="1A1A1A"/>
                 </a:solidFill>
@@ -7537,7 +7998,7 @@
               </a:lnSpc>
             </a:pPr>
             <a:r>
-              <a:rPr sz="1400" b="1">
+              <a:rPr sz="1400" b="1" i="0">
                 <a:solidFill>
                   <a:srgbClr val="ED0028"/>
                 </a:solidFill>
@@ -7576,7 +8037,7 @@
               </a:lnSpc>
             </a:pPr>
             <a:r>
-              <a:rPr sz="950" b="0">
+              <a:rPr sz="950" b="0" i="0">
                 <a:solidFill>
                   <a:srgbClr val="595959"/>
                 </a:solidFill>
@@ -7659,7 +8120,7 @@
               </a:lnSpc>
             </a:pPr>
             <a:r>
-              <a:rPr sz="1300" b="1">
+              <a:rPr sz="1300" b="1" i="0">
                 <a:solidFill>
                   <a:srgbClr val="FFFFFF"/>
                 </a:solidFill>
@@ -7698,7 +8159,7 @@
               </a:lnSpc>
             </a:pPr>
             <a:r>
-              <a:rPr sz="1400" b="1">
+              <a:rPr sz="1400" b="1" i="0">
                 <a:solidFill>
                   <a:srgbClr val="FFFFFF"/>
                 </a:solidFill>
@@ -7737,7 +8198,7 @@
               </a:lnSpc>
             </a:pPr>
             <a:r>
-              <a:rPr sz="950" b="0">
+              <a:rPr sz="950" b="0" i="0">
                 <a:solidFill>
                   <a:srgbClr val="FFFFFF"/>
                 </a:solidFill>
@@ -7820,7 +8281,7 @@
               </a:lnSpc>
             </a:pPr>
             <a:r>
-              <a:rPr sz="1300" b="1">
+              <a:rPr sz="1300" b="1" i="0">
                 <a:solidFill>
                   <a:srgbClr val="1A1A1A"/>
                 </a:solidFill>
@@ -7859,7 +8320,7 @@
               </a:lnSpc>
             </a:pPr>
             <a:r>
-              <a:rPr sz="1400" b="1">
+              <a:rPr sz="1400" b="1" i="0">
                 <a:solidFill>
                   <a:srgbClr val="ED0028"/>
                 </a:solidFill>
@@ -7898,7 +8359,7 @@
               </a:lnSpc>
             </a:pPr>
             <a:r>
-              <a:rPr sz="950" b="0">
+              <a:rPr sz="950" b="0" i="0">
                 <a:solidFill>
                   <a:srgbClr val="595959"/>
                 </a:solidFill>
@@ -7917,8 +8378,8 @@
         </p:nvSpPr>
         <p:spPr>
           <a:xfrm>
-            <a:off x="457200" y="4114800"/>
-            <a:ext cx="11274552" cy="2194560"/>
+            <a:off x="457200" y="3931920"/>
+            <a:ext cx="11274552" cy="2057400"/>
           </a:xfrm>
           <a:prstGeom prst="rect">
             <a:avLst/>
@@ -7961,8 +8422,8 @@
         </p:nvSpPr>
         <p:spPr>
           <a:xfrm>
-            <a:off x="777240" y="4297680"/>
-            <a:ext cx="10972800" cy="365760"/>
+            <a:off x="777240" y="4069080"/>
+            <a:ext cx="10972800" cy="320040"/>
           </a:xfrm>
           <a:prstGeom prst="rect">
             <a:avLst/>
@@ -7981,7 +8442,7 @@
               </a:lnSpc>
             </a:pPr>
             <a:r>
-              <a:rPr sz="1400" b="1">
+              <a:rPr sz="1300" b="1" i="0">
                 <a:solidFill>
                   <a:srgbClr val="1A1A1A"/>
                 </a:solidFill>
@@ -8000,7 +8461,7 @@
         </p:nvSpPr>
         <p:spPr>
           <a:xfrm>
-            <a:off x="777240" y="4709160"/>
+            <a:off x="777240" y="4434840"/>
             <a:ext cx="3474720" cy="365760"/>
           </a:xfrm>
           <a:prstGeom prst="rect">
@@ -8020,7 +8481,7 @@
               </a:lnSpc>
             </a:pPr>
             <a:r>
-              <a:rPr sz="1150" b="1">
+              <a:rPr sz="1150" b="1" i="0">
                 <a:solidFill>
                   <a:srgbClr val="ED0028"/>
                 </a:solidFill>
@@ -8039,8 +8500,8 @@
         </p:nvSpPr>
         <p:spPr>
           <a:xfrm>
-            <a:off x="777240" y="5074920"/>
-            <a:ext cx="3474720" cy="1097280"/>
+            <a:off x="777240" y="4800600"/>
+            <a:ext cx="3474720" cy="1143000"/>
           </a:xfrm>
           <a:prstGeom prst="rect">
             <a:avLst/>
@@ -8059,7 +8520,7 @@
               </a:lnSpc>
             </a:pPr>
             <a:r>
-              <a:rPr sz="1050" b="0">
+              <a:rPr sz="1050" b="0" i="0">
                 <a:solidFill>
                   <a:srgbClr val="1A1A1A"/>
                 </a:solidFill>
@@ -8078,7 +8539,7 @@
         </p:nvSpPr>
         <p:spPr>
           <a:xfrm>
-            <a:off x="4480559" y="4709160"/>
+            <a:off x="4480559" y="4434840"/>
             <a:ext cx="3474720" cy="365760"/>
           </a:xfrm>
           <a:prstGeom prst="rect">
@@ -8098,7 +8559,7 @@
               </a:lnSpc>
             </a:pPr>
             <a:r>
-              <a:rPr sz="1150" b="1">
+              <a:rPr sz="1150" b="1" i="0">
                 <a:solidFill>
                   <a:srgbClr val="ED0028"/>
                 </a:solidFill>
@@ -8117,8 +8578,8 @@
         </p:nvSpPr>
         <p:spPr>
           <a:xfrm>
-            <a:off x="4480559" y="5074920"/>
-            <a:ext cx="3474720" cy="1097280"/>
+            <a:off x="4480559" y="4800600"/>
+            <a:ext cx="3474720" cy="1143000"/>
           </a:xfrm>
           <a:prstGeom prst="rect">
             <a:avLst/>
@@ -8137,13 +8598,13 @@
               </a:lnSpc>
             </a:pPr>
             <a:r>
-              <a:rPr sz="1050" b="0">
+              <a:rPr sz="1050" b="0" i="0">
                 <a:solidFill>
                   <a:srgbClr val="1A1A1A"/>
                 </a:solidFill>
                 <a:latin typeface="Calibri"/>
               </a:rPr>
-              <a:t>Каждый режим описан через цель / условия / рычаги / KPI / ограничения — это делает сопоставимыми решения по разным городам</a:t>
+              <a:t>Каждый режим описан через цель, условия, рычаги, KPI, ограничения — это делает сопоставимыми решения по разным городам</a:t>
             </a:r>
           </a:p>
         </p:txBody>
@@ -8156,7 +8617,7 @@
         </p:nvSpPr>
         <p:spPr>
           <a:xfrm>
-            <a:off x="8183879" y="4709160"/>
+            <a:off x="8183879" y="4434840"/>
             <a:ext cx="3474720" cy="365760"/>
           </a:xfrm>
           <a:prstGeom prst="rect">
@@ -8176,7 +8637,7 @@
               </a:lnSpc>
             </a:pPr>
             <a:r>
-              <a:rPr sz="1150" b="1">
+              <a:rPr sz="1150" b="1" i="0">
                 <a:solidFill>
                   <a:srgbClr val="ED0028"/>
                 </a:solidFill>
@@ -8195,8 +8656,8 @@
         </p:nvSpPr>
         <p:spPr>
           <a:xfrm>
-            <a:off x="8183879" y="5074920"/>
-            <a:ext cx="3474720" cy="1097280"/>
+            <a:off x="8183879" y="4800600"/>
+            <a:ext cx="3474720" cy="1143000"/>
           </a:xfrm>
           <a:prstGeom prst="rect">
             <a:avLst/>
@@ -8215,7 +8676,7 @@
               </a:lnSpc>
             </a:pPr>
             <a:r>
-              <a:rPr sz="1050" b="0">
+              <a:rPr sz="1050" b="0" i="0">
                 <a:solidFill>
                   <a:srgbClr val="1A1A1A"/>
                 </a:solidFill>
@@ -8228,7 +8689,90 @@
       </p:sp>
       <p:sp>
         <p:nvSpPr>
-          <p:cNvPr id="33" name="TextBox 32"/>
+          <p:cNvPr id="33" name="Rectangle 32"/>
+          <p:cNvSpPr/>
+          <p:nvPr/>
+        </p:nvSpPr>
+        <p:spPr>
+          <a:xfrm>
+            <a:off x="457200" y="6080760"/>
+            <a:ext cx="11274552" cy="365760"/>
+          </a:xfrm>
+          <a:prstGeom prst="rect">
+            <a:avLst/>
+          </a:prstGeom>
+          <a:solidFill>
+            <a:srgbClr val="1A1A1A"/>
+          </a:solidFill>
+          <a:ln>
+            <a:noFill/>
+          </a:ln>
+          <a:effectLst/>
+        </p:spPr>
+        <p:style>
+          <a:lnRef idx="1">
+            <a:schemeClr val="accent1"/>
+          </a:lnRef>
+          <a:fillRef idx="3">
+            <a:schemeClr val="accent1"/>
+          </a:fillRef>
+          <a:effectRef idx="2">
+            <a:schemeClr val="accent1"/>
+          </a:effectRef>
+          <a:fontRef idx="minor">
+            <a:schemeClr val="lt1"/>
+          </a:fontRef>
+        </p:style>
+        <p:txBody>
+          <a:bodyPr rtlCol="0" anchor="ctr"/>
+          <a:lstStyle/>
+          <a:p>
+            <a:pPr algn="ctr"/>
+          </a:p>
+        </p:txBody>
+      </p:sp>
+      <p:sp>
+        <p:nvSpPr>
+          <p:cNvPr id="34" name="TextBox 33"/>
+          <p:cNvSpPr txBox="1"/>
+          <p:nvPr/>
+        </p:nvSpPr>
+        <p:spPr>
+          <a:xfrm>
+            <a:off x="457200" y="6126480"/>
+            <a:ext cx="11274552" cy="274320"/>
+          </a:xfrm>
+          <a:prstGeom prst="rect">
+            <a:avLst/>
+          </a:prstGeom>
+          <a:noFill/>
+        </p:spPr>
+        <p:txBody>
+          <a:bodyPr wrap="square" lIns="25400" rIns="25400" tIns="25400" bIns="25400">
+            <a:spAutoFit/>
+          </a:bodyPr>
+          <a:lstStyle/>
+          <a:p>
+            <a:pPr algn="ctr">
+              <a:lnSpc>
+                <a:spcPct val="120000"/>
+              </a:lnSpc>
+            </a:pPr>
+            <a:r>
+              <a:rPr sz="1100" b="1" i="0">
+                <a:solidFill>
+                  <a:srgbClr val="FFFFFF"/>
+                </a:solidFill>
+                <a:latin typeface="Calibri"/>
+              </a:rPr>
+              <a:t>S3 — не статическая кластеризация, а воспроизводимая процедура с пересмотром каждый сезон</a:t>
+            </a:r>
+          </a:p>
+        </p:txBody>
+      </p:sp>
+      <p:sp>
+        <p:nvSpPr>
+          <p:cNvPr id="35" name="TextBox 34"/>
           <p:cNvSpPr txBox="1"/>
           <p:nvPr/>
         </p:nvSpPr>
@@ -8262,7 +8806,7 @@
       </p:sp>
       <p:sp>
         <p:nvSpPr>
-          <p:cNvPr id="34" name="TextBox 33"/>
+          <p:cNvPr id="36" name="TextBox 35"/>
           <p:cNvSpPr txBox="1"/>
           <p:nvPr/>
         </p:nvSpPr>
@@ -8511,7 +9055,7 @@
               </a:lnSpc>
             </a:pPr>
             <a:r>
-              <a:rPr sz="3000" b="1">
+              <a:rPr sz="3000" b="1" i="0">
                 <a:solidFill>
                   <a:srgbClr val="FFFFFF"/>
                 </a:solidFill>
@@ -8550,7 +9094,7 @@
               </a:lnSpc>
             </a:pPr>
             <a:r>
-              <a:rPr sz="1500" b="1">
+              <a:rPr sz="1500" b="1" i="0">
                 <a:solidFill>
                   <a:srgbClr val="FFFFFF"/>
                 </a:solidFill>
@@ -8589,7 +9133,7 @@
               </a:lnSpc>
             </a:pPr>
             <a:r>
-              <a:rPr sz="1000" b="0">
+              <a:rPr sz="1000" b="0" i="0">
                 <a:solidFill>
                   <a:srgbClr val="FFFFFF"/>
                 </a:solidFill>
@@ -8628,7 +9172,7 @@
               </a:lnSpc>
             </a:pPr>
             <a:r>
-              <a:rPr sz="1050" b="1">
+              <a:rPr sz="1050" b="1" i="0">
                 <a:solidFill>
                   <a:srgbClr val="ED0028"/>
                 </a:solidFill>
@@ -8667,7 +9211,7 @@
               </a:lnSpc>
             </a:pPr>
             <a:r>
-              <a:rPr sz="1100" b="0">
+              <a:rPr sz="1100" b="0" i="0">
                 <a:solidFill>
                   <a:srgbClr val="1A1A1A"/>
                 </a:solidFill>
@@ -8706,7 +9250,7 @@
               </a:lnSpc>
             </a:pPr>
             <a:r>
-              <a:rPr sz="1050" b="1">
+              <a:rPr sz="1050" b="1" i="0">
                 <a:solidFill>
                   <a:srgbClr val="ED0028"/>
                 </a:solidFill>
@@ -8745,7 +9289,7 @@
               </a:lnSpc>
             </a:pPr>
             <a:r>
-              <a:rPr sz="1100" b="0">
+              <a:rPr sz="1100" b="0" i="0">
                 <a:solidFill>
                   <a:srgbClr val="1A1A1A"/>
                 </a:solidFill>
@@ -8784,7 +9328,7 @@
               </a:lnSpc>
             </a:pPr>
             <a:r>
-              <a:rPr sz="1050" b="1">
+              <a:rPr sz="1050" b="1" i="0">
                 <a:solidFill>
                   <a:srgbClr val="ED0028"/>
                 </a:solidFill>
@@ -8823,7 +9367,7 @@
               </a:lnSpc>
             </a:pPr>
             <a:r>
-              <a:rPr sz="1100" b="0">
+              <a:rPr sz="1100" b="0" i="0">
                 <a:solidFill>
                   <a:srgbClr val="1A1A1A"/>
                 </a:solidFill>
@@ -8862,7 +9406,7 @@
               </a:lnSpc>
             </a:pPr>
             <a:r>
-              <a:rPr sz="1050" b="1">
+              <a:rPr sz="1050" b="1" i="0">
                 <a:solidFill>
                   <a:srgbClr val="ED0028"/>
                 </a:solidFill>
@@ -8901,7 +9445,7 @@
               </a:lnSpc>
             </a:pPr>
             <a:r>
-              <a:rPr sz="1100" b="0">
+              <a:rPr sz="1100" b="0" i="0">
                 <a:solidFill>
                   <a:srgbClr val="1A1A1A"/>
                 </a:solidFill>
@@ -9028,7 +9572,7 @@
               </a:lnSpc>
             </a:pPr>
             <a:r>
-              <a:rPr sz="3000" b="1">
+              <a:rPr sz="3000" b="1" i="0">
                 <a:solidFill>
                   <a:srgbClr val="FFFFFF"/>
                 </a:solidFill>
@@ -9067,7 +9611,7 @@
               </a:lnSpc>
             </a:pPr>
             <a:r>
-              <a:rPr sz="1500" b="1">
+              <a:rPr sz="1500" b="1" i="0">
                 <a:solidFill>
                   <a:srgbClr val="FFFFFF"/>
                 </a:solidFill>
@@ -9106,7 +9650,7 @@
               </a:lnSpc>
             </a:pPr>
             <a:r>
-              <a:rPr sz="1000" b="0">
+              <a:rPr sz="1000" b="0" i="0">
                 <a:solidFill>
                   <a:srgbClr val="FFFFFF"/>
                 </a:solidFill>
@@ -9145,7 +9689,7 @@
               </a:lnSpc>
             </a:pPr>
             <a:r>
-              <a:rPr sz="1050" b="1">
+              <a:rPr sz="1050" b="1" i="0">
                 <a:solidFill>
                   <a:srgbClr val="ED0028"/>
                 </a:solidFill>
@@ -9184,7 +9728,7 @@
               </a:lnSpc>
             </a:pPr>
             <a:r>
-              <a:rPr sz="1100" b="0">
+              <a:rPr sz="1100" b="0" i="0">
                 <a:solidFill>
                   <a:srgbClr val="1A1A1A"/>
                 </a:solidFill>
@@ -9223,7 +9767,7 @@
               </a:lnSpc>
             </a:pPr>
             <a:r>
-              <a:rPr sz="1050" b="1">
+              <a:rPr sz="1050" b="1" i="0">
                 <a:solidFill>
                   <a:srgbClr val="ED0028"/>
                 </a:solidFill>
@@ -9262,7 +9806,7 @@
               </a:lnSpc>
             </a:pPr>
             <a:r>
-              <a:rPr sz="1100" b="0">
+              <a:rPr sz="1100" b="0" i="0">
                 <a:solidFill>
                   <a:srgbClr val="1A1A1A"/>
                 </a:solidFill>
@@ -9301,7 +9845,7 @@
               </a:lnSpc>
             </a:pPr>
             <a:r>
-              <a:rPr sz="1050" b="1">
+              <a:rPr sz="1050" b="1" i="0">
                 <a:solidFill>
                   <a:srgbClr val="ED0028"/>
                 </a:solidFill>
@@ -9340,7 +9884,7 @@
               </a:lnSpc>
             </a:pPr>
             <a:r>
-              <a:rPr sz="1100" b="0">
+              <a:rPr sz="1100" b="0" i="0">
                 <a:solidFill>
                   <a:srgbClr val="1A1A1A"/>
                 </a:solidFill>
@@ -9379,7 +9923,7 @@
               </a:lnSpc>
             </a:pPr>
             <a:r>
-              <a:rPr sz="1050" b="1">
+              <a:rPr sz="1050" b="1" i="0">
                 <a:solidFill>
                   <a:srgbClr val="ED0028"/>
                 </a:solidFill>
@@ -9418,7 +9962,7 @@
               </a:lnSpc>
             </a:pPr>
             <a:r>
-              <a:rPr sz="1100" b="0">
+              <a:rPr sz="1100" b="0" i="0">
                 <a:solidFill>
                   <a:srgbClr val="1A1A1A"/>
                 </a:solidFill>
@@ -9545,7 +10089,7 @@
               </a:lnSpc>
             </a:pPr>
             <a:r>
-              <a:rPr sz="3000" b="1">
+              <a:rPr sz="3000" b="1" i="0">
                 <a:solidFill>
                   <a:srgbClr val="FFFFFF"/>
                 </a:solidFill>
@@ -9584,7 +10128,7 @@
               </a:lnSpc>
             </a:pPr>
             <a:r>
-              <a:rPr sz="1500" b="1">
+              <a:rPr sz="1500" b="1" i="0">
                 <a:solidFill>
                   <a:srgbClr val="FFFFFF"/>
                 </a:solidFill>
@@ -9623,7 +10167,7 @@
               </a:lnSpc>
             </a:pPr>
             <a:r>
-              <a:rPr sz="1000" b="0">
+              <a:rPr sz="1000" b="0" i="0">
                 <a:solidFill>
                   <a:srgbClr val="FFFFFF"/>
                 </a:solidFill>
@@ -9662,7 +10206,7 @@
               </a:lnSpc>
             </a:pPr>
             <a:r>
-              <a:rPr sz="1050" b="1">
+              <a:rPr sz="1050" b="1" i="0">
                 <a:solidFill>
                   <a:srgbClr val="ED0028"/>
                 </a:solidFill>
@@ -9701,7 +10245,7 @@
               </a:lnSpc>
             </a:pPr>
             <a:r>
-              <a:rPr sz="1100" b="0">
+              <a:rPr sz="1100" b="0" i="0">
                 <a:solidFill>
                   <a:srgbClr val="1A1A1A"/>
                 </a:solidFill>
@@ -9740,7 +10284,7 @@
               </a:lnSpc>
             </a:pPr>
             <a:r>
-              <a:rPr sz="1050" b="1">
+              <a:rPr sz="1050" b="1" i="0">
                 <a:solidFill>
                   <a:srgbClr val="ED0028"/>
                 </a:solidFill>
@@ -9779,7 +10323,7 @@
               </a:lnSpc>
             </a:pPr>
             <a:r>
-              <a:rPr sz="1100" b="0">
+              <a:rPr sz="1100" b="0" i="0">
                 <a:solidFill>
                   <a:srgbClr val="1A1A1A"/>
                 </a:solidFill>
@@ -9818,7 +10362,7 @@
               </a:lnSpc>
             </a:pPr>
             <a:r>
-              <a:rPr sz="1050" b="1">
+              <a:rPr sz="1050" b="1" i="0">
                 <a:solidFill>
                   <a:srgbClr val="ED0028"/>
                 </a:solidFill>
@@ -9857,7 +10401,7 @@
               </a:lnSpc>
             </a:pPr>
             <a:r>
-              <a:rPr sz="1100" b="0">
+              <a:rPr sz="1100" b="0" i="0">
                 <a:solidFill>
                   <a:srgbClr val="1A1A1A"/>
                 </a:solidFill>
@@ -9896,7 +10440,7 @@
               </a:lnSpc>
             </a:pPr>
             <a:r>
-              <a:rPr sz="1050" b="1">
+              <a:rPr sz="1050" b="1" i="0">
                 <a:solidFill>
                   <a:srgbClr val="ED0028"/>
                 </a:solidFill>
@@ -9935,7 +10479,7 @@
               </a:lnSpc>
             </a:pPr>
             <a:r>
-              <a:rPr sz="1100" b="0">
+              <a:rPr sz="1100" b="0" i="0">
                 <a:solidFill>
                   <a:srgbClr val="1A1A1A"/>
                 </a:solidFill>
@@ -9948,7 +10492,90 @@
       </p:sp>
       <p:sp>
         <p:nvSpPr>
-          <p:cNvPr id="43" name="TextBox 42"/>
+          <p:cNvPr id="43" name="Rectangle 42"/>
+          <p:cNvSpPr/>
+          <p:nvPr/>
+        </p:nvSpPr>
+        <p:spPr>
+          <a:xfrm>
+            <a:off x="457200" y="6080760"/>
+            <a:ext cx="11274552" cy="365760"/>
+          </a:xfrm>
+          <a:prstGeom prst="rect">
+            <a:avLst/>
+          </a:prstGeom>
+          <a:solidFill>
+            <a:srgbClr val="1A1A1A"/>
+          </a:solidFill>
+          <a:ln>
+            <a:noFill/>
+          </a:ln>
+          <a:effectLst/>
+        </p:spPr>
+        <p:style>
+          <a:lnRef idx="1">
+            <a:schemeClr val="accent1"/>
+          </a:lnRef>
+          <a:fillRef idx="3">
+            <a:schemeClr val="accent1"/>
+          </a:fillRef>
+          <a:effectRef idx="2">
+            <a:schemeClr val="accent1"/>
+          </a:effectRef>
+          <a:fontRef idx="minor">
+            <a:schemeClr val="lt1"/>
+          </a:fontRef>
+        </p:style>
+        <p:txBody>
+          <a:bodyPr rtlCol="0" anchor="ctr"/>
+          <a:lstStyle/>
+          <a:p>
+            <a:pPr algn="ctr"/>
+          </a:p>
+        </p:txBody>
+      </p:sp>
+      <p:sp>
+        <p:nvSpPr>
+          <p:cNvPr id="44" name="TextBox 43"/>
+          <p:cNvSpPr txBox="1"/>
+          <p:nvPr/>
+        </p:nvSpPr>
+        <p:spPr>
+          <a:xfrm>
+            <a:off x="457200" y="6126480"/>
+            <a:ext cx="11274552" cy="274320"/>
+          </a:xfrm>
+          <a:prstGeom prst="rect">
+            <a:avLst/>
+          </a:prstGeom>
+          <a:noFill/>
+        </p:spPr>
+        <p:txBody>
+          <a:bodyPr wrap="square" lIns="25400" rIns="25400" tIns="25400" bIns="25400">
+            <a:spAutoFit/>
+          </a:bodyPr>
+          <a:lstStyle/>
+          <a:p>
+            <a:pPr algn="ctr">
+              <a:lnSpc>
+                <a:spcPct val="120000"/>
+              </a:lnSpc>
+            </a:pPr>
+            <a:r>
+              <a:rPr sz="1100" b="1" i="0">
+                <a:solidFill>
+                  <a:srgbClr val="FFFFFF"/>
+                </a:solidFill>
+                <a:latin typeface="Calibri"/>
+              </a:rPr>
+              <a:t>Однородный набор полей описания делает диагностики разных городов сопоставимыми</a:t>
+            </a:r>
+          </a:p>
+        </p:txBody>
+      </p:sp>
+      <p:sp>
+        <p:nvSpPr>
+          <p:cNvPr id="45" name="TextBox 44"/>
           <p:cNvSpPr txBox="1"/>
           <p:nvPr/>
         </p:nvSpPr>
@@ -9982,7 +10609,7 @@
       </p:sp>
       <p:sp>
         <p:nvSpPr>
-          <p:cNvPr id="44" name="TextBox 43"/>
+          <p:cNvPr id="46" name="TextBox 45"/>
           <p:cNvSpPr txBox="1"/>
           <p:nvPr/>
         </p:nvSpPr>
@@ -10123,8 +10750,457 @@
         </p:nvSpPr>
         <p:spPr>
           <a:xfrm>
-            <a:off x="457200" y="1691640"/>
-            <a:ext cx="5943600" cy="4297680"/>
+            <a:off x="457200" y="1325880"/>
+            <a:ext cx="2715768" cy="365760"/>
+          </a:xfrm>
+          <a:prstGeom prst="rect">
+            <a:avLst/>
+          </a:prstGeom>
+          <a:solidFill>
+            <a:srgbClr val="F2F2F2"/>
+          </a:solidFill>
+          <a:ln>
+            <a:noFill/>
+          </a:ln>
+          <a:effectLst/>
+        </p:spPr>
+        <p:style>
+          <a:lnRef idx="1">
+            <a:schemeClr val="accent1"/>
+          </a:lnRef>
+          <a:fillRef idx="3">
+            <a:schemeClr val="accent1"/>
+          </a:fillRef>
+          <a:effectRef idx="2">
+            <a:schemeClr val="accent1"/>
+          </a:effectRef>
+          <a:fontRef idx="minor">
+            <a:schemeClr val="lt1"/>
+          </a:fontRef>
+        </p:style>
+        <p:txBody>
+          <a:bodyPr rtlCol="0" anchor="ctr"/>
+          <a:lstStyle/>
+          <a:p>
+            <a:pPr algn="ctr"/>
+          </a:p>
+        </p:txBody>
+      </p:sp>
+      <p:sp>
+        <p:nvSpPr>
+          <p:cNvPr id="5" name="TextBox 4"/>
+          <p:cNvSpPr txBox="1"/>
+          <p:nvPr/>
+        </p:nvSpPr>
+        <p:spPr>
+          <a:xfrm>
+            <a:off x="457200" y="1417320"/>
+            <a:ext cx="2715768" cy="228600"/>
+          </a:xfrm>
+          <a:prstGeom prst="rect">
+            <a:avLst/>
+          </a:prstGeom>
+          <a:noFill/>
+        </p:spPr>
+        <p:txBody>
+          <a:bodyPr wrap="square" lIns="25400" rIns="25400" tIns="25400" bIns="25400">
+            <a:spAutoFit/>
+          </a:bodyPr>
+          <a:lstStyle/>
+          <a:p>
+            <a:pPr algn="ctr">
+              <a:lnSpc>
+                <a:spcPct val="120000"/>
+              </a:lnSpc>
+            </a:pPr>
+            <a:r>
+              <a:rPr sz="1000" b="1" i="0">
+                <a:solidFill>
+                  <a:srgbClr val="1A1A1A"/>
+                </a:solidFill>
+                <a:latin typeface="Calibri"/>
+              </a:rPr>
+              <a:t>Сигнал дефицита</a:t>
+            </a:r>
+          </a:p>
+        </p:txBody>
+      </p:sp>
+      <p:sp>
+        <p:nvSpPr>
+          <p:cNvPr id="6" name="TextBox 5"/>
+          <p:cNvSpPr txBox="1"/>
+          <p:nvPr/>
+        </p:nvSpPr>
+        <p:spPr>
+          <a:xfrm>
+            <a:off x="3182112" y="1389888"/>
+            <a:ext cx="118872" cy="274320"/>
+          </a:xfrm>
+          <a:prstGeom prst="rect">
+            <a:avLst/>
+          </a:prstGeom>
+          <a:noFill/>
+        </p:spPr>
+        <p:txBody>
+          <a:bodyPr wrap="square" lIns="25400" rIns="25400" tIns="25400" bIns="25400">
+            <a:spAutoFit/>
+          </a:bodyPr>
+          <a:lstStyle/>
+          <a:p>
+            <a:pPr algn="ctr">
+              <a:lnSpc>
+                <a:spcPct val="120000"/>
+              </a:lnSpc>
+            </a:pPr>
+            <a:r>
+              <a:rPr sz="1400" b="1" i="0">
+                <a:solidFill>
+                  <a:srgbClr val="ED0028"/>
+                </a:solidFill>
+                <a:latin typeface="Calibri"/>
+              </a:rPr>
+              <a:t>→</a:t>
+            </a:r>
+          </a:p>
+        </p:txBody>
+      </p:sp>
+      <p:sp>
+        <p:nvSpPr>
+          <p:cNvPr id="7" name="Rectangle 6"/>
+          <p:cNvSpPr/>
+          <p:nvPr/>
+        </p:nvSpPr>
+        <p:spPr>
+          <a:xfrm>
+            <a:off x="3310128" y="1325880"/>
+            <a:ext cx="2715768" cy="365760"/>
+          </a:xfrm>
+          <a:prstGeom prst="rect">
+            <a:avLst/>
+          </a:prstGeom>
+          <a:solidFill>
+            <a:srgbClr val="F2F2F2"/>
+          </a:solidFill>
+          <a:ln>
+            <a:noFill/>
+          </a:ln>
+          <a:effectLst/>
+        </p:spPr>
+        <p:style>
+          <a:lnRef idx="1">
+            <a:schemeClr val="accent1"/>
+          </a:lnRef>
+          <a:fillRef idx="3">
+            <a:schemeClr val="accent1"/>
+          </a:fillRef>
+          <a:effectRef idx="2">
+            <a:schemeClr val="accent1"/>
+          </a:effectRef>
+          <a:fontRef idx="minor">
+            <a:schemeClr val="lt1"/>
+          </a:fontRef>
+        </p:style>
+        <p:txBody>
+          <a:bodyPr rtlCol="0" anchor="ctr"/>
+          <a:lstStyle/>
+          <a:p>
+            <a:pPr algn="ctr"/>
+          </a:p>
+        </p:txBody>
+      </p:sp>
+      <p:sp>
+        <p:nvSpPr>
+          <p:cNvPr id="8" name="TextBox 7"/>
+          <p:cNvSpPr txBox="1"/>
+          <p:nvPr/>
+        </p:nvSpPr>
+        <p:spPr>
+          <a:xfrm>
+            <a:off x="3310128" y="1417320"/>
+            <a:ext cx="2715768" cy="228600"/>
+          </a:xfrm>
+          <a:prstGeom prst="rect">
+            <a:avLst/>
+          </a:prstGeom>
+          <a:noFill/>
+        </p:spPr>
+        <p:txBody>
+          <a:bodyPr wrap="square" lIns="25400" rIns="25400" tIns="25400" bIns="25400">
+            <a:spAutoFit/>
+          </a:bodyPr>
+          <a:lstStyle/>
+          <a:p>
+            <a:pPr algn="ctr">
+              <a:lnSpc>
+                <a:spcPct val="120000"/>
+              </a:lnSpc>
+            </a:pPr>
+            <a:r>
+              <a:rPr sz="1000" b="1" i="0">
+                <a:solidFill>
+                  <a:srgbClr val="1A1A1A"/>
+                </a:solidFill>
+                <a:latin typeface="Calibri"/>
+              </a:rPr>
+              <a:t>Отбор точки и окна</a:t>
+            </a:r>
+          </a:p>
+        </p:txBody>
+      </p:sp>
+      <p:sp>
+        <p:nvSpPr>
+          <p:cNvPr id="9" name="TextBox 8"/>
+          <p:cNvSpPr txBox="1"/>
+          <p:nvPr/>
+        </p:nvSpPr>
+        <p:spPr>
+          <a:xfrm>
+            <a:off x="6035040" y="1389888"/>
+            <a:ext cx="118872" cy="274320"/>
+          </a:xfrm>
+          <a:prstGeom prst="rect">
+            <a:avLst/>
+          </a:prstGeom>
+          <a:noFill/>
+        </p:spPr>
+        <p:txBody>
+          <a:bodyPr wrap="square" lIns="25400" rIns="25400" tIns="25400" bIns="25400">
+            <a:spAutoFit/>
+          </a:bodyPr>
+          <a:lstStyle/>
+          <a:p>
+            <a:pPr algn="ctr">
+              <a:lnSpc>
+                <a:spcPct val="120000"/>
+              </a:lnSpc>
+            </a:pPr>
+            <a:r>
+              <a:rPr sz="1400" b="1" i="0">
+                <a:solidFill>
+                  <a:srgbClr val="ED0028"/>
+                </a:solidFill>
+                <a:latin typeface="Calibri"/>
+              </a:rPr>
+              <a:t>→</a:t>
+            </a:r>
+          </a:p>
+        </p:txBody>
+      </p:sp>
+      <p:sp>
+        <p:nvSpPr>
+          <p:cNvPr id="10" name="Rectangle 9"/>
+          <p:cNvSpPr/>
+          <p:nvPr/>
+        </p:nvSpPr>
+        <p:spPr>
+          <a:xfrm>
+            <a:off x="6163056" y="1325880"/>
+            <a:ext cx="2715768" cy="365760"/>
+          </a:xfrm>
+          <a:prstGeom prst="rect">
+            <a:avLst/>
+          </a:prstGeom>
+          <a:solidFill>
+            <a:srgbClr val="F2F2F2"/>
+          </a:solidFill>
+          <a:ln>
+            <a:noFill/>
+          </a:ln>
+          <a:effectLst/>
+        </p:spPr>
+        <p:style>
+          <a:lnRef idx="1">
+            <a:schemeClr val="accent1"/>
+          </a:lnRef>
+          <a:fillRef idx="3">
+            <a:schemeClr val="accent1"/>
+          </a:fillRef>
+          <a:effectRef idx="2">
+            <a:schemeClr val="accent1"/>
+          </a:effectRef>
+          <a:fontRef idx="minor">
+            <a:schemeClr val="lt1"/>
+          </a:fontRef>
+        </p:style>
+        <p:txBody>
+          <a:bodyPr rtlCol="0" anchor="ctr"/>
+          <a:lstStyle/>
+          <a:p>
+            <a:pPr algn="ctr"/>
+          </a:p>
+        </p:txBody>
+      </p:sp>
+      <p:sp>
+        <p:nvSpPr>
+          <p:cNvPr id="11" name="TextBox 10"/>
+          <p:cNvSpPr txBox="1"/>
+          <p:nvPr/>
+        </p:nvSpPr>
+        <p:spPr>
+          <a:xfrm>
+            <a:off x="6163056" y="1417320"/>
+            <a:ext cx="2715768" cy="228600"/>
+          </a:xfrm>
+          <a:prstGeom prst="rect">
+            <a:avLst/>
+          </a:prstGeom>
+          <a:noFill/>
+        </p:spPr>
+        <p:txBody>
+          <a:bodyPr wrap="square" lIns="25400" rIns="25400" tIns="25400" bIns="25400">
+            <a:spAutoFit/>
+          </a:bodyPr>
+          <a:lstStyle/>
+          <a:p>
+            <a:pPr algn="ctr">
+              <a:lnSpc>
+                <a:spcPct val="120000"/>
+              </a:lnSpc>
+            </a:pPr>
+            <a:r>
+              <a:rPr sz="1000" b="1" i="0">
+                <a:solidFill>
+                  <a:srgbClr val="1A1A1A"/>
+                </a:solidFill>
+                <a:latin typeface="Calibri"/>
+              </a:rPr>
+              <a:t>Выбор стимула</a:t>
+            </a:r>
+          </a:p>
+        </p:txBody>
+      </p:sp>
+      <p:sp>
+        <p:nvSpPr>
+          <p:cNvPr id="12" name="TextBox 11"/>
+          <p:cNvSpPr txBox="1"/>
+          <p:nvPr/>
+        </p:nvSpPr>
+        <p:spPr>
+          <a:xfrm>
+            <a:off x="8887968" y="1389888"/>
+            <a:ext cx="118872" cy="274320"/>
+          </a:xfrm>
+          <a:prstGeom prst="rect">
+            <a:avLst/>
+          </a:prstGeom>
+          <a:noFill/>
+        </p:spPr>
+        <p:txBody>
+          <a:bodyPr wrap="square" lIns="25400" rIns="25400" tIns="25400" bIns="25400">
+            <a:spAutoFit/>
+          </a:bodyPr>
+          <a:lstStyle/>
+          <a:p>
+            <a:pPr algn="ctr">
+              <a:lnSpc>
+                <a:spcPct val="120000"/>
+              </a:lnSpc>
+            </a:pPr>
+            <a:r>
+              <a:rPr sz="1400" b="1" i="0">
+                <a:solidFill>
+                  <a:srgbClr val="ED0028"/>
+                </a:solidFill>
+                <a:latin typeface="Calibri"/>
+              </a:rPr>
+              <a:t>→</a:t>
+            </a:r>
+          </a:p>
+        </p:txBody>
+      </p:sp>
+      <p:sp>
+        <p:nvSpPr>
+          <p:cNvPr id="13" name="Rectangle 12"/>
+          <p:cNvSpPr/>
+          <p:nvPr/>
+        </p:nvSpPr>
+        <p:spPr>
+          <a:xfrm>
+            <a:off x="9015984" y="1325880"/>
+            <a:ext cx="2715768" cy="365760"/>
+          </a:xfrm>
+          <a:prstGeom prst="rect">
+            <a:avLst/>
+          </a:prstGeom>
+          <a:solidFill>
+            <a:srgbClr val="F2F2F2"/>
+          </a:solidFill>
+          <a:ln>
+            <a:noFill/>
+          </a:ln>
+          <a:effectLst/>
+        </p:spPr>
+        <p:style>
+          <a:lnRef idx="1">
+            <a:schemeClr val="accent1"/>
+          </a:lnRef>
+          <a:fillRef idx="3">
+            <a:schemeClr val="accent1"/>
+          </a:fillRef>
+          <a:effectRef idx="2">
+            <a:schemeClr val="accent1"/>
+          </a:effectRef>
+          <a:fontRef idx="minor">
+            <a:schemeClr val="lt1"/>
+          </a:fontRef>
+        </p:style>
+        <p:txBody>
+          <a:bodyPr rtlCol="0" anchor="ctr"/>
+          <a:lstStyle/>
+          <a:p>
+            <a:pPr algn="ctr"/>
+          </a:p>
+        </p:txBody>
+      </p:sp>
+      <p:sp>
+        <p:nvSpPr>
+          <p:cNvPr id="14" name="TextBox 13"/>
+          <p:cNvSpPr txBox="1"/>
+          <p:nvPr/>
+        </p:nvSpPr>
+        <p:spPr>
+          <a:xfrm>
+            <a:off x="9015984" y="1417320"/>
+            <a:ext cx="2715768" cy="228600"/>
+          </a:xfrm>
+          <a:prstGeom prst="rect">
+            <a:avLst/>
+          </a:prstGeom>
+          <a:noFill/>
+        </p:spPr>
+        <p:txBody>
+          <a:bodyPr wrap="square" lIns="25400" rIns="25400" tIns="25400" bIns="25400">
+            <a:spAutoFit/>
+          </a:bodyPr>
+          <a:lstStyle/>
+          <a:p>
+            <a:pPr algn="ctr">
+              <a:lnSpc>
+                <a:spcPct val="120000"/>
+              </a:lnSpc>
+            </a:pPr>
+            <a:r>
+              <a:rPr sz="1000" b="1" i="0">
+                <a:solidFill>
+                  <a:srgbClr val="1A1A1A"/>
+                </a:solidFill>
+                <a:latin typeface="Calibri"/>
+              </a:rPr>
+              <a:t>Доступность восстановлена</a:t>
+            </a:r>
+          </a:p>
+        </p:txBody>
+      </p:sp>
+      <p:sp>
+        <p:nvSpPr>
+          <p:cNvPr id="15" name="Rectangle 14"/>
+          <p:cNvSpPr/>
+          <p:nvPr/>
+        </p:nvSpPr>
+        <p:spPr>
+          <a:xfrm>
+            <a:off x="457200" y="1828800"/>
+            <a:ext cx="5943600" cy="4160520"/>
           </a:xfrm>
           <a:prstGeom prst="rect">
             <a:avLst/>
@@ -10161,13 +11237,13 @@
       </p:sp>
       <p:sp>
         <p:nvSpPr>
-          <p:cNvPr id="5" name="TextBox 4"/>
-          <p:cNvSpPr txBox="1"/>
-          <p:nvPr/>
-        </p:nvSpPr>
-        <p:spPr>
-          <a:xfrm>
-            <a:off x="640080" y="1828800"/>
+          <p:cNvPr id="16" name="TextBox 15"/>
+          <p:cNvSpPr txBox="1"/>
+          <p:nvPr/>
+        </p:nvSpPr>
+        <p:spPr>
+          <a:xfrm>
+            <a:off x="640080" y="1965960"/>
             <a:ext cx="5669280" cy="365760"/>
           </a:xfrm>
           <a:prstGeom prst="rect">
@@ -10187,7 +11263,7 @@
               </a:lnSpc>
             </a:pPr>
             <a:r>
-              <a:rPr sz="1200" b="0">
+              <a:rPr sz="1200" b="0" i="0">
                 <a:solidFill>
                   <a:srgbClr val="595959"/>
                 </a:solidFill>
@@ -10200,13 +11276,13 @@
       </p:sp>
       <p:sp>
         <p:nvSpPr>
-          <p:cNvPr id="6" name="TextBox 5"/>
-          <p:cNvSpPr txBox="1"/>
-          <p:nvPr/>
-        </p:nvSpPr>
-        <p:spPr>
-          <a:xfrm>
-            <a:off x="640080" y="2286000"/>
+          <p:cNvPr id="17" name="TextBox 16"/>
+          <p:cNvSpPr txBox="1"/>
+          <p:nvPr/>
+        </p:nvSpPr>
+        <p:spPr>
+          <a:xfrm>
+            <a:off x="640080" y="2377440"/>
             <a:ext cx="5669280" cy="365760"/>
           </a:xfrm>
           <a:prstGeom prst="rect">
@@ -10226,7 +11302,7 @@
               </a:lnSpc>
             </a:pPr>
             <a:r>
-              <a:rPr sz="1200" b="1">
+              <a:rPr sz="1200" b="1" i="0">
                 <a:solidFill>
                   <a:srgbClr val="1A1A1A"/>
                 </a:solidFill>
@@ -10239,13 +11315,13 @@
       </p:sp>
       <p:sp>
         <p:nvSpPr>
-          <p:cNvPr id="7" name="TextBox 6"/>
-          <p:cNvSpPr txBox="1"/>
-          <p:nvPr/>
-        </p:nvSpPr>
-        <p:spPr>
-          <a:xfrm>
-            <a:off x="640080" y="2606040"/>
+          <p:cNvPr id="18" name="TextBox 17"/>
+          <p:cNvSpPr txBox="1"/>
+          <p:nvPr/>
+        </p:nvSpPr>
+        <p:spPr>
+          <a:xfrm>
+            <a:off x="640080" y="2697480"/>
             <a:ext cx="5669280" cy="914400"/>
           </a:xfrm>
           <a:prstGeom prst="rect">
@@ -10265,7 +11341,7 @@
               </a:lnSpc>
             </a:pPr>
             <a:r>
-              <a:rPr sz="5800" b="1">
+              <a:rPr sz="5800" b="1" i="0">
                 <a:solidFill>
                   <a:srgbClr val="1A1A1A"/>
                 </a:solidFill>
@@ -10278,13 +11354,13 @@
       </p:sp>
       <p:sp>
         <p:nvSpPr>
-          <p:cNvPr id="8" name="TextBox 7"/>
-          <p:cNvSpPr txBox="1"/>
-          <p:nvPr/>
-        </p:nvSpPr>
-        <p:spPr>
-          <a:xfrm>
-            <a:off x="640080" y="3520440"/>
+          <p:cNvPr id="19" name="TextBox 18"/>
+          <p:cNvSpPr txBox="1"/>
+          <p:nvPr/>
+        </p:nvSpPr>
+        <p:spPr>
+          <a:xfrm>
+            <a:off x="640080" y="3611880"/>
             <a:ext cx="5669280" cy="274320"/>
           </a:xfrm>
           <a:prstGeom prst="rect">
@@ -10304,7 +11380,7 @@
               </a:lnSpc>
             </a:pPr>
             <a:r>
-              <a:rPr sz="1000" b="0">
+              <a:rPr sz="1000" b="0" i="0">
                 <a:solidFill>
                   <a:srgbClr val="595959"/>
                 </a:solidFill>
@@ -10317,7 +11393,7 @@
       </p:sp>
       <p:sp>
         <p:nvSpPr>
-          <p:cNvPr id="9" name="TextBox 8"/>
+          <p:cNvPr id="20" name="TextBox 19"/>
           <p:cNvSpPr txBox="1"/>
           <p:nvPr/>
         </p:nvSpPr>
@@ -10343,7 +11419,7 @@
               </a:lnSpc>
             </a:pPr>
             <a:r>
-              <a:rPr sz="1100" b="0">
+              <a:rPr sz="1100" b="0" i="0">
                 <a:solidFill>
                   <a:srgbClr val="595959"/>
                 </a:solidFill>
@@ -10356,13 +11432,13 @@
       </p:sp>
       <p:sp>
         <p:nvSpPr>
-          <p:cNvPr id="10" name="TextBox 9"/>
-          <p:cNvSpPr txBox="1"/>
-          <p:nvPr/>
-        </p:nvSpPr>
-        <p:spPr>
-          <a:xfrm>
-            <a:off x="640080" y="4297680"/>
+          <p:cNvPr id="21" name="TextBox 20"/>
+          <p:cNvSpPr txBox="1"/>
+          <p:nvPr/>
+        </p:nvSpPr>
+        <p:spPr>
+          <a:xfrm>
+            <a:off x="640080" y="4251960"/>
             <a:ext cx="5669280" cy="365760"/>
           </a:xfrm>
           <a:prstGeom prst="rect">
@@ -10382,7 +11458,7 @@
               </a:lnSpc>
             </a:pPr>
             <a:r>
-              <a:rPr sz="1200" b="1">
+              <a:rPr sz="1200" b="1" i="0">
                 <a:solidFill>
                   <a:srgbClr val="1A1A1A"/>
                 </a:solidFill>
@@ -10395,13 +11471,13 @@
       </p:sp>
       <p:sp>
         <p:nvSpPr>
-          <p:cNvPr id="11" name="TextBox 10"/>
-          <p:cNvSpPr txBox="1"/>
-          <p:nvPr/>
-        </p:nvSpPr>
-        <p:spPr>
-          <a:xfrm>
-            <a:off x="640080" y="4617720"/>
+          <p:cNvPr id="22" name="TextBox 21"/>
+          <p:cNvSpPr txBox="1"/>
+          <p:nvPr/>
+        </p:nvSpPr>
+        <p:spPr>
+          <a:xfrm>
+            <a:off x="640080" y="4572000"/>
             <a:ext cx="5669280" cy="914400"/>
           </a:xfrm>
           <a:prstGeom prst="rect">
@@ -10421,7 +11497,7 @@
               </a:lnSpc>
             </a:pPr>
             <a:r>
-              <a:rPr sz="5800" b="1">
+              <a:rPr sz="5800" b="1" i="0">
                 <a:solidFill>
                   <a:srgbClr val="ED0028"/>
                 </a:solidFill>
@@ -10434,13 +11510,13 @@
       </p:sp>
       <p:sp>
         <p:nvSpPr>
-          <p:cNvPr id="12" name="TextBox 11"/>
-          <p:cNvSpPr txBox="1"/>
-          <p:nvPr/>
-        </p:nvSpPr>
-        <p:spPr>
-          <a:xfrm>
-            <a:off x="640080" y="5532120"/>
+          <p:cNvPr id="23" name="TextBox 22"/>
+          <p:cNvSpPr txBox="1"/>
+          <p:nvPr/>
+        </p:nvSpPr>
+        <p:spPr>
+          <a:xfrm>
+            <a:off x="640080" y="5486400"/>
             <a:ext cx="5669280" cy="274320"/>
           </a:xfrm>
           <a:prstGeom prst="rect">
@@ -10460,7 +11536,7 @@
               </a:lnSpc>
             </a:pPr>
             <a:r>
-              <a:rPr sz="1100" b="1">
+              <a:rPr sz="1100" b="1" i="0">
                 <a:solidFill>
                   <a:srgbClr val="ED0028"/>
                 </a:solidFill>
@@ -10473,14 +11549,14 @@
       </p:sp>
       <p:sp>
         <p:nvSpPr>
-          <p:cNvPr id="13" name="TextBox 12"/>
-          <p:cNvSpPr txBox="1"/>
-          <p:nvPr/>
-        </p:nvSpPr>
-        <p:spPr>
-          <a:xfrm>
-            <a:off x="6766560" y="1691640"/>
-            <a:ext cx="5029200" cy="365760"/>
+          <p:cNvPr id="24" name="TextBox 23"/>
+          <p:cNvSpPr txBox="1"/>
+          <p:nvPr/>
+        </p:nvSpPr>
+        <p:spPr>
+          <a:xfrm>
+            <a:off x="6766560" y="1828800"/>
+            <a:ext cx="5029200" cy="274320"/>
           </a:xfrm>
           <a:prstGeom prst="rect">
             <a:avLst/>
@@ -10499,27 +11575,27 @@
               </a:lnSpc>
             </a:pPr>
             <a:r>
-              <a:rPr sz="1400" b="1">
+              <a:rPr sz="1200" b="1" i="0">
                 <a:solidFill>
                   <a:srgbClr val="1A1A1A"/>
                 </a:solidFill>
                 <a:latin typeface="Calibri"/>
               </a:rPr>
-              <a:t>Три механизма УПС</a:t>
-            </a:r>
-          </a:p>
-        </p:txBody>
-      </p:sp>
-      <p:sp>
-        <p:nvSpPr>
-          <p:cNvPr id="14" name="Rectangle 13"/>
+              <a:t>Три механизма УПС (шаг «Выбор стимула»)</a:t>
+            </a:r>
+          </a:p>
+        </p:txBody>
+      </p:sp>
+      <p:sp>
+        <p:nvSpPr>
+          <p:cNvPr id="25" name="Rectangle 24"/>
           <p:cNvSpPr/>
           <p:nvPr/>
         </p:nvSpPr>
         <p:spPr>
           <a:xfrm>
-            <a:off x="6766560" y="2148840"/>
-            <a:ext cx="5029200" cy="1234440"/>
+            <a:off x="6766560" y="2240280"/>
+            <a:ext cx="5029200" cy="1143000"/>
           </a:xfrm>
           <a:prstGeom prst="rect">
             <a:avLst/>
@@ -10556,13 +11632,13 @@
       </p:sp>
       <p:sp>
         <p:nvSpPr>
-          <p:cNvPr id="15" name="Oval 14"/>
+          <p:cNvPr id="26" name="Oval 25"/>
           <p:cNvSpPr/>
           <p:nvPr/>
         </p:nvSpPr>
         <p:spPr>
           <a:xfrm>
-            <a:off x="6903720" y="2423160"/>
+            <a:off x="6903720" y="2468880"/>
             <a:ext cx="685800" cy="685800"/>
           </a:xfrm>
           <a:prstGeom prst="ellipse">
@@ -10608,13 +11684,13 @@
       </p:sp>
       <p:sp>
         <p:nvSpPr>
-          <p:cNvPr id="16" name="TextBox 15"/>
-          <p:cNvSpPr txBox="1"/>
-          <p:nvPr/>
-        </p:nvSpPr>
-        <p:spPr>
-          <a:xfrm>
-            <a:off x="7772400" y="2331720"/>
+          <p:cNvPr id="27" name="TextBox 26"/>
+          <p:cNvSpPr txBox="1"/>
+          <p:nvPr/>
+        </p:nvSpPr>
+        <p:spPr>
+          <a:xfrm>
+            <a:off x="7772400" y="2377440"/>
             <a:ext cx="3931920" cy="365760"/>
           </a:xfrm>
           <a:prstGeom prst="rect">
@@ -10634,7 +11710,7 @@
               </a:lnSpc>
             </a:pPr>
             <a:r>
-              <a:rPr sz="1200" b="1">
+              <a:rPr sz="1200" b="1" i="0">
                 <a:solidFill>
                   <a:srgbClr val="1A1A1A"/>
                 </a:solidFill>
@@ -10647,14 +11723,14 @@
       </p:sp>
       <p:sp>
         <p:nvSpPr>
-          <p:cNvPr id="17" name="TextBox 16"/>
-          <p:cNvSpPr txBox="1"/>
-          <p:nvPr/>
-        </p:nvSpPr>
-        <p:spPr>
-          <a:xfrm>
-            <a:off x="7772400" y="2697480"/>
-            <a:ext cx="3931920" cy="640080"/>
+          <p:cNvPr id="28" name="TextBox 27"/>
+          <p:cNvSpPr txBox="1"/>
+          <p:nvPr/>
+        </p:nvSpPr>
+        <p:spPr>
+          <a:xfrm>
+            <a:off x="7772400" y="2743200"/>
+            <a:ext cx="3931920" cy="594360"/>
           </a:xfrm>
           <a:prstGeom prst="rect">
             <a:avLst/>
@@ -10673,7 +11749,7 @@
               </a:lnSpc>
             </a:pPr>
             <a:r>
-              <a:rPr sz="1000" b="0">
+              <a:rPr sz="1000" b="0" i="0">
                 <a:solidFill>
                   <a:srgbClr val="595959"/>
                 </a:solidFill>
@@ -10686,14 +11762,14 @@
       </p:sp>
       <p:sp>
         <p:nvSpPr>
-          <p:cNvPr id="18" name="Rectangle 17"/>
+          <p:cNvPr id="29" name="Rectangle 28"/>
           <p:cNvSpPr/>
           <p:nvPr/>
         </p:nvSpPr>
         <p:spPr>
           <a:xfrm>
             <a:off x="6766560" y="3474720"/>
-            <a:ext cx="5029200" cy="1234440"/>
+            <a:ext cx="5029200" cy="1143000"/>
           </a:xfrm>
           <a:prstGeom prst="rect">
             <a:avLst/>
@@ -10730,13 +11806,13 @@
       </p:sp>
       <p:sp>
         <p:nvSpPr>
-          <p:cNvPr id="19" name="Oval 18"/>
+          <p:cNvPr id="30" name="Oval 29"/>
           <p:cNvSpPr/>
           <p:nvPr/>
         </p:nvSpPr>
         <p:spPr>
           <a:xfrm>
-            <a:off x="6903720" y="3749039"/>
+            <a:off x="6903720" y="3703320"/>
             <a:ext cx="685800" cy="685800"/>
           </a:xfrm>
           <a:prstGeom prst="ellipse">
@@ -10782,13 +11858,13 @@
       </p:sp>
       <p:sp>
         <p:nvSpPr>
-          <p:cNvPr id="20" name="TextBox 19"/>
-          <p:cNvSpPr txBox="1"/>
-          <p:nvPr/>
-        </p:nvSpPr>
-        <p:spPr>
-          <a:xfrm>
-            <a:off x="7772400" y="3657600"/>
+          <p:cNvPr id="31" name="TextBox 30"/>
+          <p:cNvSpPr txBox="1"/>
+          <p:nvPr/>
+        </p:nvSpPr>
+        <p:spPr>
+          <a:xfrm>
+            <a:off x="7772400" y="3611880"/>
             <a:ext cx="3931920" cy="365760"/>
           </a:xfrm>
           <a:prstGeom prst="rect">
@@ -10808,7 +11884,7 @@
               </a:lnSpc>
             </a:pPr>
             <a:r>
-              <a:rPr sz="1200" b="1">
+              <a:rPr sz="1200" b="1" i="0">
                 <a:solidFill>
                   <a:srgbClr val="1A1A1A"/>
                 </a:solidFill>
@@ -10821,14 +11897,14 @@
       </p:sp>
       <p:sp>
         <p:nvSpPr>
-          <p:cNvPr id="21" name="TextBox 20"/>
-          <p:cNvSpPr txBox="1"/>
-          <p:nvPr/>
-        </p:nvSpPr>
-        <p:spPr>
-          <a:xfrm>
-            <a:off x="7772400" y="4023359"/>
-            <a:ext cx="3931920" cy="640080"/>
+          <p:cNvPr id="32" name="TextBox 31"/>
+          <p:cNvSpPr txBox="1"/>
+          <p:nvPr/>
+        </p:nvSpPr>
+        <p:spPr>
+          <a:xfrm>
+            <a:off x="7772400" y="3977640"/>
+            <a:ext cx="3931920" cy="594360"/>
           </a:xfrm>
           <a:prstGeom prst="rect">
             <a:avLst/>
@@ -10847,7 +11923,7 @@
               </a:lnSpc>
             </a:pPr>
             <a:r>
-              <a:rPr sz="1000" b="0">
+              <a:rPr sz="1000" b="0" i="0">
                 <a:solidFill>
                   <a:srgbClr val="595959"/>
                 </a:solidFill>
@@ -10860,14 +11936,14 @@
       </p:sp>
       <p:sp>
         <p:nvSpPr>
-          <p:cNvPr id="22" name="Rectangle 21"/>
+          <p:cNvPr id="33" name="Rectangle 32"/>
           <p:cNvSpPr/>
           <p:nvPr/>
         </p:nvSpPr>
         <p:spPr>
           <a:xfrm>
-            <a:off x="6766560" y="4800600"/>
-            <a:ext cx="5029200" cy="1234440"/>
+            <a:off x="6766560" y="4709160"/>
+            <a:ext cx="5029200" cy="1143000"/>
           </a:xfrm>
           <a:prstGeom prst="rect">
             <a:avLst/>
@@ -10904,13 +11980,13 @@
       </p:sp>
       <p:sp>
         <p:nvSpPr>
-          <p:cNvPr id="23" name="Oval 22"/>
+          <p:cNvPr id="34" name="Oval 33"/>
           <p:cNvSpPr/>
           <p:nvPr/>
         </p:nvSpPr>
         <p:spPr>
           <a:xfrm>
-            <a:off x="6903720" y="5074920"/>
+            <a:off x="6903720" y="4937760"/>
             <a:ext cx="685800" cy="685800"/>
           </a:xfrm>
           <a:prstGeom prst="ellipse">
@@ -10956,13 +12032,13 @@
       </p:sp>
       <p:sp>
         <p:nvSpPr>
-          <p:cNvPr id="24" name="TextBox 23"/>
-          <p:cNvSpPr txBox="1"/>
-          <p:nvPr/>
-        </p:nvSpPr>
-        <p:spPr>
-          <a:xfrm>
-            <a:off x="7772400" y="4983480"/>
+          <p:cNvPr id="35" name="TextBox 34"/>
+          <p:cNvSpPr txBox="1"/>
+          <p:nvPr/>
+        </p:nvSpPr>
+        <p:spPr>
+          <a:xfrm>
+            <a:off x="7772400" y="4846320"/>
             <a:ext cx="3931920" cy="365760"/>
           </a:xfrm>
           <a:prstGeom prst="rect">
@@ -10982,7 +12058,7 @@
               </a:lnSpc>
             </a:pPr>
             <a:r>
-              <a:rPr sz="1200" b="1">
+              <a:rPr sz="1200" b="1" i="0">
                 <a:solidFill>
                   <a:srgbClr val="1A1A1A"/>
                 </a:solidFill>
@@ -10995,14 +12071,14 @@
       </p:sp>
       <p:sp>
         <p:nvSpPr>
-          <p:cNvPr id="25" name="TextBox 24"/>
-          <p:cNvSpPr txBox="1"/>
-          <p:nvPr/>
-        </p:nvSpPr>
-        <p:spPr>
-          <a:xfrm>
-            <a:off x="7772400" y="5349240"/>
-            <a:ext cx="3931920" cy="640080"/>
+          <p:cNvPr id="36" name="TextBox 35"/>
+          <p:cNvSpPr txBox="1"/>
+          <p:nvPr/>
+        </p:nvSpPr>
+        <p:spPr>
+          <a:xfrm>
+            <a:off x="7772400" y="5212080"/>
+            <a:ext cx="3931920" cy="594360"/>
           </a:xfrm>
           <a:prstGeom prst="rect">
             <a:avLst/>
@@ -11021,7 +12097,7 @@
               </a:lnSpc>
             </a:pPr>
             <a:r>
-              <a:rPr sz="1000" b="0">
+              <a:rPr sz="1000" b="0" i="0">
                 <a:solidFill>
                   <a:srgbClr val="595959"/>
                 </a:solidFill>
@@ -11034,14 +12110,14 @@
       </p:sp>
       <p:sp>
         <p:nvSpPr>
-          <p:cNvPr id="26" name="Rectangle 25"/>
+          <p:cNvPr id="37" name="Rectangle 36"/>
           <p:cNvSpPr/>
           <p:nvPr/>
         </p:nvSpPr>
         <p:spPr>
           <a:xfrm>
             <a:off x="457200" y="6080760"/>
-            <a:ext cx="11274552" cy="411480"/>
+            <a:ext cx="11274552" cy="365760"/>
           </a:xfrm>
           <a:prstGeom prst="rect">
             <a:avLst/>
@@ -11078,14 +12154,14 @@
       </p:sp>
       <p:sp>
         <p:nvSpPr>
-          <p:cNvPr id="27" name="TextBox 26"/>
+          <p:cNvPr id="38" name="TextBox 37"/>
           <p:cNvSpPr txBox="1"/>
           <p:nvPr/>
         </p:nvSpPr>
         <p:spPr>
           <a:xfrm>
             <a:off x="457200" y="6126480"/>
-            <a:ext cx="11274552" cy="365760"/>
+            <a:ext cx="11274552" cy="274320"/>
           </a:xfrm>
           <a:prstGeom prst="rect">
             <a:avLst/>
@@ -11104,20 +12180,20 @@
               </a:lnSpc>
             </a:pPr>
             <a:r>
-              <a:rPr sz="1200" b="0">
+              <a:rPr sz="1100" b="1" i="0">
                 <a:solidFill>
                   <a:srgbClr val="FFFFFF"/>
                 </a:solidFill>
                 <a:latin typeface="Calibri"/>
               </a:rPr>
-              <a:t>УПС применяется в режимах R2 и R3 — снижает потребность в физической ребалансировке, не отменяя её полностью</a:t>
-            </a:r>
-          </a:p>
-        </p:txBody>
-      </p:sp>
-      <p:sp>
-        <p:nvSpPr>
-          <p:cNvPr id="28" name="TextBox 27"/>
+              <a:t>УПС применяется в режимах R2 и R3, снижает физическую ребалансировку, не отменяя её полностью</a:t>
+            </a:r>
+          </a:p>
+        </p:txBody>
+      </p:sp>
+      <p:sp>
+        <p:nvSpPr>
+          <p:cNvPr id="39" name="TextBox 38"/>
           <p:cNvSpPr txBox="1"/>
           <p:nvPr/>
         </p:nvSpPr>
@@ -11151,7 +12227,7 @@
       </p:sp>
       <p:sp>
         <p:nvSpPr>
-          <p:cNvPr id="29" name="TextBox 28"/>
+          <p:cNvPr id="40" name="TextBox 39"/>
           <p:cNvSpPr txBox="1"/>
           <p:nvPr/>
         </p:nvSpPr>
@@ -11312,7 +12388,7 @@
               </a:lnSpc>
             </a:pPr>
             <a:r>
-              <a:rPr sz="1200" b="0">
+              <a:rPr sz="1200" b="0" i="0">
                 <a:solidFill>
                   <a:srgbClr val="595959"/>
                 </a:solidFill>
@@ -11429,7 +12505,7 @@
               </a:lnSpc>
             </a:pPr>
             <a:r>
-              <a:rPr sz="1100" b="1">
+              <a:rPr sz="1100" b="1" i="0">
                 <a:solidFill>
                   <a:srgbClr val="C01A1A"/>
                 </a:solidFill>
@@ -11468,7 +12544,7 @@
               </a:lnSpc>
             </a:pPr>
             <a:r>
-              <a:rPr sz="850" b="0">
+              <a:rPr sz="850" b="0" i="0">
                 <a:solidFill>
                   <a:srgbClr val="1A1A1A"/>
                 </a:solidFill>
@@ -11550,7 +12626,7 @@
               </a:lnSpc>
             </a:pPr>
             <a:r>
-              <a:rPr sz="1100" b="1">
+              <a:rPr sz="1100" b="1" i="0">
                 <a:solidFill>
                   <a:srgbClr val="C01A1A"/>
                 </a:solidFill>
@@ -11589,7 +12665,7 @@
               </a:lnSpc>
             </a:pPr>
             <a:r>
-              <a:rPr sz="850" b="0">
+              <a:rPr sz="850" b="0" i="0">
                 <a:solidFill>
                   <a:srgbClr val="1A1A1A"/>
                 </a:solidFill>
@@ -11671,7 +12747,7 @@
               </a:lnSpc>
             </a:pPr>
             <a:r>
-              <a:rPr sz="1100" b="1">
+              <a:rPr sz="1100" b="1" i="0">
                 <a:solidFill>
                   <a:srgbClr val="C01A1A"/>
                 </a:solidFill>
@@ -11710,7 +12786,7 @@
               </a:lnSpc>
             </a:pPr>
             <a:r>
-              <a:rPr sz="850" b="0">
+              <a:rPr sz="850" b="0" i="0">
                 <a:solidFill>
                   <a:srgbClr val="1A1A1A"/>
                 </a:solidFill>
@@ -11792,7 +12868,7 @@
               </a:lnSpc>
             </a:pPr>
             <a:r>
-              <a:rPr sz="1100" b="1">
+              <a:rPr sz="1100" b="1" i="0">
                 <a:solidFill>
                   <a:srgbClr val="C01A1A"/>
                 </a:solidFill>
@@ -11831,7 +12907,7 @@
               </a:lnSpc>
             </a:pPr>
             <a:r>
-              <a:rPr sz="850" b="0">
+              <a:rPr sz="850" b="0" i="0">
                 <a:solidFill>
                   <a:srgbClr val="1A1A1A"/>
                 </a:solidFill>
@@ -11913,7 +12989,7 @@
               </a:lnSpc>
             </a:pPr>
             <a:r>
-              <a:rPr sz="1100" b="1">
+              <a:rPr sz="1100" b="1" i="0">
                 <a:solidFill>
                   <a:srgbClr val="1E7A3C"/>
                 </a:solidFill>
@@ -11952,7 +13028,7 @@
               </a:lnSpc>
             </a:pPr>
             <a:r>
-              <a:rPr sz="850" b="0">
+              <a:rPr sz="850" b="0" i="0">
                 <a:solidFill>
                   <a:srgbClr val="1A1A1A"/>
                 </a:solidFill>
@@ -12034,7 +13110,7 @@
               </a:lnSpc>
             </a:pPr>
             <a:r>
-              <a:rPr sz="1100" b="1">
+              <a:rPr sz="1100" b="1" i="0">
                 <a:solidFill>
                   <a:srgbClr val="1E7A3C"/>
                 </a:solidFill>
@@ -12073,7 +13149,7 @@
               </a:lnSpc>
             </a:pPr>
             <a:r>
-              <a:rPr sz="850" b="0">
+              <a:rPr sz="850" b="0" i="0">
                 <a:solidFill>
                   <a:srgbClr val="1A1A1A"/>
                 </a:solidFill>
@@ -12155,7 +13231,7 @@
               </a:lnSpc>
             </a:pPr>
             <a:r>
-              <a:rPr sz="1100" b="1">
+              <a:rPr sz="1100" b="1" i="0">
                 <a:solidFill>
                   <a:srgbClr val="1E7A3C"/>
                 </a:solidFill>
@@ -12194,7 +13270,7 @@
               </a:lnSpc>
             </a:pPr>
             <a:r>
-              <a:rPr sz="850" b="0">
+              <a:rPr sz="850" b="0" i="0">
                 <a:solidFill>
                   <a:srgbClr val="1A1A1A"/>
                 </a:solidFill>
@@ -12276,7 +13352,7 @@
               </a:lnSpc>
             </a:pPr>
             <a:r>
-              <a:rPr sz="1100" b="1">
+              <a:rPr sz="1100" b="1" i="0">
                 <a:solidFill>
                   <a:srgbClr val="1E7A3C"/>
                 </a:solidFill>
@@ -12315,7 +13391,7 @@
               </a:lnSpc>
             </a:pPr>
             <a:r>
-              <a:rPr sz="850" b="0">
+              <a:rPr sz="850" b="0" i="0">
                 <a:solidFill>
                   <a:srgbClr val="1A1A1A"/>
                 </a:solidFill>
@@ -12397,7 +13473,7 @@
               </a:lnSpc>
             </a:pPr>
             <a:r>
-              <a:rPr sz="1100" b="1">
+              <a:rPr sz="1100" b="1" i="0">
                 <a:solidFill>
                   <a:srgbClr val="ED0028"/>
                 </a:solidFill>
@@ -12436,7 +13512,7 @@
               </a:lnSpc>
             </a:pPr>
             <a:r>
-              <a:rPr sz="850" b="1">
+              <a:rPr sz="850" b="1" i="0">
                 <a:solidFill>
                   <a:srgbClr val="ED0028"/>
                 </a:solidFill>
@@ -12519,7 +13595,7 @@
               </a:lnSpc>
             </a:pPr>
             <a:r>
-              <a:rPr sz="1100" b="1">
+              <a:rPr sz="1100" b="1" i="0">
                 <a:solidFill>
                   <a:srgbClr val="595959"/>
                 </a:solidFill>
@@ -12558,7 +13634,7 @@
               </a:lnSpc>
             </a:pPr>
             <a:r>
-              <a:rPr sz="950" b="0">
+              <a:rPr sz="950" b="0" i="0">
                 <a:solidFill>
                   <a:srgbClr val="595959"/>
                 </a:solidFill>
@@ -12597,7 +13673,7 @@
               </a:lnSpc>
             </a:pPr>
             <a:r>
-              <a:rPr sz="1600" b="1">
+              <a:rPr sz="1600" b="1" i="0">
                 <a:solidFill>
                   <a:srgbClr val="ED0028"/>
                 </a:solidFill>
@@ -12636,7 +13712,7 @@
               </a:lnSpc>
             </a:pPr>
             <a:r>
-              <a:rPr sz="850" b="0">
+              <a:rPr sz="850" b="0" i="0">
                 <a:solidFill>
                   <a:srgbClr val="595959"/>
                 </a:solidFill>
@@ -12675,7 +13751,7 @@
               </a:lnSpc>
             </a:pPr>
             <a:r>
-              <a:rPr sz="950" b="0">
+              <a:rPr sz="950" b="0" i="0">
                 <a:solidFill>
                   <a:srgbClr val="595959"/>
                 </a:solidFill>
@@ -12714,7 +13790,7 @@
               </a:lnSpc>
             </a:pPr>
             <a:r>
-              <a:rPr sz="1600" b="1">
+              <a:rPr sz="1600" b="1" i="0">
                 <a:solidFill>
                   <a:srgbClr val="ED0028"/>
                 </a:solidFill>
@@ -12753,7 +13829,7 @@
               </a:lnSpc>
             </a:pPr>
             <a:r>
-              <a:rPr sz="850" b="0">
+              <a:rPr sz="850" b="0" i="0">
                 <a:solidFill>
                   <a:srgbClr val="595959"/>
                 </a:solidFill>
@@ -12792,7 +13868,7 @@
               </a:lnSpc>
             </a:pPr>
             <a:r>
-              <a:rPr sz="950" b="0">
+              <a:rPr sz="950" b="0" i="0">
                 <a:solidFill>
                   <a:srgbClr val="595959"/>
                 </a:solidFill>
@@ -12831,7 +13907,7 @@
               </a:lnSpc>
             </a:pPr>
             <a:r>
-              <a:rPr sz="1600" b="1">
+              <a:rPr sz="1600" b="1" i="0">
                 <a:solidFill>
                   <a:srgbClr val="ED0028"/>
                 </a:solidFill>
@@ -12870,7 +13946,7 @@
               </a:lnSpc>
             </a:pPr>
             <a:r>
-              <a:rPr sz="850" b="0">
+              <a:rPr sz="850" b="0" i="0">
                 <a:solidFill>
                   <a:srgbClr val="595959"/>
                 </a:solidFill>
@@ -12909,7 +13985,7 @@
               </a:lnSpc>
             </a:pPr>
             <a:r>
-              <a:rPr sz="950" b="0">
+              <a:rPr sz="950" b="0" i="0">
                 <a:solidFill>
                   <a:srgbClr val="595959"/>
                 </a:solidFill>
@@ -12948,7 +14024,7 @@
               </a:lnSpc>
             </a:pPr>
             <a:r>
-              <a:rPr sz="1600" b="1">
+              <a:rPr sz="1600" b="1" i="0">
                 <a:solidFill>
                   <a:srgbClr val="ED0028"/>
                 </a:solidFill>
@@ -12987,7 +14063,7 @@
               </a:lnSpc>
             </a:pPr>
             <a:r>
-              <a:rPr sz="850" b="0">
+              <a:rPr sz="850" b="0" i="0">
                 <a:solidFill>
                   <a:srgbClr val="595959"/>
                 </a:solidFill>
@@ -13000,20 +14076,59 @@
       </p:sp>
       <p:sp>
         <p:nvSpPr>
-          <p:cNvPr id="47" name="Rectangle 46"/>
+          <p:cNvPr id="47" name="TextBox 46"/>
+          <p:cNvSpPr txBox="1"/>
+          <p:nvPr/>
+        </p:nvSpPr>
+        <p:spPr>
+          <a:xfrm>
+            <a:off x="457200" y="5760720"/>
+            <a:ext cx="11247120" cy="274320"/>
+          </a:xfrm>
+          <a:prstGeom prst="rect">
+            <a:avLst/>
+          </a:prstGeom>
+          <a:noFill/>
+        </p:spPr>
+        <p:txBody>
+          <a:bodyPr wrap="square" lIns="25400" rIns="25400" tIns="25400" bIns="25400">
+            <a:spAutoFit/>
+          </a:bodyPr>
+          <a:lstStyle/>
+          <a:p>
+            <a:pPr algn="ctr">
+              <a:lnSpc>
+                <a:spcPct val="120000"/>
+              </a:lnSpc>
+            </a:pPr>
+            <a:r>
+              <a:rPr sz="1100" b="0" i="0">
+                <a:solidFill>
+                  <a:srgbClr val="595959"/>
+                </a:solidFill>
+                <a:latin typeface="Calibri"/>
+              </a:rPr>
+              <a:t>Чувствительность год 1:  −14 / +25 / +64 млн ₽</a:t>
+            </a:r>
+          </a:p>
+        </p:txBody>
+      </p:sp>
+      <p:sp>
+        <p:nvSpPr>
+          <p:cNvPr id="48" name="Rectangle 47"/>
           <p:cNvSpPr/>
           <p:nvPr/>
         </p:nvSpPr>
         <p:spPr>
           <a:xfrm>
-            <a:off x="457200" y="5852160"/>
-            <a:ext cx="11247120" cy="640080"/>
+            <a:off x="457200" y="6080760"/>
+            <a:ext cx="11274552" cy="365760"/>
           </a:xfrm>
           <a:prstGeom prst="rect">
             <a:avLst/>
           </a:prstGeom>
           <a:solidFill>
-            <a:srgbClr val="F2F2F2"/>
+            <a:srgbClr val="1A1A1A"/>
           </a:solidFill>
           <a:ln>
             <a:noFill/>
@@ -13044,78 +14159,39 @@
       </p:sp>
       <p:sp>
         <p:nvSpPr>
-          <p:cNvPr id="48" name="TextBox 47"/>
-          <p:cNvSpPr txBox="1"/>
-          <p:nvPr/>
-        </p:nvSpPr>
-        <p:spPr>
-          <a:xfrm>
-            <a:off x="640080" y="5943600"/>
-            <a:ext cx="2743200" cy="365760"/>
-          </a:xfrm>
-          <a:prstGeom prst="rect">
-            <a:avLst/>
-          </a:prstGeom>
-          <a:noFill/>
-        </p:spPr>
-        <p:txBody>
-          <a:bodyPr wrap="square" lIns="25400" rIns="25400" tIns="25400" bIns="25400">
-            <a:spAutoFit/>
-          </a:bodyPr>
-          <a:lstStyle/>
-          <a:p>
-            <a:pPr algn="l">
+          <p:cNvPr id="49" name="TextBox 48"/>
+          <p:cNvSpPr txBox="1"/>
+          <p:nvPr/>
+        </p:nvSpPr>
+        <p:spPr>
+          <a:xfrm>
+            <a:off x="457200" y="6126480"/>
+            <a:ext cx="11274552" cy="274320"/>
+          </a:xfrm>
+          <a:prstGeom prst="rect">
+            <a:avLst/>
+          </a:prstGeom>
+          <a:noFill/>
+        </p:spPr>
+        <p:txBody>
+          <a:bodyPr wrap="square" lIns="25400" rIns="25400" tIns="25400" bIns="25400">
+            <a:spAutoFit/>
+          </a:bodyPr>
+          <a:lstStyle/>
+          <a:p>
+            <a:pPr algn="ctr">
               <a:lnSpc>
                 <a:spcPct val="120000"/>
               </a:lnSpc>
             </a:pPr>
             <a:r>
-              <a:rPr sz="1100" b="0">
-                <a:solidFill>
-                  <a:srgbClr val="595959"/>
-                </a:solidFill>
-                <a:latin typeface="Calibri"/>
-              </a:rPr>
-              <a:t>Чувствительность год 1</a:t>
-            </a:r>
-          </a:p>
-        </p:txBody>
-      </p:sp>
-      <p:sp>
-        <p:nvSpPr>
-          <p:cNvPr id="49" name="TextBox 48"/>
-          <p:cNvSpPr txBox="1"/>
-          <p:nvPr/>
-        </p:nvSpPr>
-        <p:spPr>
-          <a:xfrm>
-            <a:off x="3017520" y="5989320"/>
-            <a:ext cx="8229600" cy="365760"/>
-          </a:xfrm>
-          <a:prstGeom prst="rect">
-            <a:avLst/>
-          </a:prstGeom>
-          <a:noFill/>
-        </p:spPr>
-        <p:txBody>
-          <a:bodyPr wrap="square" lIns="25400" rIns="25400" tIns="25400" bIns="25400">
-            <a:spAutoFit/>
-          </a:bodyPr>
-          <a:lstStyle/>
-          <a:p>
-            <a:pPr algn="l">
-              <a:lnSpc>
-                <a:spcPct val="120000"/>
-              </a:lnSpc>
-            </a:pPr>
-            <a:r>
-              <a:rPr sz="1300" b="1">
-                <a:solidFill>
-                  <a:srgbClr val="1A1A1A"/>
-                </a:solidFill>
-                <a:latin typeface="Calibri"/>
-              </a:rPr>
-              <a:t>Консервативный: −14 млн ₽   ·   Базовый: +25 млн ₽   ·   Оптимистичный: +64 млн ₽</a:t>
+              <a:rPr sz="1100" b="1" i="0">
+                <a:solidFill>
+                  <a:srgbClr val="FFFFFF"/>
+                </a:solidFill>
+                <a:latin typeface="Calibri"/>
+              </a:rPr>
+              <a:t>S3 окупается за счёт перенастройки уже существующего портфеля — capex проекта всего 8 млн ₽</a:t>
             </a:r>
           </a:p>
         </p:txBody>
@@ -13317,7 +14393,7 @@
               </a:lnSpc>
             </a:pPr>
             <a:r>
-              <a:rPr sz="1200" b="0">
+              <a:rPr sz="1200" b="0" i="0">
                 <a:solidFill>
                   <a:srgbClr val="595959"/>
                 </a:solidFill>
@@ -13443,7 +14519,7 @@
               </a:lnSpc>
             </a:pPr>
             <a:r>
-              <a:rPr sz="1200" b="1">
+              <a:rPr sz="1200" b="1" i="0">
                 <a:solidFill>
                   <a:srgbClr val="1A1A1A"/>
                 </a:solidFill>
@@ -13482,7 +14558,7 @@
               </a:lnSpc>
             </a:pPr>
             <a:r>
-              <a:rPr sz="1000" b="0">
+              <a:rPr sz="1000" b="0" i="0">
                 <a:solidFill>
                   <a:srgbClr val="595959"/>
                 </a:solidFill>
@@ -13498,7 +14574,7 @@
               </a:lnSpc>
             </a:pPr>
             <a:r>
-              <a:rPr sz="1000" b="0">
+              <a:rPr sz="1000" b="0" i="0">
                 <a:solidFill>
                   <a:srgbClr val="595959"/>
                 </a:solidFill>
@@ -13514,7 +14590,7 @@
               </a:lnSpc>
             </a:pPr>
             <a:r>
-              <a:rPr sz="1000" b="0">
+              <a:rPr sz="1000" b="0" i="0">
                 <a:solidFill>
                   <a:srgbClr val="595959"/>
                 </a:solidFill>
@@ -13605,7 +14681,7 @@
               </a:lnSpc>
             </a:pPr>
             <a:r>
-              <a:rPr sz="1200" b="1">
+              <a:rPr sz="1200" b="1" i="0">
                 <a:solidFill>
                   <a:srgbClr val="1A1A1A"/>
                 </a:solidFill>
@@ -13644,7 +14720,7 @@
               </a:lnSpc>
             </a:pPr>
             <a:r>
-              <a:rPr sz="1000" b="0">
+              <a:rPr sz="1000" b="0" i="0">
                 <a:solidFill>
                   <a:srgbClr val="595959"/>
                 </a:solidFill>
@@ -13660,7 +14736,7 @@
               </a:lnSpc>
             </a:pPr>
             <a:r>
-              <a:rPr sz="1000" b="0">
+              <a:rPr sz="1000" b="0" i="0">
                 <a:solidFill>
                   <a:srgbClr val="595959"/>
                 </a:solidFill>
@@ -13751,7 +14827,7 @@
               </a:lnSpc>
             </a:pPr>
             <a:r>
-              <a:rPr sz="1200" b="1">
+              <a:rPr sz="1200" b="1" i="0">
                 <a:solidFill>
                   <a:srgbClr val="1A1A1A"/>
                 </a:solidFill>
@@ -13790,7 +14866,7 @@
               </a:lnSpc>
             </a:pPr>
             <a:r>
-              <a:rPr sz="1000" b="0">
+              <a:rPr sz="1000" b="0" i="0">
                 <a:solidFill>
                   <a:srgbClr val="595959"/>
                 </a:solidFill>
@@ -13806,7 +14882,7 @@
               </a:lnSpc>
             </a:pPr>
             <a:r>
-              <a:rPr sz="1000" b="0">
+              <a:rPr sz="1000" b="0" i="0">
                 <a:solidFill>
                   <a:srgbClr val="595959"/>
                 </a:solidFill>
@@ -13822,7 +14898,7 @@
               </a:lnSpc>
             </a:pPr>
             <a:r>
-              <a:rPr sz="1000" b="0">
+              <a:rPr sz="1000" b="0" i="0">
                 <a:solidFill>
                   <a:srgbClr val="595959"/>
                 </a:solidFill>
@@ -13913,7 +14989,7 @@
               </a:lnSpc>
             </a:pPr>
             <a:r>
-              <a:rPr sz="1200" b="1">
+              <a:rPr sz="1200" b="1" i="0">
                 <a:solidFill>
                   <a:srgbClr val="1A1A1A"/>
                 </a:solidFill>
@@ -13952,7 +15028,7 @@
               </a:lnSpc>
             </a:pPr>
             <a:r>
-              <a:rPr sz="1000" b="0">
+              <a:rPr sz="1000" b="0" i="0">
                 <a:solidFill>
                   <a:srgbClr val="595959"/>
                 </a:solidFill>
@@ -13968,7 +15044,7 @@
               </a:lnSpc>
             </a:pPr>
             <a:r>
-              <a:rPr sz="1000" b="0">
+              <a:rPr sz="1000" b="0" i="0">
                 <a:solidFill>
                   <a:srgbClr val="595959"/>
                 </a:solidFill>
@@ -14059,7 +15135,7 @@
               </a:lnSpc>
             </a:pPr>
             <a:r>
-              <a:rPr sz="1200" b="1">
+              <a:rPr sz="1200" b="1" i="0">
                 <a:solidFill>
                   <a:srgbClr val="1A1A1A"/>
                 </a:solidFill>
@@ -14098,7 +15174,7 @@
               </a:lnSpc>
             </a:pPr>
             <a:r>
-              <a:rPr sz="1000" b="0">
+              <a:rPr sz="1000" b="0" i="0">
                 <a:solidFill>
                   <a:srgbClr val="595959"/>
                 </a:solidFill>
@@ -14114,7 +15190,7 @@
               </a:lnSpc>
             </a:pPr>
             <a:r>
-              <a:rPr sz="1000" b="0">
+              <a:rPr sz="1000" b="0" i="0">
                 <a:solidFill>
                   <a:srgbClr val="595959"/>
                 </a:solidFill>
@@ -14153,7 +15229,7 @@
               </a:lnSpc>
             </a:pPr>
             <a:r>
-              <a:rPr sz="1400" b="1">
+              <a:rPr sz="1400" b="1" i="0">
                 <a:solidFill>
                   <a:srgbClr val="1A1A1A"/>
                 </a:solidFill>
@@ -14236,7 +15312,7 @@
               </a:lnSpc>
             </a:pPr>
             <a:r>
-              <a:rPr sz="1050" b="1">
+              <a:rPr sz="1050" b="1" i="0">
                 <a:solidFill>
                   <a:srgbClr val="1A1A1A"/>
                 </a:solidFill>
@@ -14275,7 +15351,7 @@
               </a:lnSpc>
             </a:pPr>
             <a:r>
-              <a:rPr sz="1400" b="1">
+              <a:rPr sz="1400" b="1" i="0">
                 <a:solidFill>
                   <a:srgbClr val="ED0028"/>
                 </a:solidFill>
@@ -14314,7 +15390,7 @@
               </a:lnSpc>
             </a:pPr>
             <a:r>
-              <a:rPr sz="1000" b="0">
+              <a:rPr sz="1000" b="0" i="0">
                 <a:solidFill>
                   <a:srgbClr val="595959"/>
                 </a:solidFill>
@@ -14397,7 +15473,7 @@
               </a:lnSpc>
             </a:pPr>
             <a:r>
-              <a:rPr sz="1050" b="1">
+              <a:rPr sz="1050" b="1" i="0">
                 <a:solidFill>
                   <a:srgbClr val="1A1A1A"/>
                 </a:solidFill>
@@ -14436,7 +15512,7 @@
               </a:lnSpc>
             </a:pPr>
             <a:r>
-              <a:rPr sz="1400" b="1">
+              <a:rPr sz="1400" b="1" i="0">
                 <a:solidFill>
                   <a:srgbClr val="ED0028"/>
                 </a:solidFill>
@@ -14475,7 +15551,7 @@
               </a:lnSpc>
             </a:pPr>
             <a:r>
-              <a:rPr sz="1000" b="0">
+              <a:rPr sz="1000" b="0" i="0">
                 <a:solidFill>
                   <a:srgbClr val="595959"/>
                 </a:solidFill>
@@ -14558,7 +15634,7 @@
               </a:lnSpc>
             </a:pPr>
             <a:r>
-              <a:rPr sz="1050" b="1">
+              <a:rPr sz="1050" b="1" i="0">
                 <a:solidFill>
                   <a:srgbClr val="1A1A1A"/>
                 </a:solidFill>
@@ -14597,7 +15673,7 @@
               </a:lnSpc>
             </a:pPr>
             <a:r>
-              <a:rPr sz="1400" b="1">
+              <a:rPr sz="1400" b="1" i="0">
                 <a:solidFill>
                   <a:srgbClr val="ED0028"/>
                 </a:solidFill>
@@ -14636,7 +15712,7 @@
               </a:lnSpc>
             </a:pPr>
             <a:r>
-              <a:rPr sz="1000" b="0">
+              <a:rPr sz="1000" b="0" i="0">
                 <a:solidFill>
                   <a:srgbClr val="595959"/>
                 </a:solidFill>
@@ -14719,7 +15795,7 @@
               </a:lnSpc>
             </a:pPr>
             <a:r>
-              <a:rPr sz="1050" b="1">
+              <a:rPr sz="1050" b="1" i="0">
                 <a:solidFill>
                   <a:srgbClr val="1A1A1A"/>
                 </a:solidFill>
@@ -14758,7 +15834,7 @@
               </a:lnSpc>
             </a:pPr>
             <a:r>
-              <a:rPr sz="1400" b="1">
+              <a:rPr sz="1400" b="1" i="0">
                 <a:solidFill>
                   <a:srgbClr val="ED0028"/>
                 </a:solidFill>
@@ -14797,7 +15873,7 @@
               </a:lnSpc>
             </a:pPr>
             <a:r>
-              <a:rPr sz="1000" b="0">
+              <a:rPr sz="1000" b="0" i="0">
                 <a:solidFill>
                   <a:srgbClr val="595959"/>
                 </a:solidFill>
@@ -14880,7 +15956,7 @@
               </a:lnSpc>
             </a:pPr>
             <a:r>
-              <a:rPr sz="1050" b="1">
+              <a:rPr sz="1050" b="1" i="0">
                 <a:solidFill>
                   <a:srgbClr val="1A1A1A"/>
                 </a:solidFill>
@@ -14919,7 +15995,7 @@
               </a:lnSpc>
             </a:pPr>
             <a:r>
-              <a:rPr sz="1400" b="1">
+              <a:rPr sz="1400" b="1" i="0">
                 <a:solidFill>
                   <a:srgbClr val="ED0028"/>
                 </a:solidFill>
@@ -14958,7 +16034,7 @@
               </a:lnSpc>
             </a:pPr>
             <a:r>
-              <a:rPr sz="1000" b="0">
+              <a:rPr sz="1000" b="0" i="0">
                 <a:solidFill>
                   <a:srgbClr val="595959"/>
                 </a:solidFill>
@@ -15041,7 +16117,7 @@
               </a:lnSpc>
             </a:pPr>
             <a:r>
-              <a:rPr sz="1050" b="1">
+              <a:rPr sz="1050" b="1" i="0">
                 <a:solidFill>
                   <a:srgbClr val="1A1A1A"/>
                 </a:solidFill>
@@ -15080,7 +16156,7 @@
               </a:lnSpc>
             </a:pPr>
             <a:r>
-              <a:rPr sz="1400" b="1">
+              <a:rPr sz="1400" b="1" i="0">
                 <a:solidFill>
                   <a:srgbClr val="ED0028"/>
                 </a:solidFill>
@@ -15119,7 +16195,7 @@
               </a:lnSpc>
             </a:pPr>
             <a:r>
-              <a:rPr sz="1000" b="0">
+              <a:rPr sz="1000" b="0" i="0">
                 <a:solidFill>
                   <a:srgbClr val="595959"/>
                 </a:solidFill>
@@ -15132,7 +16208,90 @@
       </p:sp>
       <p:sp>
         <p:nvSpPr>
-          <p:cNvPr id="46" name="TextBox 45"/>
+          <p:cNvPr id="46" name="Rectangle 45"/>
+          <p:cNvSpPr/>
+          <p:nvPr/>
+        </p:nvSpPr>
+        <p:spPr>
+          <a:xfrm>
+            <a:off x="457200" y="6080760"/>
+            <a:ext cx="11274552" cy="365760"/>
+          </a:xfrm>
+          <a:prstGeom prst="rect">
+            <a:avLst/>
+          </a:prstGeom>
+          <a:solidFill>
+            <a:srgbClr val="1A1A1A"/>
+          </a:solidFill>
+          <a:ln>
+            <a:noFill/>
+          </a:ln>
+          <a:effectLst/>
+        </p:spPr>
+        <p:style>
+          <a:lnRef idx="1">
+            <a:schemeClr val="accent1"/>
+          </a:lnRef>
+          <a:fillRef idx="3">
+            <a:schemeClr val="accent1"/>
+          </a:fillRef>
+          <a:effectRef idx="2">
+            <a:schemeClr val="accent1"/>
+          </a:effectRef>
+          <a:fontRef idx="minor">
+            <a:schemeClr val="lt1"/>
+          </a:fontRef>
+        </p:style>
+        <p:txBody>
+          <a:bodyPr rtlCol="0" anchor="ctr"/>
+          <a:lstStyle/>
+          <a:p>
+            <a:pPr algn="ctr"/>
+          </a:p>
+        </p:txBody>
+      </p:sp>
+      <p:sp>
+        <p:nvSpPr>
+          <p:cNvPr id="47" name="TextBox 46"/>
+          <p:cNvSpPr txBox="1"/>
+          <p:nvPr/>
+        </p:nvSpPr>
+        <p:spPr>
+          <a:xfrm>
+            <a:off x="457200" y="6126480"/>
+            <a:ext cx="11274552" cy="274320"/>
+          </a:xfrm>
+          <a:prstGeom prst="rect">
+            <a:avLst/>
+          </a:prstGeom>
+          <a:noFill/>
+        </p:spPr>
+        <p:txBody>
+          <a:bodyPr wrap="square" lIns="25400" rIns="25400" tIns="25400" bIns="25400">
+            <a:spAutoFit/>
+          </a:bodyPr>
+          <a:lstStyle/>
+          <a:p>
+            <a:pPr algn="ctr">
+              <a:lnSpc>
+                <a:spcPct val="120000"/>
+              </a:lnSpc>
+            </a:pPr>
+            <a:r>
+              <a:rPr sz="1100" b="1" i="0">
+                <a:solidFill>
+                  <a:srgbClr val="FFFFFF"/>
+                </a:solidFill>
+                <a:latin typeface="Calibri"/>
+              </a:rPr>
+              <a:t>S3 не требует одномоментной перестройки — запускается через пилот за 5 месяцев</a:t>
+            </a:r>
+          </a:p>
+        </p:txBody>
+      </p:sp>
+      <p:sp>
+        <p:nvSpPr>
+          <p:cNvPr id="48" name="TextBox 47"/>
           <p:cNvSpPr txBox="1"/>
           <p:nvPr/>
         </p:nvSpPr>
@@ -15166,7 +16325,7 @@
       </p:sp>
       <p:sp>
         <p:nvSpPr>
-          <p:cNvPr id="47" name="TextBox 46"/>
+          <p:cNvPr id="49" name="TextBox 48"/>
           <p:cNvSpPr txBox="1"/>
           <p:nvPr/>
         </p:nvSpPr>
@@ -15371,7 +16530,7 @@
               </a:lnSpc>
             </a:pPr>
             <a:r>
-              <a:rPr sz="3600" b="1">
+              <a:rPr sz="3600" b="1" i="0">
                 <a:solidFill>
                   <a:srgbClr val="FFFFFF"/>
                 </a:solidFill>
@@ -15410,7 +16569,7 @@
               </a:lnSpc>
             </a:pPr>
             <a:r>
-              <a:rPr sz="1400" b="1">
+              <a:rPr sz="1400" b="1" i="0">
                 <a:solidFill>
                   <a:srgbClr val="FFFFFF"/>
                 </a:solidFill>
@@ -15449,7 +16608,7 @@
               </a:lnSpc>
             </a:pPr>
             <a:r>
-              <a:rPr sz="1100" b="0">
+              <a:rPr sz="1100" b="0" i="0">
                 <a:solidFill>
                   <a:srgbClr val="FFFFFF"/>
                 </a:solidFill>
@@ -15465,7 +16624,7 @@
               </a:lnSpc>
             </a:pPr>
             <a:r>
-              <a:rPr sz="1100" b="0">
+              <a:rPr sz="1100" b="0" i="0">
                 <a:solidFill>
                   <a:srgbClr val="FFFFFF"/>
                 </a:solidFill>
@@ -15481,7 +16640,7 @@
               </a:lnSpc>
             </a:pPr>
             <a:r>
-              <a:rPr sz="1100" b="0">
+              <a:rPr sz="1100" b="0" i="0">
                 <a:solidFill>
                   <a:srgbClr val="FFFFFF"/>
                 </a:solidFill>
@@ -15564,7 +16723,7 @@
               </a:lnSpc>
             </a:pPr>
             <a:r>
-              <a:rPr sz="3600" b="1">
+              <a:rPr sz="3600" b="1" i="0">
                 <a:solidFill>
                   <a:srgbClr val="1A1A1A"/>
                 </a:solidFill>
@@ -15603,7 +16762,7 @@
               </a:lnSpc>
             </a:pPr>
             <a:r>
-              <a:rPr sz="1400" b="1">
+              <a:rPr sz="1400" b="1" i="0">
                 <a:solidFill>
                   <a:srgbClr val="ED0028"/>
                 </a:solidFill>
@@ -15642,7 +16801,7 @@
               </a:lnSpc>
             </a:pPr>
             <a:r>
-              <a:rPr sz="1100" b="0">
+              <a:rPr sz="1100" b="0" i="0">
                 <a:solidFill>
                   <a:srgbClr val="595959"/>
                 </a:solidFill>
@@ -15658,7 +16817,7 @@
               </a:lnSpc>
             </a:pPr>
             <a:r>
-              <a:rPr sz="1100" b="0">
+              <a:rPr sz="1100" b="0" i="0">
                 <a:solidFill>
                   <a:srgbClr val="595959"/>
                 </a:solidFill>
@@ -15674,7 +16833,7 @@
               </a:lnSpc>
             </a:pPr>
             <a:r>
-              <a:rPr sz="1100" b="0">
+              <a:rPr sz="1100" b="0" i="0">
                 <a:solidFill>
                   <a:srgbClr val="595959"/>
                 </a:solidFill>
@@ -15757,7 +16916,7 @@
               </a:lnSpc>
             </a:pPr>
             <a:r>
-              <a:rPr sz="3600" b="1">
+              <a:rPr sz="3600" b="1" i="0">
                 <a:solidFill>
                   <a:srgbClr val="1A1A1A"/>
                 </a:solidFill>
@@ -15796,7 +16955,7 @@
               </a:lnSpc>
             </a:pPr>
             <a:r>
-              <a:rPr sz="1400" b="1">
+              <a:rPr sz="1400" b="1" i="0">
                 <a:solidFill>
                   <a:srgbClr val="ED0028"/>
                 </a:solidFill>
@@ -15835,7 +16994,7 @@
               </a:lnSpc>
             </a:pPr>
             <a:r>
-              <a:rPr sz="1100" b="0">
+              <a:rPr sz="1100" b="0" i="0">
                 <a:solidFill>
                   <a:srgbClr val="595959"/>
                 </a:solidFill>
@@ -15851,7 +17010,7 @@
               </a:lnSpc>
             </a:pPr>
             <a:r>
-              <a:rPr sz="1100" b="0">
+              <a:rPr sz="1100" b="0" i="0">
                 <a:solidFill>
                   <a:srgbClr val="595959"/>
                 </a:solidFill>
@@ -15867,7 +17026,7 @@
               </a:lnSpc>
             </a:pPr>
             <a:r>
-              <a:rPr sz="1100" b="0">
+              <a:rPr sz="1100" b="0" i="0">
                 <a:solidFill>
                   <a:srgbClr val="595959"/>
                 </a:solidFill>
@@ -15950,7 +17109,7 @@
               </a:lnSpc>
             </a:pPr>
             <a:r>
-              <a:rPr sz="3600" b="1">
+              <a:rPr sz="3600" b="1" i="0">
                 <a:solidFill>
                   <a:srgbClr val="1A1A1A"/>
                 </a:solidFill>
@@ -15989,7 +17148,7 @@
               </a:lnSpc>
             </a:pPr>
             <a:r>
-              <a:rPr sz="1400" b="1">
+              <a:rPr sz="1400" b="1" i="0">
                 <a:solidFill>
                   <a:srgbClr val="ED0028"/>
                 </a:solidFill>
@@ -16028,7 +17187,7 @@
               </a:lnSpc>
             </a:pPr>
             <a:r>
-              <a:rPr sz="1100" b="0">
+              <a:rPr sz="1100" b="0" i="0">
                 <a:solidFill>
                   <a:srgbClr val="595959"/>
                 </a:solidFill>
@@ -16044,7 +17203,7 @@
               </a:lnSpc>
             </a:pPr>
             <a:r>
-              <a:rPr sz="1100" b="0">
+              <a:rPr sz="1100" b="0" i="0">
                 <a:solidFill>
                   <a:srgbClr val="595959"/>
                 </a:solidFill>
@@ -16060,7 +17219,7 @@
               </a:lnSpc>
             </a:pPr>
             <a:r>
-              <a:rPr sz="1100" b="0">
+              <a:rPr sz="1100" b="0" i="0">
                 <a:solidFill>
                   <a:srgbClr val="595959"/>
                 </a:solidFill>
@@ -16143,7 +17302,7 @@
               </a:lnSpc>
             </a:pPr>
             <a:r>
-              <a:rPr sz="1200" b="0">
+              <a:rPr sz="1200" b="0" i="0">
                 <a:solidFill>
                   <a:srgbClr val="595959"/>
                 </a:solidFill>
@@ -16182,7 +17341,7 @@
               </a:lnSpc>
             </a:pPr>
             <a:r>
-              <a:rPr sz="1400" b="1">
+              <a:rPr sz="1400" b="1" i="0">
                 <a:solidFill>
                   <a:srgbClr val="1A1A1A"/>
                 </a:solidFill>
@@ -16221,7 +17380,7 @@
               </a:lnSpc>
             </a:pPr>
             <a:r>
-              <a:rPr sz="1800" b="1">
+              <a:rPr sz="1800" b="1" i="0">
                 <a:solidFill>
                   <a:srgbClr val="ED0028"/>
                 </a:solidFill>
@@ -16456,7 +17615,7 @@
               </a:lnSpc>
             </a:pPr>
             <a:r>
-              <a:rPr sz="1300" b="1">
+              <a:rPr sz="1300" b="1" i="0">
                 <a:solidFill>
                   <a:srgbClr val="1A1A1A"/>
                 </a:solidFill>
@@ -16495,7 +17654,7 @@
               </a:lnSpc>
             </a:pPr>
             <a:r>
-              <a:rPr sz="1000" b="0">
+              <a:rPr sz="1000" b="0" i="0">
                 <a:solidFill>
                   <a:srgbClr val="595959"/>
                 </a:solidFill>
@@ -16534,7 +17693,7 @@
               </a:lnSpc>
             </a:pPr>
             <a:r>
-              <a:rPr sz="1050" b="0">
+              <a:rPr sz="1050" b="0" i="0">
                 <a:solidFill>
                   <a:srgbClr val="1A1A1A"/>
                 </a:solidFill>
@@ -16617,7 +17776,7 @@
               </a:lnSpc>
             </a:pPr>
             <a:r>
-              <a:rPr sz="1300" b="1">
+              <a:rPr sz="1300" b="1" i="0">
                 <a:solidFill>
                   <a:srgbClr val="1A1A1A"/>
                 </a:solidFill>
@@ -16656,7 +17815,7 @@
               </a:lnSpc>
             </a:pPr>
             <a:r>
-              <a:rPr sz="1000" b="0">
+              <a:rPr sz="1000" b="0" i="0">
                 <a:solidFill>
                   <a:srgbClr val="595959"/>
                 </a:solidFill>
@@ -16695,7 +17854,7 @@
               </a:lnSpc>
             </a:pPr>
             <a:r>
-              <a:rPr sz="1050" b="0">
+              <a:rPr sz="1050" b="0" i="0">
                 <a:solidFill>
                   <a:srgbClr val="1A1A1A"/>
                 </a:solidFill>
@@ -16778,7 +17937,7 @@
               </a:lnSpc>
             </a:pPr>
             <a:r>
-              <a:rPr sz="1300" b="1">
+              <a:rPr sz="1300" b="1" i="0">
                 <a:solidFill>
                   <a:srgbClr val="1A1A1A"/>
                 </a:solidFill>
@@ -16817,7 +17976,7 @@
               </a:lnSpc>
             </a:pPr>
             <a:r>
-              <a:rPr sz="1000" b="0">
+              <a:rPr sz="1000" b="0" i="0">
                 <a:solidFill>
                   <a:srgbClr val="595959"/>
                 </a:solidFill>
@@ -16856,7 +18015,7 @@
               </a:lnSpc>
             </a:pPr>
             <a:r>
-              <a:rPr sz="1050" b="0">
+              <a:rPr sz="1050" b="0" i="0">
                 <a:solidFill>
                   <a:srgbClr val="1A1A1A"/>
                 </a:solidFill>
@@ -16939,7 +18098,7 @@
               </a:lnSpc>
             </a:pPr>
             <a:r>
-              <a:rPr sz="1300" b="1">
+              <a:rPr sz="1300" b="1" i="0">
                 <a:solidFill>
                   <a:srgbClr val="1A1A1A"/>
                 </a:solidFill>
@@ -16978,7 +18137,7 @@
               </a:lnSpc>
             </a:pPr>
             <a:r>
-              <a:rPr sz="1000" b="0">
+              <a:rPr sz="1000" b="0" i="0">
                 <a:solidFill>
                   <a:srgbClr val="595959"/>
                 </a:solidFill>
@@ -17017,7 +18176,7 @@
               </a:lnSpc>
             </a:pPr>
             <a:r>
-              <a:rPr sz="1050" b="0">
+              <a:rPr sz="1050" b="0" i="0">
                 <a:solidFill>
                   <a:srgbClr val="1A1A1A"/>
                 </a:solidFill>
@@ -17100,7 +18259,7 @@
               </a:lnSpc>
             </a:pPr>
             <a:r>
-              <a:rPr sz="1300" b="1">
+              <a:rPr sz="1300" b="1" i="0">
                 <a:solidFill>
                   <a:srgbClr val="1A1A1A"/>
                 </a:solidFill>
@@ -17139,7 +18298,7 @@
               </a:lnSpc>
             </a:pPr>
             <a:r>
-              <a:rPr sz="1000" b="0">
+              <a:rPr sz="1000" b="0" i="0">
                 <a:solidFill>
                   <a:srgbClr val="595959"/>
                 </a:solidFill>
@@ -17178,7 +18337,7 @@
               </a:lnSpc>
             </a:pPr>
             <a:r>
-              <a:rPr sz="1050" b="0">
+              <a:rPr sz="1050" b="0" i="0">
                 <a:solidFill>
                   <a:srgbClr val="1A1A1A"/>
                 </a:solidFill>
@@ -17413,7 +18572,7 @@
               </a:lnSpc>
             </a:pPr>
             <a:r>
-              <a:rPr sz="1100" b="1">
+              <a:rPr sz="1100" b="1" i="0">
                 <a:solidFill>
                   <a:srgbClr val="FFFFFF"/>
                 </a:solidFill>
@@ -17452,7 +18611,7 @@
               </a:lnSpc>
             </a:pPr>
             <a:r>
-              <a:rPr sz="1100" b="1">
+              <a:rPr sz="1100" b="1" i="0">
                 <a:solidFill>
                   <a:srgbClr val="FFFFFF"/>
                 </a:solidFill>
@@ -17491,7 +18650,7 @@
               </a:lnSpc>
             </a:pPr>
             <a:r>
-              <a:rPr sz="1100" b="1">
+              <a:rPr sz="1100" b="1" i="0">
                 <a:solidFill>
                   <a:srgbClr val="FFFFFF"/>
                 </a:solidFill>
@@ -17530,7 +18689,7 @@
               </a:lnSpc>
             </a:pPr>
             <a:r>
-              <a:rPr sz="1100" b="1">
+              <a:rPr sz="1100" b="1" i="0">
                 <a:solidFill>
                   <a:srgbClr val="FFFFFF"/>
                 </a:solidFill>
@@ -17613,7 +18772,7 @@
               </a:lnSpc>
             </a:pPr>
             <a:r>
-              <a:rPr sz="1000" b="1">
+              <a:rPr sz="1000" b="1" i="0">
                 <a:solidFill>
                   <a:srgbClr val="1A1A1A"/>
                 </a:solidFill>
@@ -17652,7 +18811,7 @@
               </a:lnSpc>
             </a:pPr>
             <a:r>
-              <a:rPr sz="1000" b="0">
+              <a:rPr sz="1000" b="0" i="0">
                 <a:solidFill>
                   <a:srgbClr val="1A1A1A"/>
                 </a:solidFill>
@@ -17691,7 +18850,7 @@
               </a:lnSpc>
             </a:pPr>
             <a:r>
-              <a:rPr sz="1000" b="0">
+              <a:rPr sz="1000" b="0" i="0">
                 <a:solidFill>
                   <a:srgbClr val="1A1A1A"/>
                 </a:solidFill>
@@ -17730,7 +18889,7 @@
               </a:lnSpc>
             </a:pPr>
             <a:r>
-              <a:rPr sz="1000" b="0">
+              <a:rPr sz="1000" b="0" i="0">
                 <a:solidFill>
                   <a:srgbClr val="ED0028"/>
                 </a:solidFill>
@@ -17813,7 +18972,7 @@
               </a:lnSpc>
             </a:pPr>
             <a:r>
-              <a:rPr sz="1000" b="1">
+              <a:rPr sz="1000" b="1" i="0">
                 <a:solidFill>
                   <a:srgbClr val="1A1A1A"/>
                 </a:solidFill>
@@ -17852,7 +19011,7 @@
               </a:lnSpc>
             </a:pPr>
             <a:r>
-              <a:rPr sz="1000" b="0">
+              <a:rPr sz="1000" b="0" i="0">
                 <a:solidFill>
                   <a:srgbClr val="1A1A1A"/>
                 </a:solidFill>
@@ -17891,7 +19050,7 @@
               </a:lnSpc>
             </a:pPr>
             <a:r>
-              <a:rPr sz="1000" b="0">
+              <a:rPr sz="1000" b="0" i="0">
                 <a:solidFill>
                   <a:srgbClr val="1A1A1A"/>
                 </a:solidFill>
@@ -17930,7 +19089,7 @@
               </a:lnSpc>
             </a:pPr>
             <a:r>
-              <a:rPr sz="1000" b="0">
+              <a:rPr sz="1000" b="0" i="0">
                 <a:solidFill>
                   <a:srgbClr val="ED0028"/>
                 </a:solidFill>
@@ -18013,7 +19172,7 @@
               </a:lnSpc>
             </a:pPr>
             <a:r>
-              <a:rPr sz="1000" b="1">
+              <a:rPr sz="1000" b="1" i="0">
                 <a:solidFill>
                   <a:srgbClr val="1A1A1A"/>
                 </a:solidFill>
@@ -18052,7 +19211,7 @@
               </a:lnSpc>
             </a:pPr>
             <a:r>
-              <a:rPr sz="1000" b="0">
+              <a:rPr sz="1000" b="0" i="0">
                 <a:solidFill>
                   <a:srgbClr val="1A1A1A"/>
                 </a:solidFill>
@@ -18091,7 +19250,7 @@
               </a:lnSpc>
             </a:pPr>
             <a:r>
-              <a:rPr sz="1000" b="0">
+              <a:rPr sz="1000" b="0" i="0">
                 <a:solidFill>
                   <a:srgbClr val="1A1A1A"/>
                 </a:solidFill>
@@ -18130,7 +19289,7 @@
               </a:lnSpc>
             </a:pPr>
             <a:r>
-              <a:rPr sz="1000" b="0">
+              <a:rPr sz="1000" b="0" i="0">
                 <a:solidFill>
                   <a:srgbClr val="ED0028"/>
                 </a:solidFill>
@@ -18213,7 +19372,7 @@
               </a:lnSpc>
             </a:pPr>
             <a:r>
-              <a:rPr sz="1000" b="1">
+              <a:rPr sz="1000" b="1" i="0">
                 <a:solidFill>
                   <a:srgbClr val="1A1A1A"/>
                 </a:solidFill>
@@ -18252,7 +19411,7 @@
               </a:lnSpc>
             </a:pPr>
             <a:r>
-              <a:rPr sz="1000" b="0">
+              <a:rPr sz="1000" b="0" i="0">
                 <a:solidFill>
                   <a:srgbClr val="1A1A1A"/>
                 </a:solidFill>
@@ -18291,7 +19450,7 @@
               </a:lnSpc>
             </a:pPr>
             <a:r>
-              <a:rPr sz="1000" b="0">
+              <a:rPr sz="1000" b="0" i="0">
                 <a:solidFill>
                   <a:srgbClr val="1A1A1A"/>
                 </a:solidFill>
@@ -18330,7 +19489,7 @@
               </a:lnSpc>
             </a:pPr>
             <a:r>
-              <a:rPr sz="1000" b="0">
+              <a:rPr sz="1000" b="0" i="0">
                 <a:solidFill>
                   <a:srgbClr val="ED0028"/>
                 </a:solidFill>
@@ -18413,7 +19572,7 @@
               </a:lnSpc>
             </a:pPr>
             <a:r>
-              <a:rPr sz="1000" b="1">
+              <a:rPr sz="1000" b="1" i="0">
                 <a:solidFill>
                   <a:srgbClr val="1A1A1A"/>
                 </a:solidFill>
@@ -18452,7 +19611,7 @@
               </a:lnSpc>
             </a:pPr>
             <a:r>
-              <a:rPr sz="1000" b="0">
+              <a:rPr sz="1000" b="0" i="0">
                 <a:solidFill>
                   <a:srgbClr val="1A1A1A"/>
                 </a:solidFill>
@@ -18491,7 +19650,7 @@
               </a:lnSpc>
             </a:pPr>
             <a:r>
-              <a:rPr sz="1000" b="0">
+              <a:rPr sz="1000" b="0" i="0">
                 <a:solidFill>
                   <a:srgbClr val="1A1A1A"/>
                 </a:solidFill>
@@ -18530,7 +19689,7 @@
               </a:lnSpc>
             </a:pPr>
             <a:r>
-              <a:rPr sz="1000" b="0">
+              <a:rPr sz="1000" b="0" i="0">
                 <a:solidFill>
                   <a:srgbClr val="ED0028"/>
                 </a:solidFill>
@@ -18721,7 +19880,7 @@
               </a:lnSpc>
             </a:pPr>
             <a:r>
-              <a:rPr sz="1400" b="1">
+              <a:rPr sz="1400" b="1" i="0">
                 <a:solidFill>
                   <a:srgbClr val="1A1A1A"/>
                 </a:solidFill>
@@ -18804,7 +19963,7 @@
               </a:lnSpc>
             </a:pPr>
             <a:r>
-              <a:rPr sz="1050" b="1">
+              <a:rPr sz="1050" b="1" i="0">
                 <a:solidFill>
                   <a:srgbClr val="FFFFFF"/>
                 </a:solidFill>
@@ -18843,7 +20002,7 @@
               </a:lnSpc>
             </a:pPr>
             <a:r>
-              <a:rPr sz="1050" b="1">
+              <a:rPr sz="1050" b="1" i="0">
                 <a:solidFill>
                   <a:srgbClr val="FFFFFF"/>
                 </a:solidFill>
@@ -18882,7 +20041,7 @@
               </a:lnSpc>
             </a:pPr>
             <a:r>
-              <a:rPr sz="950" b="1">
+              <a:rPr sz="950" b="1" i="0">
                 <a:solidFill>
                   <a:srgbClr val="FFFFFF"/>
                 </a:solidFill>
@@ -18965,7 +20124,7 @@
               </a:lnSpc>
             </a:pPr>
             <a:r>
-              <a:rPr sz="1050" b="0">
+              <a:rPr sz="1050" b="0" i="0">
                 <a:solidFill>
                   <a:srgbClr val="1A1A1A"/>
                 </a:solidFill>
@@ -19004,7 +20163,7 @@
               </a:lnSpc>
             </a:pPr>
             <a:r>
-              <a:rPr sz="1050" b="1">
+              <a:rPr sz="1050" b="1" i="0">
                 <a:solidFill>
                   <a:srgbClr val="ED0028"/>
                 </a:solidFill>
@@ -19043,7 +20202,7 @@
               </a:lnSpc>
             </a:pPr>
             <a:r>
-              <a:rPr sz="950" b="0">
+              <a:rPr sz="950" b="0" i="0">
                 <a:solidFill>
                   <a:srgbClr val="1A1A1A"/>
                 </a:solidFill>
@@ -19126,7 +20285,7 @@
               </a:lnSpc>
             </a:pPr>
             <a:r>
-              <a:rPr sz="1050" b="0">
+              <a:rPr sz="1050" b="0" i="0">
                 <a:solidFill>
                   <a:srgbClr val="1A1A1A"/>
                 </a:solidFill>
@@ -19165,7 +20324,7 @@
               </a:lnSpc>
             </a:pPr>
             <a:r>
-              <a:rPr sz="1050" b="1">
+              <a:rPr sz="1050" b="1" i="0">
                 <a:solidFill>
                   <a:srgbClr val="ED0028"/>
                 </a:solidFill>
@@ -19204,7 +20363,7 @@
               </a:lnSpc>
             </a:pPr>
             <a:r>
-              <a:rPr sz="950" b="0">
+              <a:rPr sz="950" b="0" i="0">
                 <a:solidFill>
                   <a:srgbClr val="1A1A1A"/>
                 </a:solidFill>
@@ -19287,7 +20446,7 @@
               </a:lnSpc>
             </a:pPr>
             <a:r>
-              <a:rPr sz="1050" b="0">
+              <a:rPr sz="1050" b="0" i="0">
                 <a:solidFill>
                   <a:srgbClr val="1A1A1A"/>
                 </a:solidFill>
@@ -19326,7 +20485,7 @@
               </a:lnSpc>
             </a:pPr>
             <a:r>
-              <a:rPr sz="1050" b="1">
+              <a:rPr sz="1050" b="1" i="0">
                 <a:solidFill>
                   <a:srgbClr val="ED0028"/>
                 </a:solidFill>
@@ -19365,7 +20524,7 @@
               </a:lnSpc>
             </a:pPr>
             <a:r>
-              <a:rPr sz="950" b="0">
+              <a:rPr sz="950" b="0" i="0">
                 <a:solidFill>
                   <a:srgbClr val="1A1A1A"/>
                 </a:solidFill>
@@ -19448,7 +20607,7 @@
               </a:lnSpc>
             </a:pPr>
             <a:r>
-              <a:rPr sz="1050" b="0">
+              <a:rPr sz="1050" b="0" i="0">
                 <a:solidFill>
                   <a:srgbClr val="1A1A1A"/>
                 </a:solidFill>
@@ -19487,7 +20646,7 @@
               </a:lnSpc>
             </a:pPr>
             <a:r>
-              <a:rPr sz="1050" b="1">
+              <a:rPr sz="1050" b="1" i="0">
                 <a:solidFill>
                   <a:srgbClr val="ED0028"/>
                 </a:solidFill>
@@ -19526,7 +20685,7 @@
               </a:lnSpc>
             </a:pPr>
             <a:r>
-              <a:rPr sz="950" b="0">
+              <a:rPr sz="950" b="0" i="0">
                 <a:solidFill>
                   <a:srgbClr val="1A1A1A"/>
                 </a:solidFill>
@@ -19609,7 +20768,7 @@
               </a:lnSpc>
             </a:pPr>
             <a:r>
-              <a:rPr sz="1050" b="1">
+              <a:rPr sz="1050" b="1" i="0">
                 <a:solidFill>
                   <a:srgbClr val="1A1A1A"/>
                 </a:solidFill>
@@ -19648,7 +20807,7 @@
               </a:lnSpc>
             </a:pPr>
             <a:r>
-              <a:rPr sz="1050" b="1">
+              <a:rPr sz="1050" b="1" i="0">
                 <a:solidFill>
                   <a:srgbClr val="ED0028"/>
                 </a:solidFill>
@@ -19687,7 +20846,7 @@
               </a:lnSpc>
             </a:pPr>
             <a:r>
-              <a:rPr sz="950" b="1">
+              <a:rPr sz="950" b="1" i="0">
                 <a:solidFill>
                   <a:srgbClr val="1A1A1A"/>
                 </a:solidFill>
@@ -19726,7 +20885,7 @@
               </a:lnSpc>
             </a:pPr>
             <a:r>
-              <a:rPr sz="1400" b="1">
+              <a:rPr sz="1400" b="1" i="0">
                 <a:solidFill>
                   <a:srgbClr val="1A1A1A"/>
                 </a:solidFill>
@@ -19809,7 +20968,7 @@
               </a:lnSpc>
             </a:pPr>
             <a:r>
-              <a:rPr sz="1050" b="1">
+              <a:rPr sz="1050" b="1" i="0">
                 <a:solidFill>
                   <a:srgbClr val="FFFFFF"/>
                 </a:solidFill>
@@ -19848,7 +21007,7 @@
               </a:lnSpc>
             </a:pPr>
             <a:r>
-              <a:rPr sz="1050" b="1">
+              <a:rPr sz="1050" b="1" i="0">
                 <a:solidFill>
                   <a:srgbClr val="FFFFFF"/>
                 </a:solidFill>
@@ -19887,7 +21046,7 @@
               </a:lnSpc>
             </a:pPr>
             <a:r>
-              <a:rPr sz="950" b="1">
+              <a:rPr sz="950" b="1" i="0">
                 <a:solidFill>
                   <a:srgbClr val="FFFFFF"/>
                 </a:solidFill>
@@ -19970,7 +21129,7 @@
               </a:lnSpc>
             </a:pPr>
             <a:r>
-              <a:rPr sz="1050" b="0">
+              <a:rPr sz="1050" b="0" i="0">
                 <a:solidFill>
                   <a:srgbClr val="1A1A1A"/>
                 </a:solidFill>
@@ -20009,7 +21168,7 @@
               </a:lnSpc>
             </a:pPr>
             <a:r>
-              <a:rPr sz="1050" b="1">
+              <a:rPr sz="1050" b="1" i="0">
                 <a:solidFill>
                   <a:srgbClr val="1E7A3C"/>
                 </a:solidFill>
@@ -20048,7 +21207,7 @@
               </a:lnSpc>
             </a:pPr>
             <a:r>
-              <a:rPr sz="950" b="0">
+              <a:rPr sz="950" b="0" i="0">
                 <a:solidFill>
                   <a:srgbClr val="1A1A1A"/>
                 </a:solidFill>
@@ -20131,7 +21290,7 @@
               </a:lnSpc>
             </a:pPr>
             <a:r>
-              <a:rPr sz="1050" b="0">
+              <a:rPr sz="1050" b="0" i="0">
                 <a:solidFill>
                   <a:srgbClr val="1A1A1A"/>
                 </a:solidFill>
@@ -20170,7 +21329,7 @@
               </a:lnSpc>
             </a:pPr>
             <a:r>
-              <a:rPr sz="1050" b="1">
+              <a:rPr sz="1050" b="1" i="0">
                 <a:solidFill>
                   <a:srgbClr val="1E7A3C"/>
                 </a:solidFill>
@@ -20209,7 +21368,7 @@
               </a:lnSpc>
             </a:pPr>
             <a:r>
-              <a:rPr sz="950" b="0">
+              <a:rPr sz="950" b="0" i="0">
                 <a:solidFill>
                   <a:srgbClr val="1A1A1A"/>
                 </a:solidFill>
@@ -20292,7 +21451,7 @@
               </a:lnSpc>
             </a:pPr>
             <a:r>
-              <a:rPr sz="1050" b="0">
+              <a:rPr sz="1050" b="0" i="0">
                 <a:solidFill>
                   <a:srgbClr val="1A1A1A"/>
                 </a:solidFill>
@@ -20331,7 +21490,7 @@
               </a:lnSpc>
             </a:pPr>
             <a:r>
-              <a:rPr sz="1050" b="1">
+              <a:rPr sz="1050" b="1" i="0">
                 <a:solidFill>
                   <a:srgbClr val="1E7A3C"/>
                 </a:solidFill>
@@ -20370,7 +21529,7 @@
               </a:lnSpc>
             </a:pPr>
             <a:r>
-              <a:rPr sz="950" b="0">
+              <a:rPr sz="950" b="0" i="0">
                 <a:solidFill>
                   <a:srgbClr val="1A1A1A"/>
                 </a:solidFill>
@@ -20453,7 +21612,7 @@
               </a:lnSpc>
             </a:pPr>
             <a:r>
-              <a:rPr sz="1050" b="0">
+              <a:rPr sz="1050" b="0" i="0">
                 <a:solidFill>
                   <a:srgbClr val="1A1A1A"/>
                 </a:solidFill>
@@ -20492,7 +21651,7 @@
               </a:lnSpc>
             </a:pPr>
             <a:r>
-              <a:rPr sz="1050" b="1">
+              <a:rPr sz="1050" b="1" i="0">
                 <a:solidFill>
                   <a:srgbClr val="1E7A3C"/>
                 </a:solidFill>
@@ -20531,7 +21690,7 @@
               </a:lnSpc>
             </a:pPr>
             <a:r>
-              <a:rPr sz="950" b="0">
+              <a:rPr sz="950" b="0" i="0">
                 <a:solidFill>
                   <a:srgbClr val="1A1A1A"/>
                 </a:solidFill>
@@ -20614,7 +21773,7 @@
               </a:lnSpc>
             </a:pPr>
             <a:r>
-              <a:rPr sz="1050" b="1">
+              <a:rPr sz="1050" b="1" i="0">
                 <a:solidFill>
                   <a:srgbClr val="1A1A1A"/>
                 </a:solidFill>
@@ -20653,7 +21812,7 @@
               </a:lnSpc>
             </a:pPr>
             <a:r>
-              <a:rPr sz="1050" b="1">
+              <a:rPr sz="1050" b="1" i="0">
                 <a:solidFill>
                   <a:srgbClr val="1E7A3C"/>
                 </a:solidFill>
@@ -20692,7 +21851,7 @@
               </a:lnSpc>
             </a:pPr>
             <a:r>
-              <a:rPr sz="950" b="1">
+              <a:rPr sz="950" b="1" i="0">
                 <a:solidFill>
                   <a:srgbClr val="1A1A1A"/>
                 </a:solidFill>
@@ -20775,7 +21934,7 @@
               </a:lnSpc>
             </a:pPr>
             <a:r>
-              <a:rPr sz="1100" b="0">
+              <a:rPr sz="1100" b="0" i="0">
                 <a:solidFill>
                   <a:srgbClr val="FFFFFF"/>
                 </a:solidFill>
@@ -20814,7 +21973,7 @@
               </a:lnSpc>
             </a:pPr>
             <a:r>
-              <a:rPr sz="2200" b="1">
+              <a:rPr sz="2200" b="1" i="0">
                 <a:solidFill>
                   <a:srgbClr val="FFFFFF"/>
                 </a:solidFill>
@@ -20853,7 +22012,7 @@
               </a:lnSpc>
             </a:pPr>
             <a:r>
-              <a:rPr sz="1100" b="0">
+              <a:rPr sz="1100" b="0" i="0">
                 <a:solidFill>
                   <a:srgbClr val="FFFFFF"/>
                 </a:solidFill>
@@ -20892,7 +22051,7 @@
               </a:lnSpc>
             </a:pPr>
             <a:r>
-              <a:rPr sz="2000" b="1">
+              <a:rPr sz="2000" b="1" i="0">
                 <a:solidFill>
                   <a:srgbClr val="FFFFFF"/>
                 </a:solidFill>
@@ -20931,7 +22090,7 @@
               </a:lnSpc>
             </a:pPr>
             <a:r>
-              <a:rPr sz="1100" b="0">
+              <a:rPr sz="1100" b="0" i="0">
                 <a:solidFill>
                   <a:srgbClr val="FFFFFF"/>
                 </a:solidFill>
@@ -20970,7 +22129,7 @@
               </a:lnSpc>
             </a:pPr>
             <a:r>
-              <a:rPr sz="2000" b="1">
+              <a:rPr sz="2000" b="1" i="0">
                 <a:solidFill>
                   <a:srgbClr val="FFFFFF"/>
                 </a:solidFill>
@@ -21053,7 +22212,7 @@
               </a:lnSpc>
             </a:pPr>
             <a:r>
-              <a:rPr sz="1000" b="0">
+              <a:rPr sz="1000" b="0" i="0">
                 <a:solidFill>
                   <a:srgbClr val="595959"/>
                 </a:solidFill>
@@ -21092,7 +22251,7 @@
               </a:lnSpc>
             </a:pPr>
             <a:r>
-              <a:rPr sz="1400" b="1">
+              <a:rPr sz="1400" b="1" i="0">
                 <a:solidFill>
                   <a:srgbClr val="ED0028"/>
                 </a:solidFill>
@@ -21175,7 +22334,7 @@
               </a:lnSpc>
             </a:pPr>
             <a:r>
-              <a:rPr sz="1000" b="0">
+              <a:rPr sz="1000" b="0" i="0">
                 <a:solidFill>
                   <a:srgbClr val="595959"/>
                 </a:solidFill>
@@ -21214,7 +22373,7 @@
               </a:lnSpc>
             </a:pPr>
             <a:r>
-              <a:rPr sz="1400" b="1">
+              <a:rPr sz="1400" b="1" i="0">
                 <a:solidFill>
                   <a:srgbClr val="ED0028"/>
                 </a:solidFill>
@@ -21297,7 +22456,7 @@
               </a:lnSpc>
             </a:pPr>
             <a:r>
-              <a:rPr sz="1000" b="0">
+              <a:rPr sz="1000" b="0" i="0">
                 <a:solidFill>
                   <a:srgbClr val="595959"/>
                 </a:solidFill>
@@ -21336,7 +22495,7 @@
               </a:lnSpc>
             </a:pPr>
             <a:r>
-              <a:rPr sz="1400" b="1">
+              <a:rPr sz="1400" b="1" i="0">
                 <a:solidFill>
                   <a:srgbClr val="ED0028"/>
                 </a:solidFill>
@@ -21519,7 +22678,7 @@
               </a:lnSpc>
             </a:pPr>
             <a:r>
-              <a:rPr sz="5600" b="1">
+              <a:rPr sz="5600" b="1" i="0">
                 <a:solidFill>
                   <a:srgbClr val="ED0028"/>
                 </a:solidFill>
@@ -21558,7 +22717,7 @@
               </a:lnSpc>
             </a:pPr>
             <a:r>
-              <a:rPr sz="1400" b="0">
+              <a:rPr sz="1400" b="0" i="0">
                 <a:solidFill>
                   <a:srgbClr val="1A1A1A"/>
                 </a:solidFill>
@@ -21597,7 +22756,7 @@
               </a:lnSpc>
             </a:pPr>
             <a:r>
-              <a:rPr sz="1150" b="0">
+              <a:rPr sz="1150" b="0" i="0">
                 <a:solidFill>
                   <a:srgbClr val="595959"/>
                 </a:solidFill>
@@ -21680,7 +22839,7 @@
               </a:lnSpc>
             </a:pPr>
             <a:r>
-              <a:rPr sz="5600" b="1">
+              <a:rPr sz="5600" b="1" i="0">
                 <a:solidFill>
                   <a:srgbClr val="ED0028"/>
                 </a:solidFill>
@@ -21719,7 +22878,7 @@
               </a:lnSpc>
             </a:pPr>
             <a:r>
-              <a:rPr sz="1400" b="0">
+              <a:rPr sz="1400" b="0" i="0">
                 <a:solidFill>
                   <a:srgbClr val="1A1A1A"/>
                 </a:solidFill>
@@ -21758,7 +22917,7 @@
               </a:lnSpc>
             </a:pPr>
             <a:r>
-              <a:rPr sz="1150" b="0">
+              <a:rPr sz="1150" b="0" i="0">
                 <a:solidFill>
                   <a:srgbClr val="595959"/>
                 </a:solidFill>
@@ -21841,7 +23000,7 @@
               </a:lnSpc>
             </a:pPr>
             <a:r>
-              <a:rPr sz="5600" b="1">
+              <a:rPr sz="5600" b="1" i="0">
                 <a:solidFill>
                   <a:srgbClr val="ED0028"/>
                 </a:solidFill>
@@ -21880,7 +23039,7 @@
               </a:lnSpc>
             </a:pPr>
             <a:r>
-              <a:rPr sz="1400" b="0">
+              <a:rPr sz="1400" b="0" i="0">
                 <a:solidFill>
                   <a:srgbClr val="1A1A1A"/>
                 </a:solidFill>
@@ -21919,7 +23078,7 @@
               </a:lnSpc>
             </a:pPr>
             <a:r>
-              <a:rPr sz="1150" b="0">
+              <a:rPr sz="1150" b="0" i="0">
                 <a:solidFill>
                   <a:srgbClr val="595959"/>
                 </a:solidFill>
@@ -22002,7 +23161,7 @@
               </a:lnSpc>
             </a:pPr>
             <a:r>
-              <a:rPr sz="1100" b="0">
+              <a:rPr sz="1100" b="0" i="0">
                 <a:solidFill>
                   <a:srgbClr val="595959"/>
                 </a:solidFill>
@@ -22041,7 +23200,7 @@
               </a:lnSpc>
             </a:pPr>
             <a:r>
-              <a:rPr sz="1400" b="1">
+              <a:rPr sz="1400" b="1" i="0">
                 <a:solidFill>
                   <a:srgbClr val="1A1A1A"/>
                 </a:solidFill>
@@ -22080,7 +23239,7 @@
               </a:lnSpc>
             </a:pPr>
             <a:r>
-              <a:rPr sz="1100" b="0">
+              <a:rPr sz="1100" b="0" i="0">
                 <a:solidFill>
                   <a:srgbClr val="595959"/>
                 </a:solidFill>
@@ -22119,7 +23278,7 @@
               </a:lnSpc>
             </a:pPr>
             <a:r>
-              <a:rPr sz="1400" b="1">
+              <a:rPr sz="1400" b="1" i="0">
                 <a:solidFill>
                   <a:srgbClr val="C01A1A"/>
                 </a:solidFill>
@@ -22379,7 +23538,7 @@
               </a:lnSpc>
             </a:pPr>
             <a:r>
-              <a:rPr sz="1400" b="1">
+              <a:rPr sz="1400" b="1" i="0">
                 <a:solidFill>
                   <a:srgbClr val="1A1A1A"/>
                 </a:solidFill>
@@ -22462,7 +23621,7 @@
               </a:lnSpc>
             </a:pPr>
             <a:r>
-              <a:rPr sz="1100" b="1">
+              <a:rPr sz="1100" b="1" i="0">
                 <a:solidFill>
                   <a:srgbClr val="1A1A1A"/>
                 </a:solidFill>
@@ -22501,7 +23660,7 @@
               </a:lnSpc>
             </a:pPr>
             <a:r>
-              <a:rPr sz="1300" b="1">
+              <a:rPr sz="1300" b="1" i="0">
                 <a:solidFill>
                   <a:srgbClr val="ED0028"/>
                 </a:solidFill>
@@ -22540,7 +23699,7 @@
               </a:lnSpc>
             </a:pPr>
             <a:r>
-              <a:rPr sz="1000" b="0">
+              <a:rPr sz="1000" b="0" i="0">
                 <a:solidFill>
                   <a:srgbClr val="595959"/>
                 </a:solidFill>
@@ -22623,7 +23782,7 @@
               </a:lnSpc>
             </a:pPr>
             <a:r>
-              <a:rPr sz="1100" b="1">
+              <a:rPr sz="1100" b="1" i="0">
                 <a:solidFill>
                   <a:srgbClr val="1A1A1A"/>
                 </a:solidFill>
@@ -22662,7 +23821,7 @@
               </a:lnSpc>
             </a:pPr>
             <a:r>
-              <a:rPr sz="1300" b="1">
+              <a:rPr sz="1300" b="1" i="0">
                 <a:solidFill>
                   <a:srgbClr val="ED0028"/>
                 </a:solidFill>
@@ -22701,7 +23860,7 @@
               </a:lnSpc>
             </a:pPr>
             <a:r>
-              <a:rPr sz="1000" b="0">
+              <a:rPr sz="1000" b="0" i="0">
                 <a:solidFill>
                   <a:srgbClr val="595959"/>
                 </a:solidFill>
@@ -22784,7 +23943,7 @@
               </a:lnSpc>
             </a:pPr>
             <a:r>
-              <a:rPr sz="1100" b="1">
+              <a:rPr sz="1100" b="1" i="0">
                 <a:solidFill>
                   <a:srgbClr val="1A1A1A"/>
                 </a:solidFill>
@@ -22823,7 +23982,7 @@
               </a:lnSpc>
             </a:pPr>
             <a:r>
-              <a:rPr sz="1300" b="1">
+              <a:rPr sz="1300" b="1" i="0">
                 <a:solidFill>
                   <a:srgbClr val="ED0028"/>
                 </a:solidFill>
@@ -22862,7 +24021,7 @@
               </a:lnSpc>
             </a:pPr>
             <a:r>
-              <a:rPr sz="1000" b="0">
+              <a:rPr sz="1000" b="0" i="0">
                 <a:solidFill>
                   <a:srgbClr val="595959"/>
                 </a:solidFill>
@@ -22945,7 +24104,7 @@
               </a:lnSpc>
             </a:pPr>
             <a:r>
-              <a:rPr sz="1100" b="1">
+              <a:rPr sz="1100" b="1" i="0">
                 <a:solidFill>
                   <a:srgbClr val="1A1A1A"/>
                 </a:solidFill>
@@ -22984,7 +24143,7 @@
               </a:lnSpc>
             </a:pPr>
             <a:r>
-              <a:rPr sz="1300" b="1">
+              <a:rPr sz="1300" b="1" i="0">
                 <a:solidFill>
                   <a:srgbClr val="ED0028"/>
                 </a:solidFill>
@@ -23023,7 +24182,7 @@
               </a:lnSpc>
             </a:pPr>
             <a:r>
-              <a:rPr sz="1000" b="0">
+              <a:rPr sz="1000" b="0" i="0">
                 <a:solidFill>
                   <a:srgbClr val="595959"/>
                 </a:solidFill>
@@ -23106,7 +24265,7 @@
               </a:lnSpc>
             </a:pPr>
             <a:r>
-              <a:rPr sz="1100" b="1">
+              <a:rPr sz="1100" b="1" i="0">
                 <a:solidFill>
                   <a:srgbClr val="1A1A1A"/>
                 </a:solidFill>
@@ -23145,7 +24304,7 @@
               </a:lnSpc>
             </a:pPr>
             <a:r>
-              <a:rPr sz="1300" b="1">
+              <a:rPr sz="1300" b="1" i="0">
                 <a:solidFill>
                   <a:srgbClr val="ED0028"/>
                 </a:solidFill>
@@ -23184,7 +24343,7 @@
               </a:lnSpc>
             </a:pPr>
             <a:r>
-              <a:rPr sz="1000" b="0">
+              <a:rPr sz="1000" b="0" i="0">
                 <a:solidFill>
                   <a:srgbClr val="595959"/>
                 </a:solidFill>
@@ -23267,7 +24426,7 @@
               </a:lnSpc>
             </a:pPr>
             <a:r>
-              <a:rPr sz="1100" b="1">
+              <a:rPr sz="1100" b="1" i="0">
                 <a:solidFill>
                   <a:srgbClr val="1A1A1A"/>
                 </a:solidFill>
@@ -23306,7 +24465,7 @@
               </a:lnSpc>
             </a:pPr>
             <a:r>
-              <a:rPr sz="1300" b="1">
+              <a:rPr sz="1300" b="1" i="0">
                 <a:solidFill>
                   <a:srgbClr val="ED0028"/>
                 </a:solidFill>
@@ -23345,7 +24504,7 @@
               </a:lnSpc>
             </a:pPr>
             <a:r>
-              <a:rPr sz="1000" b="0">
+              <a:rPr sz="1000" b="0" i="0">
                 <a:solidFill>
                   <a:srgbClr val="595959"/>
                 </a:solidFill>
@@ -23428,7 +24587,7 @@
               </a:lnSpc>
             </a:pPr>
             <a:r>
-              <a:rPr sz="1100" b="1">
+              <a:rPr sz="1100" b="1" i="0">
                 <a:solidFill>
                   <a:srgbClr val="1A1A1A"/>
                 </a:solidFill>
@@ -23467,7 +24626,7 @@
               </a:lnSpc>
             </a:pPr>
             <a:r>
-              <a:rPr sz="1300" b="1">
+              <a:rPr sz="1300" b="1" i="0">
                 <a:solidFill>
                   <a:srgbClr val="ED0028"/>
                 </a:solidFill>
@@ -23506,7 +24665,7 @@
               </a:lnSpc>
             </a:pPr>
             <a:r>
-              <a:rPr sz="1000" b="0">
+              <a:rPr sz="1000" b="0" i="0">
                 <a:solidFill>
                   <a:srgbClr val="595959"/>
                 </a:solidFill>
@@ -23589,7 +24748,7 @@
               </a:lnSpc>
             </a:pPr>
             <a:r>
-              <a:rPr sz="1100" b="1">
+              <a:rPr sz="1100" b="1" i="0">
                 <a:solidFill>
                   <a:srgbClr val="FFFFFF"/>
                 </a:solidFill>
@@ -23628,7 +24787,7 @@
               </a:lnSpc>
             </a:pPr>
             <a:r>
-              <a:rPr sz="1300" b="1">
+              <a:rPr sz="1300" b="1" i="0">
                 <a:solidFill>
                   <a:srgbClr val="FFFFFF"/>
                 </a:solidFill>
@@ -23667,7 +24826,7 @@
               </a:lnSpc>
             </a:pPr>
             <a:r>
-              <a:rPr sz="1000" b="0">
+              <a:rPr sz="1000" b="0" i="0">
                 <a:solidFill>
                   <a:srgbClr val="FFFFFF"/>
                 </a:solidFill>
@@ -23706,7 +24865,7 @@
               </a:lnSpc>
             </a:pPr>
             <a:r>
-              <a:rPr sz="1400" b="1">
+              <a:rPr sz="1400" b="1" i="0">
                 <a:solidFill>
                   <a:srgbClr val="1A1A1A"/>
                 </a:solidFill>
@@ -23789,7 +24948,7 @@
               </a:lnSpc>
             </a:pPr>
             <a:r>
-              <a:rPr sz="1100" b="1">
+              <a:rPr sz="1100" b="1" i="0">
                 <a:solidFill>
                   <a:srgbClr val="1A1A1A"/>
                 </a:solidFill>
@@ -23828,7 +24987,7 @@
               </a:lnSpc>
             </a:pPr>
             <a:r>
-              <a:rPr sz="950" b="0">
+              <a:rPr sz="950" b="0" i="0">
                 <a:solidFill>
                   <a:srgbClr val="595959"/>
                 </a:solidFill>
@@ -23911,7 +25070,7 @@
               </a:lnSpc>
             </a:pPr>
             <a:r>
-              <a:rPr sz="1100" b="1">
+              <a:rPr sz="1100" b="1" i="0">
                 <a:solidFill>
                   <a:srgbClr val="1A1A1A"/>
                 </a:solidFill>
@@ -23950,7 +25109,7 @@
               </a:lnSpc>
             </a:pPr>
             <a:r>
-              <a:rPr sz="950" b="0">
+              <a:rPr sz="950" b="0" i="0">
                 <a:solidFill>
                   <a:srgbClr val="595959"/>
                 </a:solidFill>
@@ -24033,7 +25192,7 @@
               </a:lnSpc>
             </a:pPr>
             <a:r>
-              <a:rPr sz="1100" b="1">
+              <a:rPr sz="1100" b="1" i="0">
                 <a:solidFill>
                   <a:srgbClr val="1A1A1A"/>
                 </a:solidFill>
@@ -24072,7 +25231,7 @@
               </a:lnSpc>
             </a:pPr>
             <a:r>
-              <a:rPr sz="950" b="0">
+              <a:rPr sz="950" b="0" i="0">
                 <a:solidFill>
                   <a:srgbClr val="595959"/>
                 </a:solidFill>
@@ -24155,7 +25314,7 @@
               </a:lnSpc>
             </a:pPr>
             <a:r>
-              <a:rPr sz="1100" b="1">
+              <a:rPr sz="1100" b="1" i="0">
                 <a:solidFill>
                   <a:srgbClr val="1A1A1A"/>
                 </a:solidFill>
@@ -24194,7 +25353,7 @@
               </a:lnSpc>
             </a:pPr>
             <a:r>
-              <a:rPr sz="950" b="0">
+              <a:rPr sz="950" b="0" i="0">
                 <a:solidFill>
                   <a:srgbClr val="595959"/>
                 </a:solidFill>
@@ -24385,7 +25544,7 @@
               </a:lnSpc>
             </a:pPr>
             <a:r>
-              <a:rPr sz="1200" b="0">
+              <a:rPr sz="1200" b="0" i="0">
                 <a:solidFill>
                   <a:srgbClr val="1A1A1A"/>
                 </a:solidFill>
@@ -24512,7 +25671,7 @@
               </a:lnSpc>
             </a:pPr>
             <a:r>
-              <a:rPr sz="1400" b="1">
+              <a:rPr sz="1400" b="1" i="0">
                 <a:solidFill>
                   <a:srgbClr val="FFFFFF"/>
                 </a:solidFill>
@@ -24551,7 +25710,7 @@
               </a:lnSpc>
             </a:pPr>
             <a:r>
-              <a:rPr sz="1100" b="1">
+              <a:rPr sz="1100" b="1" i="0">
                 <a:solidFill>
                   <a:srgbClr val="1A1A1A"/>
                 </a:solidFill>
@@ -24590,7 +25749,7 @@
               </a:lnSpc>
             </a:pPr>
             <a:r>
-              <a:rPr sz="1000" b="0">
+              <a:rPr sz="1000" b="0" i="0">
                 <a:solidFill>
                   <a:srgbClr val="595959"/>
                 </a:solidFill>
@@ -24629,7 +25788,7 @@
               </a:lnSpc>
             </a:pPr>
             <a:r>
-              <a:rPr sz="1100" b="1">
+              <a:rPr sz="1100" b="1" i="0">
                 <a:solidFill>
                   <a:srgbClr val="1A1A1A"/>
                 </a:solidFill>
@@ -24668,7 +25827,7 @@
               </a:lnSpc>
             </a:pPr>
             <a:r>
-              <a:rPr sz="1000" b="0">
+              <a:rPr sz="1000" b="0" i="0">
                 <a:solidFill>
                   <a:srgbClr val="595959"/>
                 </a:solidFill>
@@ -24707,7 +25866,7 @@
               </a:lnSpc>
             </a:pPr>
             <a:r>
-              <a:rPr sz="1100" b="1">
+              <a:rPr sz="1100" b="1" i="0">
                 <a:solidFill>
                   <a:srgbClr val="1A1A1A"/>
                 </a:solidFill>
@@ -24746,7 +25905,7 @@
               </a:lnSpc>
             </a:pPr>
             <a:r>
-              <a:rPr sz="1000" b="0">
+              <a:rPr sz="1000" b="0" i="0">
                 <a:solidFill>
                   <a:srgbClr val="595959"/>
                 </a:solidFill>
@@ -24785,7 +25944,7 @@
               </a:lnSpc>
             </a:pPr>
             <a:r>
-              <a:rPr sz="1100" b="1">
+              <a:rPr sz="1100" b="1" i="0">
                 <a:solidFill>
                   <a:srgbClr val="1A1A1A"/>
                 </a:solidFill>
@@ -24824,7 +25983,7 @@
               </a:lnSpc>
             </a:pPr>
             <a:r>
-              <a:rPr sz="1000" b="0">
+              <a:rPr sz="1000" b="0" i="0">
                 <a:solidFill>
                   <a:srgbClr val="595959"/>
                 </a:solidFill>
@@ -24863,7 +26022,7 @@
               </a:lnSpc>
             </a:pPr>
             <a:r>
-              <a:rPr sz="1100" b="1">
+              <a:rPr sz="1100" b="1" i="0">
                 <a:solidFill>
                   <a:srgbClr val="1A1A1A"/>
                 </a:solidFill>
@@ -24902,7 +26061,7 @@
               </a:lnSpc>
             </a:pPr>
             <a:r>
-              <a:rPr sz="1000" b="0">
+              <a:rPr sz="1000" b="0" i="0">
                 <a:solidFill>
                   <a:srgbClr val="595959"/>
                 </a:solidFill>
@@ -24941,7 +26100,7 @@
               </a:lnSpc>
             </a:pPr>
             <a:r>
-              <a:rPr sz="1100" b="1">
+              <a:rPr sz="1100" b="1" i="0">
                 <a:solidFill>
                   <a:srgbClr val="1A1A1A"/>
                 </a:solidFill>
@@ -24980,7 +26139,7 @@
               </a:lnSpc>
             </a:pPr>
             <a:r>
-              <a:rPr sz="1000" b="0">
+              <a:rPr sz="1000" b="0" i="0">
                 <a:solidFill>
                   <a:srgbClr val="595959"/>
                 </a:solidFill>
@@ -25107,7 +26266,7 @@
               </a:lnSpc>
             </a:pPr>
             <a:r>
-              <a:rPr sz="1400" b="1">
+              <a:rPr sz="1400" b="1" i="0">
                 <a:solidFill>
                   <a:srgbClr val="FFFFFF"/>
                 </a:solidFill>
@@ -25146,7 +26305,7 @@
               </a:lnSpc>
             </a:pPr>
             <a:r>
-              <a:rPr sz="1100" b="1">
+              <a:rPr sz="1100" b="1" i="0">
                 <a:solidFill>
                   <a:srgbClr val="1A1A1A"/>
                 </a:solidFill>
@@ -25185,7 +26344,7 @@
               </a:lnSpc>
             </a:pPr>
             <a:r>
-              <a:rPr sz="1000" b="0">
+              <a:rPr sz="1000" b="0" i="0">
                 <a:solidFill>
                   <a:srgbClr val="595959"/>
                 </a:solidFill>
@@ -25224,7 +26383,7 @@
               </a:lnSpc>
             </a:pPr>
             <a:r>
-              <a:rPr sz="1100" b="1">
+              <a:rPr sz="1100" b="1" i="0">
                 <a:solidFill>
                   <a:srgbClr val="1A1A1A"/>
                 </a:solidFill>
@@ -25263,7 +26422,7 @@
               </a:lnSpc>
             </a:pPr>
             <a:r>
-              <a:rPr sz="1000" b="0">
+              <a:rPr sz="1000" b="0" i="0">
                 <a:solidFill>
                   <a:srgbClr val="595959"/>
                 </a:solidFill>
@@ -25302,7 +26461,7 @@
               </a:lnSpc>
             </a:pPr>
             <a:r>
-              <a:rPr sz="1100" b="1">
+              <a:rPr sz="1100" b="1" i="0">
                 <a:solidFill>
                   <a:srgbClr val="1A1A1A"/>
                 </a:solidFill>
@@ -25341,7 +26500,7 @@
               </a:lnSpc>
             </a:pPr>
             <a:r>
-              <a:rPr sz="1000" b="0">
+              <a:rPr sz="1000" b="0" i="0">
                 <a:solidFill>
                   <a:srgbClr val="595959"/>
                 </a:solidFill>
@@ -25380,7 +26539,7 @@
               </a:lnSpc>
             </a:pPr>
             <a:r>
-              <a:rPr sz="1100" b="1">
+              <a:rPr sz="1100" b="1" i="0">
                 <a:solidFill>
                   <a:srgbClr val="1A1A1A"/>
                 </a:solidFill>
@@ -25419,7 +26578,7 @@
               </a:lnSpc>
             </a:pPr>
             <a:r>
-              <a:rPr sz="1000" b="0">
+              <a:rPr sz="1000" b="0" i="0">
                 <a:solidFill>
                   <a:srgbClr val="595959"/>
                 </a:solidFill>
@@ -25458,7 +26617,7 @@
               </a:lnSpc>
             </a:pPr>
             <a:r>
-              <a:rPr sz="1100" b="1">
+              <a:rPr sz="1100" b="1" i="0">
                 <a:solidFill>
                   <a:srgbClr val="1A1A1A"/>
                 </a:solidFill>
@@ -25497,7 +26656,7 @@
               </a:lnSpc>
             </a:pPr>
             <a:r>
-              <a:rPr sz="1000" b="0">
+              <a:rPr sz="1000" b="0" i="0">
                 <a:solidFill>
                   <a:srgbClr val="595959"/>
                 </a:solidFill>
@@ -25536,7 +26695,7 @@
               </a:lnSpc>
             </a:pPr>
             <a:r>
-              <a:rPr sz="1100" b="1">
+              <a:rPr sz="1100" b="1" i="0">
                 <a:solidFill>
                   <a:srgbClr val="1A1A1A"/>
                 </a:solidFill>
@@ -25575,7 +26734,7 @@
               </a:lnSpc>
             </a:pPr>
             <a:r>
-              <a:rPr sz="1000" b="0">
+              <a:rPr sz="1000" b="0" i="0">
                 <a:solidFill>
                   <a:srgbClr val="595959"/>
                 </a:solidFill>
@@ -25614,7 +26773,7 @@
               </a:lnSpc>
             </a:pPr>
             <a:r>
-              <a:rPr sz="1000" b="0">
+              <a:rPr sz="1000" b="0" i="0">
                 <a:solidFill>
                   <a:srgbClr val="595959"/>
                 </a:solidFill>
@@ -25753,7 +26912,7 @@
               </a:lnSpc>
             </a:pPr>
             <a:r>
-              <a:rPr sz="1400" b="0">
+              <a:rPr sz="1400" b="0" i="0">
                 <a:solidFill>
                   <a:srgbClr val="595959"/>
                 </a:solidFill>
@@ -25838,7 +26997,7 @@
               </a:lnSpc>
             </a:pPr>
             <a:r>
-              <a:rPr sz="1300" b="1">
+              <a:rPr sz="1300" b="1" i="0">
                 <a:solidFill>
                   <a:srgbClr val="1A1A1A"/>
                 </a:solidFill>
@@ -25854,7 +27013,7 @@
               </a:lnSpc>
             </a:pPr>
             <a:r>
-              <a:rPr sz="1300" b="1">
+              <a:rPr sz="1300" b="1" i="0">
                 <a:solidFill>
                   <a:srgbClr val="1A1A1A"/>
                 </a:solidFill>
@@ -25893,7 +27052,7 @@
               </a:lnSpc>
             </a:pPr>
             <a:r>
-              <a:rPr sz="1000" b="0">
+              <a:rPr sz="1000" b="0" i="0">
                 <a:solidFill>
                   <a:srgbClr val="595959"/>
                 </a:solidFill>
@@ -25909,7 +27068,7 @@
               </a:lnSpc>
             </a:pPr>
             <a:r>
-              <a:rPr sz="1000" b="0">
+              <a:rPr sz="1000" b="0" i="0">
                 <a:solidFill>
                   <a:srgbClr val="595959"/>
                 </a:solidFill>
@@ -26030,7 +27189,7 @@
               </a:lnSpc>
             </a:pPr>
             <a:r>
-              <a:rPr sz="1300" b="1">
+              <a:rPr sz="1300" b="1" i="0">
                 <a:solidFill>
                   <a:srgbClr val="1A1A1A"/>
                 </a:solidFill>
@@ -26046,7 +27205,7 @@
               </a:lnSpc>
             </a:pPr>
             <a:r>
-              <a:rPr sz="1300" b="1">
+              <a:rPr sz="1300" b="1" i="0">
                 <a:solidFill>
                   <a:srgbClr val="1A1A1A"/>
                 </a:solidFill>
@@ -26085,7 +27244,7 @@
               </a:lnSpc>
             </a:pPr>
             <a:r>
-              <a:rPr sz="1000" b="0">
+              <a:rPr sz="1000" b="0" i="0">
                 <a:solidFill>
                   <a:srgbClr val="595959"/>
                 </a:solidFill>
@@ -26101,7 +27260,7 @@
               </a:lnSpc>
             </a:pPr>
             <a:r>
-              <a:rPr sz="1000" b="0">
+              <a:rPr sz="1000" b="0" i="0">
                 <a:solidFill>
                   <a:srgbClr val="595959"/>
                 </a:solidFill>
@@ -26117,7 +27276,7 @@
               </a:lnSpc>
             </a:pPr>
             <a:r>
-              <a:rPr sz="1000" b="0">
+              <a:rPr sz="1000" b="0" i="0">
                 <a:solidFill>
                   <a:srgbClr val="595959"/>
                 </a:solidFill>
@@ -26238,7 +27397,7 @@
               </a:lnSpc>
             </a:pPr>
             <a:r>
-              <a:rPr sz="1300" b="1">
+              <a:rPr sz="1300" b="1" i="0">
                 <a:solidFill>
                   <a:srgbClr val="1A1A1A"/>
                 </a:solidFill>
@@ -26254,7 +27413,7 @@
               </a:lnSpc>
             </a:pPr>
             <a:r>
-              <a:rPr sz="1300" b="1">
+              <a:rPr sz="1300" b="1" i="0">
                 <a:solidFill>
                   <a:srgbClr val="1A1A1A"/>
                 </a:solidFill>
@@ -26293,7 +27452,7 @@
               </a:lnSpc>
             </a:pPr>
             <a:r>
-              <a:rPr sz="1000" b="0">
+              <a:rPr sz="1000" b="0" i="0">
                 <a:solidFill>
                   <a:srgbClr val="595959"/>
                 </a:solidFill>
@@ -26309,7 +27468,7 @@
               </a:lnSpc>
             </a:pPr>
             <a:r>
-              <a:rPr sz="1000" b="0">
+              <a:rPr sz="1000" b="0" i="0">
                 <a:solidFill>
                   <a:srgbClr val="595959"/>
                 </a:solidFill>
@@ -26430,7 +27589,7 @@
               </a:lnSpc>
             </a:pPr>
             <a:r>
-              <a:rPr sz="1300" b="1">
+              <a:rPr sz="1300" b="1" i="0">
                 <a:solidFill>
                   <a:srgbClr val="FFFFFF"/>
                 </a:solidFill>
@@ -26446,7 +27605,7 @@
               </a:lnSpc>
             </a:pPr>
             <a:r>
-              <a:rPr sz="1300" b="1">
+              <a:rPr sz="1300" b="1" i="0">
                 <a:solidFill>
                   <a:srgbClr val="FFFFFF"/>
                 </a:solidFill>
@@ -26485,7 +27644,7 @@
               </a:lnSpc>
             </a:pPr>
             <a:r>
-              <a:rPr sz="1000" b="0">
+              <a:rPr sz="1000" b="0" i="0">
                 <a:solidFill>
                   <a:srgbClr val="FFFFFF"/>
                 </a:solidFill>
@@ -26501,7 +27660,7 @@
               </a:lnSpc>
             </a:pPr>
             <a:r>
-              <a:rPr sz="1000" b="0">
+              <a:rPr sz="1000" b="0" i="0">
                 <a:solidFill>
                   <a:srgbClr val="FFFFFF"/>
                 </a:solidFill>
@@ -26622,7 +27781,7 @@
               </a:lnSpc>
             </a:pPr>
             <a:r>
-              <a:rPr sz="1300" b="1">
+              <a:rPr sz="1300" b="1" i="0">
                 <a:solidFill>
                   <a:srgbClr val="1A1A1A"/>
                 </a:solidFill>
@@ -26638,7 +27797,7 @@
               </a:lnSpc>
             </a:pPr>
             <a:r>
-              <a:rPr sz="1300" b="1">
+              <a:rPr sz="1300" b="1" i="0">
                 <a:solidFill>
                   <a:srgbClr val="1A1A1A"/>
                 </a:solidFill>
@@ -26677,7 +27836,7 @@
               </a:lnSpc>
             </a:pPr>
             <a:r>
-              <a:rPr sz="1000" b="0">
+              <a:rPr sz="1000" b="0" i="0">
                 <a:solidFill>
                   <a:srgbClr val="595959"/>
                 </a:solidFill>
@@ -26693,7 +27852,7 @@
               </a:lnSpc>
             </a:pPr>
             <a:r>
-              <a:rPr sz="1000" b="0">
+              <a:rPr sz="1000" b="0" i="0">
                 <a:solidFill>
                   <a:srgbClr val="595959"/>
                 </a:solidFill>
@@ -26814,7 +27973,7 @@
               </a:lnSpc>
             </a:pPr>
             <a:r>
-              <a:rPr sz="1300" b="1">
+              <a:rPr sz="1300" b="1" i="0">
                 <a:solidFill>
                   <a:srgbClr val="1A1A1A"/>
                 </a:solidFill>
@@ -26830,7 +27989,7 @@
               </a:lnSpc>
             </a:pPr>
             <a:r>
-              <a:rPr sz="1300" b="1">
+              <a:rPr sz="1300" b="1" i="0">
                 <a:solidFill>
                   <a:srgbClr val="1A1A1A"/>
                 </a:solidFill>
@@ -26869,7 +28028,7 @@
               </a:lnSpc>
             </a:pPr>
             <a:r>
-              <a:rPr sz="1000" b="0">
+              <a:rPr sz="1000" b="0" i="0">
                 <a:solidFill>
                   <a:srgbClr val="595959"/>
                 </a:solidFill>
@@ -26885,7 +28044,7 @@
               </a:lnSpc>
             </a:pPr>
             <a:r>
-              <a:rPr sz="1000" b="0">
+              <a:rPr sz="1000" b="0" i="0">
                 <a:solidFill>
                   <a:srgbClr val="595959"/>
                 </a:solidFill>
@@ -26904,7 +28063,7 @@
         </p:nvSpPr>
         <p:spPr>
           <a:xfrm>
-            <a:off x="457200" y="4572000"/>
+            <a:off x="457200" y="4434840"/>
             <a:ext cx="11247120" cy="365760"/>
           </a:xfrm>
           <a:prstGeom prst="rect">
@@ -26924,7 +28083,7 @@
               </a:lnSpc>
             </a:pPr>
             <a:r>
-              <a:rPr sz="1200" b="1">
+              <a:rPr sz="1200" b="1" i="0">
                 <a:solidFill>
                   <a:srgbClr val="1A1A1A"/>
                 </a:solidFill>
@@ -26943,8 +28102,8 @@
         </p:nvSpPr>
         <p:spPr>
           <a:xfrm>
-            <a:off x="457200" y="4937760"/>
-            <a:ext cx="11247120" cy="1371600"/>
+            <a:off x="457200" y="4800600"/>
+            <a:ext cx="11247120" cy="1188720"/>
           </a:xfrm>
           <a:prstGeom prst="rect">
             <a:avLst/>
@@ -26963,7 +28122,7 @@
               </a:lnSpc>
             </a:pPr>
             <a:r>
-              <a:rPr sz="1150" b="0">
+              <a:rPr sz="1150" b="0" i="0">
                 <a:solidFill>
                   <a:srgbClr val="595959"/>
                 </a:solidFill>
@@ -26979,7 +28138,7 @@
               </a:lnSpc>
             </a:pPr>
             <a:r>
-              <a:rPr sz="1150" b="0">
+              <a:rPr sz="1150" b="0" i="0">
                 <a:solidFill>
                   <a:srgbClr val="595959"/>
                 </a:solidFill>
@@ -26992,7 +28151,90 @@
       </p:sp>
       <p:sp>
         <p:nvSpPr>
-          <p:cNvPr id="30" name="TextBox 29"/>
+          <p:cNvPr id="30" name="Rectangle 29"/>
+          <p:cNvSpPr/>
+          <p:nvPr/>
+        </p:nvSpPr>
+        <p:spPr>
+          <a:xfrm>
+            <a:off x="457200" y="6080760"/>
+            <a:ext cx="11274552" cy="365760"/>
+          </a:xfrm>
+          <a:prstGeom prst="rect">
+            <a:avLst/>
+          </a:prstGeom>
+          <a:solidFill>
+            <a:srgbClr val="1A1A1A"/>
+          </a:solidFill>
+          <a:ln>
+            <a:noFill/>
+          </a:ln>
+          <a:effectLst/>
+        </p:spPr>
+        <p:style>
+          <a:lnRef idx="1">
+            <a:schemeClr val="accent1"/>
+          </a:lnRef>
+          <a:fillRef idx="3">
+            <a:schemeClr val="accent1"/>
+          </a:fillRef>
+          <a:effectRef idx="2">
+            <a:schemeClr val="accent1"/>
+          </a:effectRef>
+          <a:fontRef idx="minor">
+            <a:schemeClr val="lt1"/>
+          </a:fontRef>
+        </p:style>
+        <p:txBody>
+          <a:bodyPr rtlCol="0" anchor="ctr"/>
+          <a:lstStyle/>
+          <a:p>
+            <a:pPr algn="ctr"/>
+          </a:p>
+        </p:txBody>
+      </p:sp>
+      <p:sp>
+        <p:nvSpPr>
+          <p:cNvPr id="31" name="TextBox 30"/>
+          <p:cNvSpPr txBox="1"/>
+          <p:nvPr/>
+        </p:nvSpPr>
+        <p:spPr>
+          <a:xfrm>
+            <a:off x="457200" y="6126480"/>
+            <a:ext cx="11274552" cy="274320"/>
+          </a:xfrm>
+          <a:prstGeom prst="rect">
+            <a:avLst/>
+          </a:prstGeom>
+          <a:noFill/>
+        </p:spPr>
+        <p:txBody>
+          <a:bodyPr wrap="square" lIns="25400" rIns="25400" tIns="25400" bIns="25400">
+            <a:spAutoFit/>
+          </a:bodyPr>
+          <a:lstStyle/>
+          <a:p>
+            <a:pPr algn="ctr">
+              <a:lnSpc>
+                <a:spcPct val="120000"/>
+              </a:lnSpc>
+            </a:pPr>
+            <a:r>
+              <a:rPr sz="1100" b="1" i="0">
+                <a:solidFill>
+                  <a:srgbClr val="FFFFFF"/>
+                </a:solidFill>
+                <a:latin typeface="Calibri"/>
+              </a:rPr>
+              <a:t>Выход работы — система S3, каркас режимов R1–R3, инструмент УПС и финансовая модель на демонстрационном портфеле</a:t>
+            </a:r>
+          </a:p>
+        </p:txBody>
+      </p:sp>
+      <p:sp>
+        <p:nvSpPr>
+          <p:cNvPr id="32" name="TextBox 31"/>
           <p:cNvSpPr txBox="1"/>
           <p:nvPr/>
         </p:nvSpPr>
@@ -27026,7 +28268,7 @@
       </p:sp>
       <p:sp>
         <p:nvSpPr>
-          <p:cNvPr id="31" name="TextBox 30"/>
+          <p:cNvPr id="33" name="TextBox 32"/>
           <p:cNvSpPr txBox="1"/>
           <p:nvPr/>
         </p:nvSpPr>
@@ -27275,7 +28517,7 @@
               </a:lnSpc>
             </a:pPr>
             <a:r>
-              <a:rPr sz="1500" b="1">
+              <a:rPr sz="1500" b="1" i="0">
                 <a:solidFill>
                   <a:srgbClr val="FFFFFF"/>
                 </a:solidFill>
@@ -27314,7 +28556,7 @@
               </a:lnSpc>
             </a:pPr>
             <a:r>
-              <a:rPr sz="1150" b="0">
+              <a:rPr sz="1150" b="0" i="0">
                 <a:solidFill>
                   <a:srgbClr val="1A1A1A"/>
                 </a:solidFill>
@@ -27330,7 +28572,7 @@
               </a:lnSpc>
             </a:pPr>
             <a:r>
-              <a:rPr sz="1150" b="0">
+              <a:rPr sz="1150" b="0" i="0">
                 <a:solidFill>
                   <a:srgbClr val="1A1A1A"/>
                 </a:solidFill>
@@ -27346,7 +28588,7 @@
               </a:lnSpc>
             </a:pPr>
             <a:r>
-              <a:rPr sz="1150" b="0">
+              <a:rPr sz="1150" b="0" i="0">
                 <a:solidFill>
                   <a:srgbClr val="1A1A1A"/>
                 </a:solidFill>
@@ -27362,7 +28604,7 @@
               </a:lnSpc>
             </a:pPr>
             <a:r>
-              <a:rPr sz="1150" b="0">
+              <a:rPr sz="1150" b="0" i="0">
                 <a:solidFill>
                   <a:srgbClr val="1A1A1A"/>
                 </a:solidFill>
@@ -27378,7 +28620,7 @@
               </a:lnSpc>
             </a:pPr>
             <a:r>
-              <a:rPr sz="1150" b="0">
+              <a:rPr sz="1150" b="0" i="0">
                 <a:solidFill>
                   <a:srgbClr val="1A1A1A"/>
                 </a:solidFill>
@@ -27394,7 +28636,7 @@
               </a:lnSpc>
             </a:pPr>
             <a:r>
-              <a:rPr sz="1150" b="0">
+              <a:rPr sz="1150" b="0" i="0">
                 <a:solidFill>
                   <a:srgbClr val="1A1A1A"/>
                 </a:solidFill>
@@ -27521,7 +28763,7 @@
               </a:lnSpc>
             </a:pPr>
             <a:r>
-              <a:rPr sz="1500" b="1">
+              <a:rPr sz="1500" b="1" i="0">
                 <a:solidFill>
                   <a:srgbClr val="FFFFFF"/>
                 </a:solidFill>
@@ -27560,7 +28802,7 @@
               </a:lnSpc>
             </a:pPr>
             <a:r>
-              <a:rPr sz="1150" b="0">
+              <a:rPr sz="1150" b="0" i="0">
                 <a:solidFill>
                   <a:srgbClr val="1A1A1A"/>
                 </a:solidFill>
@@ -27576,7 +28818,7 @@
               </a:lnSpc>
             </a:pPr>
             <a:r>
-              <a:rPr sz="1150" b="0">
+              <a:rPr sz="1150" b="0" i="0">
                 <a:solidFill>
                   <a:srgbClr val="1A1A1A"/>
                 </a:solidFill>
@@ -27592,7 +28834,7 @@
               </a:lnSpc>
             </a:pPr>
             <a:r>
-              <a:rPr sz="1150" b="0">
+              <a:rPr sz="1150" b="0" i="0">
                 <a:solidFill>
                   <a:srgbClr val="1A1A1A"/>
                 </a:solidFill>
@@ -27608,7 +28850,7 @@
               </a:lnSpc>
             </a:pPr>
             <a:r>
-              <a:rPr sz="1150" b="0">
+              <a:rPr sz="1150" b="0" i="0">
                 <a:solidFill>
                   <a:srgbClr val="1A1A1A"/>
                 </a:solidFill>
@@ -27624,7 +28866,7 @@
               </a:lnSpc>
             </a:pPr>
             <a:r>
-              <a:rPr sz="1150" b="0">
+              <a:rPr sz="1150" b="0" i="0">
                 <a:solidFill>
                   <a:srgbClr val="1A1A1A"/>
                 </a:solidFill>
@@ -27640,7 +28882,7 @@
               </a:lnSpc>
             </a:pPr>
             <a:r>
-              <a:rPr sz="1150" b="0">
+              <a:rPr sz="1150" b="0" i="0">
                 <a:solidFill>
                   <a:srgbClr val="1A1A1A"/>
                 </a:solidFill>
@@ -27767,7 +29009,7 @@
               </a:lnSpc>
             </a:pPr>
             <a:r>
-              <a:rPr sz="1500" b="1">
+              <a:rPr sz="1500" b="1" i="0">
                 <a:solidFill>
                   <a:srgbClr val="FFFFFF"/>
                 </a:solidFill>
@@ -27806,7 +29048,7 @@
               </a:lnSpc>
             </a:pPr>
             <a:r>
-              <a:rPr sz="1150" b="0">
+              <a:rPr sz="1150" b="0" i="0">
                 <a:solidFill>
                   <a:srgbClr val="1A1A1A"/>
                 </a:solidFill>
@@ -27822,7 +29064,7 @@
               </a:lnSpc>
             </a:pPr>
             <a:r>
-              <a:rPr sz="1150" b="0">
+              <a:rPr sz="1150" b="0" i="0">
                 <a:solidFill>
                   <a:srgbClr val="1A1A1A"/>
                 </a:solidFill>
@@ -27838,7 +29080,7 @@
               </a:lnSpc>
             </a:pPr>
             <a:r>
-              <a:rPr sz="1150" b="0">
+              <a:rPr sz="1150" b="0" i="0">
                 <a:solidFill>
                   <a:srgbClr val="1A1A1A"/>
                 </a:solidFill>
@@ -27854,7 +29096,7 @@
               </a:lnSpc>
             </a:pPr>
             <a:r>
-              <a:rPr sz="1150" b="0">
+              <a:rPr sz="1150" b="0" i="0">
                 <a:solidFill>
                   <a:srgbClr val="1A1A1A"/>
                 </a:solidFill>
@@ -27870,7 +29112,7 @@
               </a:lnSpc>
             </a:pPr>
             <a:r>
-              <a:rPr sz="1150" b="0">
+              <a:rPr sz="1150" b="0" i="0">
                 <a:solidFill>
                   <a:srgbClr val="1A1A1A"/>
                 </a:solidFill>
@@ -27886,7 +29128,7 @@
               </a:lnSpc>
             </a:pPr>
             <a:r>
-              <a:rPr sz="1150" b="0">
+              <a:rPr sz="1150" b="0" i="0">
                 <a:solidFill>
                   <a:srgbClr val="1A1A1A"/>
                 </a:solidFill>
@@ -27902,7 +29144,7 @@
               </a:lnSpc>
             </a:pPr>
             <a:r>
-              <a:rPr sz="1150" b="0">
+              <a:rPr sz="1150" b="0" i="0">
                 <a:solidFill>
                   <a:srgbClr val="1A1A1A"/>
                 </a:solidFill>
@@ -27921,8 +29163,8 @@
         </p:nvSpPr>
         <p:spPr>
           <a:xfrm>
-            <a:off x="457200" y="5989320"/>
-            <a:ext cx="11247120" cy="457200"/>
+            <a:off x="457200" y="5733288"/>
+            <a:ext cx="11247120" cy="320040"/>
           </a:xfrm>
           <a:prstGeom prst="rect">
             <a:avLst/>
@@ -27941,7 +29183,7 @@
               </a:lnSpc>
             </a:pPr>
             <a:r>
-              <a:rPr sz="1000" b="0">
+              <a:rPr sz="1000" b="0" i="0">
                 <a:solidFill>
                   <a:srgbClr val="595959"/>
                 </a:solidFill>
@@ -27954,7 +29196,90 @@
       </p:sp>
       <p:sp>
         <p:nvSpPr>
-          <p:cNvPr id="17" name="TextBox 16"/>
+          <p:cNvPr id="17" name="Rectangle 16"/>
+          <p:cNvSpPr/>
+          <p:nvPr/>
+        </p:nvSpPr>
+        <p:spPr>
+          <a:xfrm>
+            <a:off x="457200" y="6080760"/>
+            <a:ext cx="11274552" cy="365760"/>
+          </a:xfrm>
+          <a:prstGeom prst="rect">
+            <a:avLst/>
+          </a:prstGeom>
+          <a:solidFill>
+            <a:srgbClr val="1A1A1A"/>
+          </a:solidFill>
+          <a:ln>
+            <a:noFill/>
+          </a:ln>
+          <a:effectLst/>
+        </p:spPr>
+        <p:style>
+          <a:lnRef idx="1">
+            <a:schemeClr val="accent1"/>
+          </a:lnRef>
+          <a:fillRef idx="3">
+            <a:schemeClr val="accent1"/>
+          </a:fillRef>
+          <a:effectRef idx="2">
+            <a:schemeClr val="accent1"/>
+          </a:effectRef>
+          <a:fontRef idx="minor">
+            <a:schemeClr val="lt1"/>
+          </a:fontRef>
+        </p:style>
+        <p:txBody>
+          <a:bodyPr rtlCol="0" anchor="ctr"/>
+          <a:lstStyle/>
+          <a:p>
+            <a:pPr algn="ctr"/>
+          </a:p>
+        </p:txBody>
+      </p:sp>
+      <p:sp>
+        <p:nvSpPr>
+          <p:cNvPr id="18" name="TextBox 17"/>
+          <p:cNvSpPr txBox="1"/>
+          <p:nvPr/>
+        </p:nvSpPr>
+        <p:spPr>
+          <a:xfrm>
+            <a:off x="457200" y="6126480"/>
+            <a:ext cx="11274552" cy="274320"/>
+          </a:xfrm>
+          <a:prstGeom prst="rect">
+            <a:avLst/>
+          </a:prstGeom>
+          <a:noFill/>
+        </p:spPr>
+        <p:txBody>
+          <a:bodyPr wrap="square" lIns="25400" rIns="25400" tIns="25400" bIns="25400">
+            <a:spAutoFit/>
+          </a:bodyPr>
+          <a:lstStyle/>
+          <a:p>
+            <a:pPr algn="ctr">
+              <a:lnSpc>
+                <a:spcPct val="120000"/>
+              </a:lnSpc>
+            </a:pPr>
+            <a:r>
+              <a:rPr sz="1100" b="1" i="0">
+                <a:solidFill>
+                  <a:srgbClr val="FFFFFF"/>
+                </a:solidFill>
+                <a:latin typeface="Calibri"/>
+              </a:rPr>
+              <a:t>База достаточна для предварительного выбора стратегии и дизайна пилота; апробация — этап пилота</a:t>
+            </a:r>
+          </a:p>
+        </p:txBody>
+      </p:sp>
+      <p:sp>
+        <p:nvSpPr>
+          <p:cNvPr id="19" name="TextBox 18"/>
           <p:cNvSpPr txBox="1"/>
           <p:nvPr/>
         </p:nvSpPr>
@@ -27988,7 +29313,7 @@
       </p:sp>
       <p:sp>
         <p:nvSpPr>
-          <p:cNvPr id="18" name="TextBox 17"/>
+          <p:cNvPr id="20" name="TextBox 19"/>
           <p:cNvSpPr txBox="1"/>
           <p:nvPr/>
         </p:nvSpPr>
@@ -28193,7 +29518,7 @@
               </a:lnSpc>
             </a:pPr>
             <a:r>
-              <a:rPr sz="1200" b="0">
+              <a:rPr sz="1200" b="0" i="0">
                 <a:solidFill>
                   <a:srgbClr val="595959"/>
                 </a:solidFill>
@@ -28232,7 +29557,7 @@
               </a:lnSpc>
             </a:pPr>
             <a:r>
-              <a:rPr sz="3200" b="1">
+              <a:rPr sz="3200" b="1" i="0">
                 <a:solidFill>
                   <a:srgbClr val="ED0028"/>
                 </a:solidFill>
@@ -28271,7 +29596,7 @@
               </a:lnSpc>
             </a:pPr>
             <a:r>
-              <a:rPr sz="1150" b="0">
+              <a:rPr sz="1150" b="0" i="0">
                 <a:solidFill>
                   <a:srgbClr val="1A1A1A"/>
                 </a:solidFill>
@@ -28287,7 +29612,7 @@
               </a:lnSpc>
             </a:pPr>
             <a:r>
-              <a:rPr sz="1150" b="0">
+              <a:rPr sz="1150" b="0" i="0">
                 <a:solidFill>
                   <a:srgbClr val="1A1A1A"/>
                 </a:solidFill>
@@ -28303,7 +29628,7 @@
               </a:lnSpc>
             </a:pPr>
             <a:r>
-              <a:rPr sz="1150" b="0">
+              <a:rPr sz="1150" b="0" i="0">
                 <a:solidFill>
                   <a:srgbClr val="1A1A1A"/>
                 </a:solidFill>
@@ -28386,7 +29711,7 @@
               </a:lnSpc>
             </a:pPr>
             <a:r>
-              <a:rPr sz="1200" b="0">
+              <a:rPr sz="1200" b="0" i="0">
                 <a:solidFill>
                   <a:srgbClr val="595959"/>
                 </a:solidFill>
@@ -28425,7 +29750,7 @@
               </a:lnSpc>
             </a:pPr>
             <a:r>
-              <a:rPr sz="3200" b="1">
+              <a:rPr sz="3200" b="1" i="0">
                 <a:solidFill>
                   <a:srgbClr val="ED0028"/>
                 </a:solidFill>
@@ -28464,7 +29789,7 @@
               </a:lnSpc>
             </a:pPr>
             <a:r>
-              <a:rPr sz="1150" b="0">
+              <a:rPr sz="1150" b="0" i="0">
                 <a:solidFill>
                   <a:srgbClr val="1A1A1A"/>
                 </a:solidFill>
@@ -28480,7 +29805,7 @@
               </a:lnSpc>
             </a:pPr>
             <a:r>
-              <a:rPr sz="1150" b="0">
+              <a:rPr sz="1150" b="0" i="0">
                 <a:solidFill>
                   <a:srgbClr val="1A1A1A"/>
                 </a:solidFill>
@@ -28496,7 +29821,7 @@
               </a:lnSpc>
             </a:pPr>
             <a:r>
-              <a:rPr sz="1150" b="0">
+              <a:rPr sz="1150" b="0" i="0">
                 <a:solidFill>
                   <a:srgbClr val="1A1A1A"/>
                 </a:solidFill>
@@ -28579,7 +29904,7 @@
               </a:lnSpc>
             </a:pPr>
             <a:r>
-              <a:rPr sz="1200" b="0">
+              <a:rPr sz="1200" b="0" i="0">
                 <a:solidFill>
                   <a:srgbClr val="595959"/>
                 </a:solidFill>
@@ -28618,7 +29943,7 @@
               </a:lnSpc>
             </a:pPr>
             <a:r>
-              <a:rPr sz="3200" b="1">
+              <a:rPr sz="3200" b="1" i="0">
                 <a:solidFill>
                   <a:srgbClr val="ED0028"/>
                 </a:solidFill>
@@ -28657,7 +29982,7 @@
               </a:lnSpc>
             </a:pPr>
             <a:r>
-              <a:rPr sz="1150" b="0">
+              <a:rPr sz="1150" b="0" i="0">
                 <a:solidFill>
                   <a:srgbClr val="1A1A1A"/>
                 </a:solidFill>
@@ -28673,7 +29998,7 @@
               </a:lnSpc>
             </a:pPr>
             <a:r>
-              <a:rPr sz="1150" b="0">
+              <a:rPr sz="1150" b="0" i="0">
                 <a:solidFill>
                   <a:srgbClr val="1A1A1A"/>
                 </a:solidFill>
@@ -28689,7 +30014,7 @@
               </a:lnSpc>
             </a:pPr>
             <a:r>
-              <a:rPr sz="1150" b="0">
+              <a:rPr sz="1150" b="0" i="0">
                 <a:solidFill>
                   <a:srgbClr val="1A1A1A"/>
                 </a:solidFill>
@@ -28772,7 +30097,7 @@
               </a:lnSpc>
             </a:pPr>
             <a:r>
-              <a:rPr sz="1200" b="0">
+              <a:rPr sz="1200" b="0" i="0">
                 <a:solidFill>
                   <a:srgbClr val="595959"/>
                 </a:solidFill>
@@ -28811,7 +30136,7 @@
               </a:lnSpc>
             </a:pPr>
             <a:r>
-              <a:rPr sz="3200" b="1">
+              <a:rPr sz="3200" b="1" i="0">
                 <a:solidFill>
                   <a:srgbClr val="ED0028"/>
                 </a:solidFill>
@@ -28850,7 +30175,7 @@
               </a:lnSpc>
             </a:pPr>
             <a:r>
-              <a:rPr sz="1150" b="0">
+              <a:rPr sz="1150" b="0" i="0">
                 <a:solidFill>
                   <a:srgbClr val="1A1A1A"/>
                 </a:solidFill>
@@ -28866,7 +30191,7 @@
               </a:lnSpc>
             </a:pPr>
             <a:r>
-              <a:rPr sz="1150" b="0">
+              <a:rPr sz="1150" b="0" i="0">
                 <a:solidFill>
                   <a:srgbClr val="1A1A1A"/>
                 </a:solidFill>
@@ -28882,7 +30207,7 @@
               </a:lnSpc>
             </a:pPr>
             <a:r>
-              <a:rPr sz="1150" b="0">
+              <a:rPr sz="1150" b="0" i="0">
                 <a:solidFill>
                   <a:srgbClr val="1A1A1A"/>
                 </a:solidFill>
@@ -28895,7 +30220,90 @@
       </p:sp>
       <p:sp>
         <p:nvSpPr>
-          <p:cNvPr id="20" name="TextBox 19"/>
+          <p:cNvPr id="20" name="Rectangle 19"/>
+          <p:cNvSpPr/>
+          <p:nvPr/>
+        </p:nvSpPr>
+        <p:spPr>
+          <a:xfrm>
+            <a:off x="457200" y="6080760"/>
+            <a:ext cx="11274552" cy="365760"/>
+          </a:xfrm>
+          <a:prstGeom prst="rect">
+            <a:avLst/>
+          </a:prstGeom>
+          <a:solidFill>
+            <a:srgbClr val="1A1A1A"/>
+          </a:solidFill>
+          <a:ln>
+            <a:noFill/>
+          </a:ln>
+          <a:effectLst/>
+        </p:spPr>
+        <p:style>
+          <a:lnRef idx="1">
+            <a:schemeClr val="accent1"/>
+          </a:lnRef>
+          <a:fillRef idx="3">
+            <a:schemeClr val="accent1"/>
+          </a:fillRef>
+          <a:effectRef idx="2">
+            <a:schemeClr val="accent1"/>
+          </a:effectRef>
+          <a:fontRef idx="minor">
+            <a:schemeClr val="lt1"/>
+          </a:fontRef>
+        </p:style>
+        <p:txBody>
+          <a:bodyPr rtlCol="0" anchor="ctr"/>
+          <a:lstStyle/>
+          <a:p>
+            <a:pPr algn="ctr"/>
+          </a:p>
+        </p:txBody>
+      </p:sp>
+      <p:sp>
+        <p:nvSpPr>
+          <p:cNvPr id="21" name="TextBox 20"/>
+          <p:cNvSpPr txBox="1"/>
+          <p:nvPr/>
+        </p:nvSpPr>
+        <p:spPr>
+          <a:xfrm>
+            <a:off x="457200" y="6126480"/>
+            <a:ext cx="11274552" cy="274320"/>
+          </a:xfrm>
+          <a:prstGeom prst="rect">
+            <a:avLst/>
+          </a:prstGeom>
+          <a:noFill/>
+        </p:spPr>
+        <p:txBody>
+          <a:bodyPr wrap="square" lIns="25400" rIns="25400" tIns="25400" bIns="25400">
+            <a:spAutoFit/>
+          </a:bodyPr>
+          <a:lstStyle/>
+          <a:p>
+            <a:pPr algn="ctr">
+              <a:lnSpc>
+                <a:spcPct val="120000"/>
+              </a:lnSpc>
+            </a:pPr>
+            <a:r>
+              <a:rPr sz="1100" b="1" i="0">
+                <a:solidFill>
+                  <a:srgbClr val="FFFFFF"/>
+                </a:solidFill>
+                <a:latin typeface="Calibri"/>
+              </a:rPr>
+              <a:t>Прежняя логика расширения парка и географии перестаёт быть достаточным основанием конкурентной борьбы</a:t>
+            </a:r>
+          </a:p>
+        </p:txBody>
+      </p:sp>
+      <p:sp>
+        <p:nvSpPr>
+          <p:cNvPr id="22" name="TextBox 21"/>
           <p:cNvSpPr txBox="1"/>
           <p:nvPr/>
         </p:nvSpPr>
@@ -28929,7 +30337,7 @@
       </p:sp>
       <p:sp>
         <p:nvSpPr>
-          <p:cNvPr id="21" name="TextBox 20"/>
+          <p:cNvPr id="23" name="TextBox 22"/>
           <p:cNvSpPr txBox="1"/>
           <p:nvPr/>
         </p:nvSpPr>
@@ -29090,7 +30498,7 @@
               </a:lnSpc>
             </a:pPr>
             <a:r>
-              <a:rPr sz="1300" b="0">
+              <a:rPr sz="1300" b="0" i="0">
                 <a:solidFill>
                   <a:srgbClr val="595959"/>
                 </a:solidFill>
@@ -29173,7 +30581,7 @@
               </a:lnSpc>
             </a:pPr>
             <a:r>
-              <a:rPr sz="1100" b="1">
+              <a:rPr sz="1100" b="1" i="0">
                 <a:solidFill>
                   <a:srgbClr val="FFFFFF"/>
                 </a:solidFill>
@@ -29212,7 +30620,7 @@
               </a:lnSpc>
             </a:pPr>
             <a:r>
-              <a:rPr sz="1100" b="1">
+              <a:rPr sz="1100" b="1" i="0">
                 <a:solidFill>
                   <a:srgbClr val="FFFFFF"/>
                 </a:solidFill>
@@ -29228,7 +30636,7 @@
               </a:lnSpc>
             </a:pPr>
             <a:r>
-              <a:rPr sz="1100" b="1">
+              <a:rPr sz="1100" b="1" i="0">
                 <a:solidFill>
                   <a:srgbClr val="FFFFFF"/>
                 </a:solidFill>
@@ -29267,7 +30675,7 @@
               </a:lnSpc>
             </a:pPr>
             <a:r>
-              <a:rPr sz="1100" b="1">
+              <a:rPr sz="1100" b="1" i="0">
                 <a:solidFill>
                   <a:srgbClr val="FFFFFF"/>
                 </a:solidFill>
@@ -29283,7 +30691,7 @@
               </a:lnSpc>
             </a:pPr>
             <a:r>
-              <a:rPr sz="1100" b="1">
+              <a:rPr sz="1100" b="1" i="0">
                 <a:solidFill>
                   <a:srgbClr val="FFFFFF"/>
                 </a:solidFill>
@@ -29322,7 +30730,7 @@
               </a:lnSpc>
             </a:pPr>
             <a:r>
-              <a:rPr sz="1100" b="1">
+              <a:rPr sz="1100" b="1" i="0">
                 <a:solidFill>
                   <a:srgbClr val="FFFFFF"/>
                 </a:solidFill>
@@ -29361,7 +30769,7 @@
               </a:lnSpc>
             </a:pPr>
             <a:r>
-              <a:rPr sz="1100" b="1">
+              <a:rPr sz="1100" b="1" i="0">
                 <a:solidFill>
                   <a:srgbClr val="FFFFFF"/>
                 </a:solidFill>
@@ -29444,7 +30852,7 @@
               </a:lnSpc>
             </a:pPr>
             <a:r>
-              <a:rPr sz="1200" b="1">
+              <a:rPr sz="1200" b="1" i="0">
                 <a:solidFill>
                   <a:srgbClr val="1A1A1A"/>
                 </a:solidFill>
@@ -29483,7 +30891,7 @@
               </a:lnSpc>
             </a:pPr>
             <a:r>
-              <a:rPr sz="1200" b="0">
+              <a:rPr sz="1200" b="0" i="0">
                 <a:solidFill>
                   <a:srgbClr val="1A1A1A"/>
                 </a:solidFill>
@@ -29522,7 +30930,7 @@
               </a:lnSpc>
             </a:pPr>
             <a:r>
-              <a:rPr sz="1200" b="1">
+              <a:rPr sz="1200" b="1" i="0">
                 <a:solidFill>
                   <a:srgbClr val="C01A1A"/>
                 </a:solidFill>
@@ -29561,7 +30969,7 @@
               </a:lnSpc>
             </a:pPr>
             <a:r>
-              <a:rPr sz="1200" b="0">
+              <a:rPr sz="1200" b="0" i="0">
                 <a:solidFill>
                   <a:srgbClr val="1A1A1A"/>
                 </a:solidFill>
@@ -29600,7 +31008,7 @@
               </a:lnSpc>
             </a:pPr>
             <a:r>
-              <a:rPr sz="1200" b="1">
+              <a:rPr sz="1200" b="1" i="0">
                 <a:solidFill>
                   <a:srgbClr val="ED0028"/>
                 </a:solidFill>
@@ -29683,7 +31091,7 @@
               </a:lnSpc>
             </a:pPr>
             <a:r>
-              <a:rPr sz="1200" b="1">
+              <a:rPr sz="1200" b="1" i="0">
                 <a:solidFill>
                   <a:srgbClr val="1A1A1A"/>
                 </a:solidFill>
@@ -29722,7 +31130,7 @@
               </a:lnSpc>
             </a:pPr>
             <a:r>
-              <a:rPr sz="1200" b="0">
+              <a:rPr sz="1200" b="0" i="0">
                 <a:solidFill>
                   <a:srgbClr val="1A1A1A"/>
                 </a:solidFill>
@@ -29761,7 +31169,7 @@
               </a:lnSpc>
             </a:pPr>
             <a:r>
-              <a:rPr sz="1200" b="1">
+              <a:rPr sz="1200" b="1" i="0">
                 <a:solidFill>
                   <a:srgbClr val="1E7A3C"/>
                 </a:solidFill>
@@ -29800,7 +31208,7 @@
               </a:lnSpc>
             </a:pPr>
             <a:r>
-              <a:rPr sz="1200" b="0">
+              <a:rPr sz="1200" b="0" i="0">
                 <a:solidFill>
                   <a:srgbClr val="1A1A1A"/>
                 </a:solidFill>
@@ -29839,7 +31247,7 @@
               </a:lnSpc>
             </a:pPr>
             <a:r>
-              <a:rPr sz="1200" b="1">
+              <a:rPr sz="1200" b="1" i="0">
                 <a:solidFill>
                   <a:srgbClr val="ED0028"/>
                 </a:solidFill>
@@ -29922,7 +31330,7 @@
               </a:lnSpc>
             </a:pPr>
             <a:r>
-              <a:rPr sz="1200" b="1">
+              <a:rPr sz="1200" b="1" i="0">
                 <a:solidFill>
                   <a:srgbClr val="1A1A1A"/>
                 </a:solidFill>
@@ -29961,7 +31369,7 @@
               </a:lnSpc>
             </a:pPr>
             <a:r>
-              <a:rPr sz="1200" b="0">
+              <a:rPr sz="1200" b="0" i="0">
                 <a:solidFill>
                   <a:srgbClr val="1A1A1A"/>
                 </a:solidFill>
@@ -30000,7 +31408,7 @@
               </a:lnSpc>
             </a:pPr>
             <a:r>
-              <a:rPr sz="1200" b="1">
+              <a:rPr sz="1200" b="1" i="0">
                 <a:solidFill>
                   <a:srgbClr val="C01A1A"/>
                 </a:solidFill>
@@ -30039,7 +31447,7 @@
               </a:lnSpc>
             </a:pPr>
             <a:r>
-              <a:rPr sz="1200" b="0">
+              <a:rPr sz="1200" b="0" i="0">
                 <a:solidFill>
                   <a:srgbClr val="1A1A1A"/>
                 </a:solidFill>
@@ -30078,7 +31486,7 @@
               </a:lnSpc>
             </a:pPr>
             <a:r>
-              <a:rPr sz="1200" b="1">
+              <a:rPr sz="1200" b="1" i="0">
                 <a:solidFill>
                   <a:srgbClr val="ED0028"/>
                 </a:solidFill>
@@ -30161,7 +31569,7 @@
               </a:lnSpc>
             </a:pPr>
             <a:r>
-              <a:rPr sz="1200" b="1">
+              <a:rPr sz="1200" b="1" i="0">
                 <a:solidFill>
                   <a:srgbClr val="1A1A1A"/>
                 </a:solidFill>
@@ -30200,7 +31608,7 @@
               </a:lnSpc>
             </a:pPr>
             <a:r>
-              <a:rPr sz="1200" b="0">
+              <a:rPr sz="1200" b="0" i="0">
                 <a:solidFill>
                   <a:srgbClr val="1A1A1A"/>
                 </a:solidFill>
@@ -30239,7 +31647,7 @@
               </a:lnSpc>
             </a:pPr>
             <a:r>
-              <a:rPr sz="1200" b="1">
+              <a:rPr sz="1200" b="1" i="0">
                 <a:solidFill>
                   <a:srgbClr val="1E7A3C"/>
                 </a:solidFill>
@@ -30278,7 +31686,7 @@
               </a:lnSpc>
             </a:pPr>
             <a:r>
-              <a:rPr sz="1200" b="0">
+              <a:rPr sz="1200" b="0" i="0">
                 <a:solidFill>
                   <a:srgbClr val="1A1A1A"/>
                 </a:solidFill>
@@ -30317,7 +31725,7 @@
               </a:lnSpc>
             </a:pPr>
             <a:r>
-              <a:rPr sz="1200" b="1">
+              <a:rPr sz="1200" b="1" i="0">
                 <a:solidFill>
                   <a:srgbClr val="ED0028"/>
                 </a:solidFill>
@@ -30400,7 +31808,7 @@
               </a:lnSpc>
             </a:pPr>
             <a:r>
-              <a:rPr sz="1200" b="1">
+              <a:rPr sz="1200" b="1" i="0">
                 <a:solidFill>
                   <a:srgbClr val="1A1A1A"/>
                 </a:solidFill>
@@ -30439,7 +31847,7 @@
               </a:lnSpc>
             </a:pPr>
             <a:r>
-              <a:rPr sz="1200" b="0">
+              <a:rPr sz="1200" b="0" i="0">
                 <a:solidFill>
                   <a:srgbClr val="1A1A1A"/>
                 </a:solidFill>
@@ -30478,7 +31886,7 @@
               </a:lnSpc>
             </a:pPr>
             <a:r>
-              <a:rPr sz="1200" b="1">
+              <a:rPr sz="1200" b="1" i="0">
                 <a:solidFill>
                   <a:srgbClr val="1E7A3C"/>
                 </a:solidFill>
@@ -30517,7 +31925,7 @@
               </a:lnSpc>
             </a:pPr>
             <a:r>
-              <a:rPr sz="1200" b="0">
+              <a:rPr sz="1200" b="0" i="0">
                 <a:solidFill>
                   <a:srgbClr val="1A1A1A"/>
                 </a:solidFill>
@@ -30556,7 +31964,7 @@
               </a:lnSpc>
             </a:pPr>
             <a:r>
-              <a:rPr sz="1200" b="1">
+              <a:rPr sz="1200" b="1" i="0">
                 <a:solidFill>
                   <a:srgbClr val="ED0028"/>
                 </a:solidFill>
@@ -30575,7 +31983,7 @@
         </p:nvSpPr>
         <p:spPr>
           <a:xfrm>
-            <a:off x="640080" y="6263640"/>
+            <a:off x="640080" y="5733288"/>
             <a:ext cx="10972800" cy="274320"/>
           </a:xfrm>
           <a:prstGeom prst="rect">
@@ -30595,7 +32003,7 @@
               </a:lnSpc>
             </a:pPr>
             <a:r>
-              <a:rPr sz="1000" b="0">
+              <a:rPr sz="1000" b="0" i="0">
                 <a:solidFill>
                   <a:srgbClr val="595959"/>
                 </a:solidFill>
@@ -30608,7 +32016,90 @@
       </p:sp>
       <p:sp>
         <p:nvSpPr>
-          <p:cNvPr id="42" name="TextBox 41"/>
+          <p:cNvPr id="42" name="Rectangle 41"/>
+          <p:cNvSpPr/>
+          <p:nvPr/>
+        </p:nvSpPr>
+        <p:spPr>
+          <a:xfrm>
+            <a:off x="457200" y="6080760"/>
+            <a:ext cx="11274552" cy="365760"/>
+          </a:xfrm>
+          <a:prstGeom prst="rect">
+            <a:avLst/>
+          </a:prstGeom>
+          <a:solidFill>
+            <a:srgbClr val="1A1A1A"/>
+          </a:solidFill>
+          <a:ln>
+            <a:noFill/>
+          </a:ln>
+          <a:effectLst/>
+        </p:spPr>
+        <p:style>
+          <a:lnRef idx="1">
+            <a:schemeClr val="accent1"/>
+          </a:lnRef>
+          <a:fillRef idx="3">
+            <a:schemeClr val="accent1"/>
+          </a:fillRef>
+          <a:effectRef idx="2">
+            <a:schemeClr val="accent1"/>
+          </a:effectRef>
+          <a:fontRef idx="minor">
+            <a:schemeClr val="lt1"/>
+          </a:fontRef>
+        </p:style>
+        <p:txBody>
+          <a:bodyPr rtlCol="0" anchor="ctr"/>
+          <a:lstStyle/>
+          <a:p>
+            <a:pPr algn="ctr"/>
+          </a:p>
+        </p:txBody>
+      </p:sp>
+      <p:sp>
+        <p:nvSpPr>
+          <p:cNvPr id="43" name="TextBox 42"/>
+          <p:cNvSpPr txBox="1"/>
+          <p:nvPr/>
+        </p:nvSpPr>
+        <p:spPr>
+          <a:xfrm>
+            <a:off x="457200" y="6126480"/>
+            <a:ext cx="11274552" cy="274320"/>
+          </a:xfrm>
+          <a:prstGeom prst="rect">
+            <a:avLst/>
+          </a:prstGeom>
+          <a:noFill/>
+        </p:spPr>
+        <p:txBody>
+          <a:bodyPr wrap="square" lIns="25400" rIns="25400" tIns="25400" bIns="25400">
+            <a:spAutoFit/>
+          </a:bodyPr>
+          <a:lstStyle/>
+          <a:p>
+            <a:pPr algn="ctr">
+              <a:lnSpc>
+                <a:spcPct val="120000"/>
+              </a:lnSpc>
+            </a:pPr>
+            <a:r>
+              <a:rPr sz="1100" b="1" i="0">
+                <a:solidFill>
+                  <a:srgbClr val="FFFFFF"/>
+                </a:solidFill>
+                <a:latin typeface="Calibri"/>
+              </a:rPr>
+              <a:t>Параметры расходятся в 4× по утилизации и в широком диапазоне по динамике — единый режим по портфелю невозможен</a:t>
+            </a:r>
+          </a:p>
+        </p:txBody>
+      </p:sp>
+      <p:sp>
+        <p:nvSpPr>
+          <p:cNvPr id="44" name="TextBox 43"/>
           <p:cNvSpPr txBox="1"/>
           <p:nvPr/>
         </p:nvSpPr>
@@ -30642,7 +32133,7 @@
       </p:sp>
       <p:sp>
         <p:nvSpPr>
-          <p:cNvPr id="43" name="TextBox 42"/>
+          <p:cNvPr id="45" name="TextBox 44"/>
           <p:cNvSpPr txBox="1"/>
           <p:nvPr/>
         </p:nvSpPr>
@@ -30847,7 +32338,7 @@
               </a:lnSpc>
             </a:pPr>
             <a:r>
-              <a:rPr sz="1800" b="1">
+              <a:rPr sz="1800" b="1" i="0">
                 <a:solidFill>
                   <a:srgbClr val="1A1A1A"/>
                 </a:solidFill>
@@ -30886,7 +32377,7 @@
               </a:lnSpc>
             </a:pPr>
             <a:r>
-              <a:rPr sz="1100" b="0">
+              <a:rPr sz="1100" b="0" i="0">
                 <a:solidFill>
                   <a:srgbClr val="595959"/>
                 </a:solidFill>
@@ -30925,7 +32416,7 @@
               </a:lnSpc>
             </a:pPr>
             <a:r>
-              <a:rPr sz="1300" b="1">
+              <a:rPr sz="1300" b="1" i="0">
                 <a:solidFill>
                   <a:srgbClr val="1A1A1A"/>
                 </a:solidFill>
@@ -30964,7 +32455,7 @@
               </a:lnSpc>
             </a:pPr>
             <a:r>
-              <a:rPr sz="1050" b="0">
+              <a:rPr sz="1050" b="0" i="0">
                 <a:solidFill>
                   <a:srgbClr val="595959"/>
                 </a:solidFill>
@@ -30980,7 +32471,7 @@
               </a:lnSpc>
             </a:pPr>
             <a:r>
-              <a:rPr sz="1050" b="0">
+              <a:rPr sz="1050" b="0" i="0">
                 <a:solidFill>
                   <a:srgbClr val="595959"/>
                 </a:solidFill>
@@ -31063,7 +32554,7 @@
               </a:lnSpc>
             </a:pPr>
             <a:r>
-              <a:rPr sz="1800" b="1">
+              <a:rPr sz="1800" b="1" i="0">
                 <a:solidFill>
                   <a:srgbClr val="FFFFFF"/>
                 </a:solidFill>
@@ -31102,7 +32593,7 @@
               </a:lnSpc>
             </a:pPr>
             <a:r>
-              <a:rPr sz="1100" b="0">
+              <a:rPr sz="1100" b="0" i="0">
                 <a:solidFill>
                   <a:srgbClr val="FFFFFF"/>
                 </a:solidFill>
@@ -31141,7 +32632,7 @@
               </a:lnSpc>
             </a:pPr>
             <a:r>
-              <a:rPr sz="1300" b="1">
+              <a:rPr sz="1300" b="1" i="0">
                 <a:solidFill>
                   <a:srgbClr val="FFFFFF"/>
                 </a:solidFill>
@@ -31180,7 +32671,7 @@
               </a:lnSpc>
             </a:pPr>
             <a:r>
-              <a:rPr sz="1050" b="0">
+              <a:rPr sz="1050" b="0" i="0">
                 <a:solidFill>
                   <a:srgbClr val="FFFFFF"/>
                 </a:solidFill>
@@ -31196,7 +32687,7 @@
               </a:lnSpc>
             </a:pPr>
             <a:r>
-              <a:rPr sz="1050" b="0">
+              <a:rPr sz="1050" b="0" i="0">
                 <a:solidFill>
                   <a:srgbClr val="FFFFFF"/>
                 </a:solidFill>
@@ -31279,7 +32770,7 @@
               </a:lnSpc>
             </a:pPr>
             <a:r>
-              <a:rPr sz="1800" b="1">
+              <a:rPr sz="1800" b="1" i="0">
                 <a:solidFill>
                   <a:srgbClr val="1A1A1A"/>
                 </a:solidFill>
@@ -31318,7 +32809,7 @@
               </a:lnSpc>
             </a:pPr>
             <a:r>
-              <a:rPr sz="1100" b="0">
+              <a:rPr sz="1100" b="0" i="0">
                 <a:solidFill>
                   <a:srgbClr val="595959"/>
                 </a:solidFill>
@@ -31357,7 +32848,7 @@
               </a:lnSpc>
             </a:pPr>
             <a:r>
-              <a:rPr sz="1300" b="1">
+              <a:rPr sz="1300" b="1" i="0">
                 <a:solidFill>
                   <a:srgbClr val="1A1A1A"/>
                 </a:solidFill>
@@ -31396,7 +32887,7 @@
               </a:lnSpc>
             </a:pPr>
             <a:r>
-              <a:rPr sz="1050" b="0">
+              <a:rPr sz="1050" b="0" i="0">
                 <a:solidFill>
                   <a:srgbClr val="595959"/>
                 </a:solidFill>
@@ -31412,7 +32903,7 @@
               </a:lnSpc>
             </a:pPr>
             <a:r>
-              <a:rPr sz="1050" b="0">
+              <a:rPr sz="1050" b="0" i="0">
                 <a:solidFill>
                   <a:srgbClr val="595959"/>
                 </a:solidFill>
@@ -31432,7 +32923,7 @@
         <p:spPr>
           <a:xfrm>
             <a:off x="640080" y="3657600"/>
-            <a:ext cx="5486400" cy="2606040"/>
+            <a:ext cx="5486400" cy="2286000"/>
           </a:xfrm>
           <a:prstGeom prst="rect">
             <a:avLst/>
@@ -31475,8 +32966,8 @@
         </p:nvSpPr>
         <p:spPr>
           <a:xfrm>
-            <a:off x="868680" y="3794760"/>
-            <a:ext cx="5029200" cy="365760"/>
+            <a:off x="868680" y="3749039"/>
+            <a:ext cx="5029200" cy="320040"/>
           </a:xfrm>
           <a:prstGeom prst="rect">
             <a:avLst/>
@@ -31495,7 +32986,7 @@
               </a:lnSpc>
             </a:pPr>
             <a:r>
-              <a:rPr sz="1200" b="0">
+              <a:rPr sz="1200" b="0" i="0">
                 <a:solidFill>
                   <a:srgbClr val="595959"/>
                 </a:solidFill>
@@ -31514,8 +33005,8 @@
         </p:nvSpPr>
         <p:spPr>
           <a:xfrm>
-            <a:off x="868680" y="4160520"/>
-            <a:ext cx="5029200" cy="1280160"/>
+            <a:off x="868680" y="4069080"/>
+            <a:ext cx="5029200" cy="1188720"/>
           </a:xfrm>
           <a:prstGeom prst="rect">
             <a:avLst/>
@@ -31534,7 +33025,7 @@
               </a:lnSpc>
             </a:pPr>
             <a:r>
-              <a:rPr sz="6400" b="1">
+              <a:rPr sz="5800" b="1" i="0">
                 <a:solidFill>
                   <a:srgbClr val="ED0028"/>
                 </a:solidFill>
@@ -31553,49 +33044,33 @@
         </p:nvSpPr>
         <p:spPr>
           <a:xfrm>
-            <a:off x="868680" y="5440680"/>
-            <a:ext cx="5029200" cy="640080"/>
-          </a:xfrm>
-          <a:prstGeom prst="rect">
-            <a:avLst/>
-          </a:prstGeom>
-          <a:noFill/>
-        </p:spPr>
-        <p:txBody>
-          <a:bodyPr wrap="square" lIns="25400" rIns="25400" tIns="25400" bIns="25400">
-            <a:spAutoFit/>
-          </a:bodyPr>
-          <a:lstStyle/>
-          <a:p>
-            <a:pPr algn="l">
-              <a:lnSpc>
-                <a:spcPct val="130000"/>
-              </a:lnSpc>
-            </a:pPr>
-            <a:r>
-              <a:rPr sz="1200" b="0">
+            <a:off x="868680" y="5349240"/>
+            <a:ext cx="5029200" cy="457200"/>
+          </a:xfrm>
+          <a:prstGeom prst="rect">
+            <a:avLst/>
+          </a:prstGeom>
+          <a:noFill/>
+        </p:spPr>
+        <p:txBody>
+          <a:bodyPr wrap="square" lIns="25400" rIns="25400" tIns="25400" bIns="25400">
+            <a:spAutoFit/>
+          </a:bodyPr>
+          <a:lstStyle/>
+          <a:p>
+            <a:pPr algn="l">
+              <a:lnSpc>
+                <a:spcPct val="120000"/>
+              </a:lnSpc>
+            </a:pPr>
+            <a:r>
+              <a:rPr sz="1150" b="0" i="0">
                 <a:solidFill>
                   <a:srgbClr val="1A1A1A"/>
                 </a:solidFill>
                 <a:latin typeface="Calibri"/>
               </a:rPr>
-              <a:t>тыс. руб. — выручка на 1 самокат в год</a:t>
-            </a:r>
-          </a:p>
-          <a:p>
-            <a:pPr algn="l">
-              <a:lnSpc>
-                <a:spcPct val="130000"/>
-              </a:lnSpc>
-            </a:pPr>
-            <a:r>
-              <a:rPr sz="1200" b="0">
-                <a:solidFill>
-                  <a:srgbClr val="1A1A1A"/>
-                </a:solidFill>
-                <a:latin typeface="Calibri"/>
-              </a:rPr>
-              <a:t>МТС Юрент против Whoosh</a:t>
+              <a:t>тыс. руб. — выручка на 1 самокат в год · МТС Юрент против Whoosh</a:t>
             </a:r>
           </a:p>
         </p:txBody>
@@ -31609,7 +33084,7 @@
         <p:spPr>
           <a:xfrm>
             <a:off x="6355080" y="3657600"/>
-            <a:ext cx="5257800" cy="2606040"/>
+            <a:ext cx="5257800" cy="2286000"/>
           </a:xfrm>
           <a:prstGeom prst="rect">
             <a:avLst/>
@@ -31652,8 +33127,8 @@
         </p:nvSpPr>
         <p:spPr>
           <a:xfrm>
-            <a:off x="6583680" y="3794760"/>
-            <a:ext cx="5029200" cy="365760"/>
+            <a:off x="6583680" y="3749039"/>
+            <a:ext cx="5029200" cy="320040"/>
           </a:xfrm>
           <a:prstGeom prst="rect">
             <a:avLst/>
@@ -31672,7 +33147,7 @@
               </a:lnSpc>
             </a:pPr>
             <a:r>
-              <a:rPr sz="1200" b="1">
+              <a:rPr sz="1200" b="1" i="0">
                 <a:solidFill>
                   <a:srgbClr val="1A1A1A"/>
                 </a:solidFill>
@@ -31691,8 +33166,8 @@
         </p:nvSpPr>
         <p:spPr>
           <a:xfrm>
-            <a:off x="6583680" y="4160520"/>
-            <a:ext cx="4937760" cy="548640"/>
+            <a:off x="6583680" y="4069080"/>
+            <a:ext cx="4937760" cy="502920"/>
           </a:xfrm>
           <a:prstGeom prst="rect">
             <a:avLst/>
@@ -31711,7 +33186,7 @@
               </a:lnSpc>
             </a:pPr>
             <a:r>
-              <a:rPr sz="1200" b="0">
+              <a:rPr sz="1200" b="0" i="0">
                 <a:solidFill>
                   <a:srgbClr val="1A1A1A"/>
                 </a:solidFill>
@@ -31730,7 +33205,7 @@
         </p:nvSpPr>
         <p:spPr>
           <a:xfrm>
-            <a:off x="6583680" y="4754880"/>
+            <a:off x="6583680" y="4617720"/>
             <a:ext cx="4937760" cy="274320"/>
           </a:xfrm>
           <a:prstGeom prst="rect">
@@ -31750,7 +33225,7 @@
               </a:lnSpc>
             </a:pPr>
             <a:r>
-              <a:rPr sz="1150" b="0">
+              <a:rPr sz="1150" b="0" i="0">
                 <a:solidFill>
                   <a:srgbClr val="595959"/>
                 </a:solidFill>
@@ -31769,7 +33244,7 @@
         </p:nvSpPr>
         <p:spPr>
           <a:xfrm>
-            <a:off x="6583680" y="5074920"/>
+            <a:off x="6583680" y="4937760"/>
             <a:ext cx="4937760" cy="274320"/>
           </a:xfrm>
           <a:prstGeom prst="rect">
@@ -31789,7 +33264,7 @@
               </a:lnSpc>
             </a:pPr>
             <a:r>
-              <a:rPr sz="1150" b="0">
+              <a:rPr sz="1150" b="0" i="0">
                 <a:solidFill>
                   <a:srgbClr val="595959"/>
                 </a:solidFill>
@@ -31808,56 +33283,123 @@
         </p:nvSpPr>
         <p:spPr>
           <a:xfrm>
-            <a:off x="6583680" y="5440680"/>
-            <a:ext cx="4937760" cy="777240"/>
-          </a:xfrm>
-          <a:prstGeom prst="rect">
-            <a:avLst/>
-          </a:prstGeom>
-          <a:noFill/>
-        </p:spPr>
-        <p:txBody>
-          <a:bodyPr wrap="square" lIns="25400" rIns="25400" tIns="25400" bIns="25400">
-            <a:spAutoFit/>
-          </a:bodyPr>
-          <a:lstStyle/>
-          <a:p>
-            <a:pPr algn="l">
-              <a:lnSpc>
-                <a:spcPct val="130000"/>
-              </a:lnSpc>
-            </a:pPr>
-            <a:r>
-              <a:rPr sz="1100" b="0">
+            <a:off x="6583680" y="5303520"/>
+            <a:ext cx="4937760" cy="457200"/>
+          </a:xfrm>
+          <a:prstGeom prst="rect">
+            <a:avLst/>
+          </a:prstGeom>
+          <a:noFill/>
+        </p:spPr>
+        <p:txBody>
+          <a:bodyPr wrap="square" lIns="25400" rIns="25400" tIns="25400" bIns="25400">
+            <a:spAutoFit/>
+          </a:bodyPr>
+          <a:lstStyle/>
+          <a:p>
+            <a:pPr algn="l">
+              <a:lnSpc>
+                <a:spcPct val="120000"/>
+              </a:lnSpc>
+            </a:pPr>
+            <a:r>
+              <a:rPr sz="1050" b="1" i="0">
                 <a:solidFill>
                   <a:srgbClr val="ED0028"/>
                 </a:solidFill>
                 <a:latin typeface="Calibri"/>
               </a:rPr>
-              <a:t>→ доступность покрытия — критический КФУ;</a:t>
-            </a:r>
-          </a:p>
-          <a:p>
-            <a:pPr algn="l">
-              <a:lnSpc>
-                <a:spcPct val="130000"/>
-              </a:lnSpc>
-            </a:pPr>
-            <a:r>
-              <a:rPr sz="1100" b="0">
-                <a:solidFill>
-                  <a:srgbClr val="ED0028"/>
-                </a:solidFill>
-                <a:latin typeface="Calibri"/>
-              </a:rPr>
-              <a:t>   к нему привязан проектный инструмент УПС (Слайд 13)</a:t>
-            </a:r>
-          </a:p>
-        </p:txBody>
-      </p:sp>
-      <p:sp>
-        <p:nvSpPr>
-          <p:cNvPr id="29" name="TextBox 28"/>
+              <a:t>→ доступность покрытия — критический КФУ; к нему привязан УПС (Слайд 13)</a:t>
+            </a:r>
+          </a:p>
+        </p:txBody>
+      </p:sp>
+      <p:sp>
+        <p:nvSpPr>
+          <p:cNvPr id="29" name="Rectangle 28"/>
+          <p:cNvSpPr/>
+          <p:nvPr/>
+        </p:nvSpPr>
+        <p:spPr>
+          <a:xfrm>
+            <a:off x="457200" y="6080760"/>
+            <a:ext cx="11274552" cy="365760"/>
+          </a:xfrm>
+          <a:prstGeom prst="rect">
+            <a:avLst/>
+          </a:prstGeom>
+          <a:solidFill>
+            <a:srgbClr val="1A1A1A"/>
+          </a:solidFill>
+          <a:ln>
+            <a:noFill/>
+          </a:ln>
+          <a:effectLst/>
+        </p:spPr>
+        <p:style>
+          <a:lnRef idx="1">
+            <a:schemeClr val="accent1"/>
+          </a:lnRef>
+          <a:fillRef idx="3">
+            <a:schemeClr val="accent1"/>
+          </a:fillRef>
+          <a:effectRef idx="2">
+            <a:schemeClr val="accent1"/>
+          </a:effectRef>
+          <a:fontRef idx="minor">
+            <a:schemeClr val="lt1"/>
+          </a:fontRef>
+        </p:style>
+        <p:txBody>
+          <a:bodyPr rtlCol="0" anchor="ctr"/>
+          <a:lstStyle/>
+          <a:p>
+            <a:pPr algn="ctr"/>
+          </a:p>
+        </p:txBody>
+      </p:sp>
+      <p:sp>
+        <p:nvSpPr>
+          <p:cNvPr id="30" name="TextBox 29"/>
+          <p:cNvSpPr txBox="1"/>
+          <p:nvPr/>
+        </p:nvSpPr>
+        <p:spPr>
+          <a:xfrm>
+            <a:off x="457200" y="6126480"/>
+            <a:ext cx="11274552" cy="274320"/>
+          </a:xfrm>
+          <a:prstGeom prst="rect">
+            <a:avLst/>
+          </a:prstGeom>
+          <a:noFill/>
+        </p:spPr>
+        <p:txBody>
+          <a:bodyPr wrap="square" lIns="25400" rIns="25400" tIns="25400" bIns="25400">
+            <a:spAutoFit/>
+          </a:bodyPr>
+          <a:lstStyle/>
+          <a:p>
+            <a:pPr algn="ctr">
+              <a:lnSpc>
+                <a:spcPct val="120000"/>
+              </a:lnSpc>
+            </a:pPr>
+            <a:r>
+              <a:rPr sz="1100" b="1" i="0">
+                <a:solidFill>
+                  <a:srgbClr val="FFFFFF"/>
+                </a:solidFill>
+                <a:latin typeface="Calibri"/>
+              </a:rPr>
+              <a:t>Гэп закрывается не наращиванием парка, а повышением отдачи от уже размещённого парка</a:t>
+            </a:r>
+          </a:p>
+        </p:txBody>
+      </p:sp>
+      <p:sp>
+        <p:nvSpPr>
+          <p:cNvPr id="31" name="TextBox 30"/>
           <p:cNvSpPr txBox="1"/>
           <p:nvPr/>
         </p:nvSpPr>
@@ -31891,7 +33433,7 @@
       </p:sp>
       <p:sp>
         <p:nvSpPr>
-          <p:cNvPr id="30" name="TextBox 29"/>
+          <p:cNvPr id="32" name="TextBox 31"/>
           <p:cNvSpPr txBox="1"/>
           <p:nvPr/>
         </p:nvSpPr>
@@ -32140,7 +33682,7 @@
               </a:lnSpc>
             </a:pPr>
             <a:r>
-              <a:rPr sz="1500" b="1">
+              <a:rPr sz="1500" b="1" i="0">
                 <a:solidFill>
                   <a:srgbClr val="FFFFFF"/>
                 </a:solidFill>
@@ -32179,7 +33721,7 @@
               </a:lnSpc>
             </a:pPr>
             <a:r>
-              <a:rPr sz="1250" b="1">
+              <a:rPr sz="1250" b="1" i="0">
                 <a:solidFill>
                   <a:srgbClr val="1A1A1A"/>
                 </a:solidFill>
@@ -32218,7 +33760,7 @@
               </a:lnSpc>
             </a:pPr>
             <a:r>
-              <a:rPr sz="1100" b="0">
+              <a:rPr sz="1100" b="0" i="0">
                 <a:solidFill>
                   <a:srgbClr val="595959"/>
                 </a:solidFill>
@@ -32257,7 +33799,7 @@
               </a:lnSpc>
             </a:pPr>
             <a:r>
-              <a:rPr sz="1250" b="1">
+              <a:rPr sz="1250" b="1" i="0">
                 <a:solidFill>
                   <a:srgbClr val="1A1A1A"/>
                 </a:solidFill>
@@ -32296,7 +33838,7 @@
               </a:lnSpc>
             </a:pPr>
             <a:r>
-              <a:rPr sz="1100" b="0">
+              <a:rPr sz="1100" b="0" i="0">
                 <a:solidFill>
                   <a:srgbClr val="595959"/>
                 </a:solidFill>
@@ -32335,7 +33877,7 @@
               </a:lnSpc>
             </a:pPr>
             <a:r>
-              <a:rPr sz="1250" b="1">
+              <a:rPr sz="1250" b="1" i="0">
                 <a:solidFill>
                   <a:srgbClr val="1A1A1A"/>
                 </a:solidFill>
@@ -32374,7 +33916,7 @@
               </a:lnSpc>
             </a:pPr>
             <a:r>
-              <a:rPr sz="1100" b="0">
+              <a:rPr sz="1100" b="0" i="0">
                 <a:solidFill>
                   <a:srgbClr val="595959"/>
                 </a:solidFill>
@@ -32413,7 +33955,7 @@
               </a:lnSpc>
             </a:pPr>
             <a:r>
-              <a:rPr sz="1250" b="1">
+              <a:rPr sz="1250" b="1" i="0">
                 <a:solidFill>
                   <a:srgbClr val="1A1A1A"/>
                 </a:solidFill>
@@ -32452,7 +33994,7 @@
               </a:lnSpc>
             </a:pPr>
             <a:r>
-              <a:rPr sz="1100" b="0">
+              <a:rPr sz="1100" b="0" i="0">
                 <a:solidFill>
                   <a:srgbClr val="595959"/>
                 </a:solidFill>
@@ -32579,7 +34121,7 @@
               </a:lnSpc>
             </a:pPr>
             <a:r>
-              <a:rPr sz="1500" b="1">
+              <a:rPr sz="1500" b="1" i="0">
                 <a:solidFill>
                   <a:srgbClr val="FFFFFF"/>
                 </a:solidFill>
@@ -32618,7 +34160,7 @@
               </a:lnSpc>
             </a:pPr>
             <a:r>
-              <a:rPr sz="1250" b="1">
+              <a:rPr sz="1250" b="1" i="0">
                 <a:solidFill>
                   <a:srgbClr val="1A1A1A"/>
                 </a:solidFill>
@@ -32657,7 +34199,7 @@
               </a:lnSpc>
             </a:pPr>
             <a:r>
-              <a:rPr sz="1100" b="0">
+              <a:rPr sz="1100" b="0" i="0">
                 <a:solidFill>
                   <a:srgbClr val="595959"/>
                 </a:solidFill>
@@ -32696,7 +34238,7 @@
               </a:lnSpc>
             </a:pPr>
             <a:r>
-              <a:rPr sz="1250" b="1">
+              <a:rPr sz="1250" b="1" i="0">
                 <a:solidFill>
                   <a:srgbClr val="1A1A1A"/>
                 </a:solidFill>
@@ -32735,7 +34277,7 @@
               </a:lnSpc>
             </a:pPr>
             <a:r>
-              <a:rPr sz="1100" b="0">
+              <a:rPr sz="1100" b="0" i="0">
                 <a:solidFill>
                   <a:srgbClr val="595959"/>
                 </a:solidFill>
@@ -32774,7 +34316,7 @@
               </a:lnSpc>
             </a:pPr>
             <a:r>
-              <a:rPr sz="1250" b="1">
+              <a:rPr sz="1250" b="1" i="0">
                 <a:solidFill>
                   <a:srgbClr val="1A1A1A"/>
                 </a:solidFill>
@@ -32813,7 +34355,7 @@
               </a:lnSpc>
             </a:pPr>
             <a:r>
-              <a:rPr sz="1100" b="0">
+              <a:rPr sz="1100" b="0" i="0">
                 <a:solidFill>
                   <a:srgbClr val="595959"/>
                 </a:solidFill>
@@ -32852,7 +34394,7 @@
               </a:lnSpc>
             </a:pPr>
             <a:r>
-              <a:rPr sz="1250" b="1">
+              <a:rPr sz="1250" b="1" i="0">
                 <a:solidFill>
                   <a:srgbClr val="1A1A1A"/>
                 </a:solidFill>
@@ -32891,7 +34433,7 @@
               </a:lnSpc>
             </a:pPr>
             <a:r>
-              <a:rPr sz="1100" b="0">
+              <a:rPr sz="1100" b="0" i="0">
                 <a:solidFill>
                   <a:srgbClr val="595959"/>
                 </a:solidFill>
@@ -32904,14 +34446,53 @@
       </p:sp>
       <p:sp>
         <p:nvSpPr>
-          <p:cNvPr id="26" name="Rectangle 25"/>
+          <p:cNvPr id="26" name="TextBox 25"/>
+          <p:cNvSpPr txBox="1"/>
+          <p:nvPr/>
+        </p:nvSpPr>
+        <p:spPr>
+          <a:xfrm>
+            <a:off x="457200" y="5715000"/>
+            <a:ext cx="11247120" cy="274320"/>
+          </a:xfrm>
+          <a:prstGeom prst="rect">
+            <a:avLst/>
+          </a:prstGeom>
+          <a:noFill/>
+        </p:spPr>
+        <p:txBody>
+          <a:bodyPr wrap="square" lIns="25400" rIns="25400" tIns="25400" bIns="25400">
+            <a:spAutoFit/>
+          </a:bodyPr>
+          <a:lstStyle/>
+          <a:p>
+            <a:pPr algn="ctr">
+              <a:lnSpc>
+                <a:spcPct val="120000"/>
+              </a:lnSpc>
+            </a:pPr>
+            <a:r>
+              <a:rPr sz="1100" b="0" i="1">
+                <a:solidFill>
+                  <a:srgbClr val="595959"/>
+                </a:solidFill>
+                <a:latin typeface="Calibri"/>
+              </a:rPr>
+              <a:t>Dynamic capabilities: операционный блок развит; способность перестраивать ресурсы под изменения рынка — в начальной зрелости</a:t>
+            </a:r>
+          </a:p>
+        </p:txBody>
+      </p:sp>
+      <p:sp>
+        <p:nvSpPr>
+          <p:cNvPr id="27" name="Rectangle 26"/>
           <p:cNvSpPr/>
           <p:nvPr/>
         </p:nvSpPr>
         <p:spPr>
           <a:xfrm>
-            <a:off x="640080" y="5806440"/>
-            <a:ext cx="11247120" cy="502920"/>
+            <a:off x="457200" y="6080760"/>
+            <a:ext cx="11274552" cy="365760"/>
           </a:xfrm>
           <a:prstGeom prst="rect">
             <a:avLst/>
@@ -32948,14 +34529,14 @@
       </p:sp>
       <p:sp>
         <p:nvSpPr>
-          <p:cNvPr id="27" name="TextBox 26"/>
-          <p:cNvSpPr txBox="1"/>
-          <p:nvPr/>
-        </p:nvSpPr>
-        <p:spPr>
-          <a:xfrm>
-            <a:off x="640080" y="5897880"/>
-            <a:ext cx="11247120" cy="365760"/>
+          <p:cNvPr id="28" name="TextBox 27"/>
+          <p:cNvSpPr txBox="1"/>
+          <p:nvPr/>
+        </p:nvSpPr>
+        <p:spPr>
+          <a:xfrm>
+            <a:off x="457200" y="6126480"/>
+            <a:ext cx="11274552" cy="274320"/>
           </a:xfrm>
           <a:prstGeom prst="rect">
             <a:avLst/>
@@ -32974,20 +34555,20 @@
               </a:lnSpc>
             </a:pPr>
             <a:r>
-              <a:rPr sz="1200" b="1">
+              <a:rPr sz="1100" b="1" i="0">
                 <a:solidFill>
                   <a:srgbClr val="FFFFFF"/>
                 </a:solidFill>
                 <a:latin typeface="Calibri"/>
               </a:rPr>
-              <a:t>Dynamic capabilities: операционный блок развит, способность перестраивать ресурсы под изменения рынка — в начальной зрелости</a:t>
-            </a:r>
-          </a:p>
-        </p:txBody>
-      </p:sp>
-      <p:sp>
-        <p:nvSpPr>
-          <p:cNvPr id="28" name="TextBox 27"/>
+              <a:t>Проблема — не в отсутствии ресурсов, а в том, что текущая модель не превращает их в региональный результат</a:t>
+            </a:r>
+          </a:p>
+        </p:txBody>
+      </p:sp>
+      <p:sp>
+        <p:nvSpPr>
+          <p:cNvPr id="29" name="TextBox 28"/>
           <p:cNvSpPr txBox="1"/>
           <p:nvPr/>
         </p:nvSpPr>
@@ -33021,7 +34602,7 @@
       </p:sp>
       <p:sp>
         <p:nvSpPr>
-          <p:cNvPr id="29" name="TextBox 28"/>
+          <p:cNvPr id="30" name="TextBox 29"/>
           <p:cNvSpPr txBox="1"/>
           <p:nvPr/>
         </p:nvSpPr>
@@ -33278,7 +34859,7 @@
               </a:lnSpc>
             </a:pPr>
             <a:r>
-              <a:rPr sz="1300" b="1">
+              <a:rPr sz="1300" b="1" i="0">
                 <a:solidFill>
                   <a:srgbClr val="1A1A1A"/>
                 </a:solidFill>
@@ -33317,7 +34898,7 @@
               </a:lnSpc>
             </a:pPr>
             <a:r>
-              <a:rPr sz="1150" b="0">
+              <a:rPr sz="1150" b="0" i="0">
                 <a:solidFill>
                   <a:srgbClr val="1A1A1A"/>
                 </a:solidFill>
@@ -33333,7 +34914,7 @@
               </a:lnSpc>
             </a:pPr>
             <a:r>
-              <a:rPr sz="1150" b="0">
+              <a:rPr sz="1150" b="0" i="0">
                 <a:solidFill>
                   <a:srgbClr val="1A1A1A"/>
                 </a:solidFill>
@@ -33504,7 +35085,7 @@
               </a:lnSpc>
             </a:pPr>
             <a:r>
-              <a:rPr sz="1300" b="1">
+              <a:rPr sz="1300" b="1" i="0">
                 <a:solidFill>
                   <a:srgbClr val="1A1A1A"/>
                 </a:solidFill>
@@ -33543,7 +35124,7 @@
               </a:lnSpc>
             </a:pPr>
             <a:r>
-              <a:rPr sz="1150" b="0">
+              <a:rPr sz="1150" b="0" i="0">
                 <a:solidFill>
                   <a:srgbClr val="1A1A1A"/>
                 </a:solidFill>
@@ -33559,7 +35140,7 @@
               </a:lnSpc>
             </a:pPr>
             <a:r>
-              <a:rPr sz="1150" b="0">
+              <a:rPr sz="1150" b="0" i="0">
                 <a:solidFill>
                   <a:srgbClr val="1A1A1A"/>
                 </a:solidFill>
@@ -33575,7 +35156,7 @@
               </a:lnSpc>
             </a:pPr>
             <a:r>
-              <a:rPr sz="1150" b="0">
+              <a:rPr sz="1150" b="0" i="0">
                 <a:solidFill>
                   <a:srgbClr val="1A1A1A"/>
                 </a:solidFill>
@@ -33591,7 +35172,7 @@
               </a:lnSpc>
             </a:pPr>
             <a:r>
-              <a:rPr sz="1150" b="0">
+              <a:rPr sz="1150" b="0" i="0">
                 <a:solidFill>
                   <a:srgbClr val="1A1A1A"/>
                 </a:solidFill>
@@ -33762,7 +35343,7 @@
               </a:lnSpc>
             </a:pPr>
             <a:r>
-              <a:rPr sz="1300" b="1">
+              <a:rPr sz="1300" b="1" i="0">
                 <a:solidFill>
                   <a:srgbClr val="1A1A1A"/>
                 </a:solidFill>
@@ -33801,7 +35382,7 @@
               </a:lnSpc>
             </a:pPr>
             <a:r>
-              <a:rPr sz="1150" b="0">
+              <a:rPr sz="1150" b="0" i="0">
                 <a:solidFill>
                   <a:srgbClr val="1A1A1A"/>
                 </a:solidFill>
@@ -33817,7 +35398,7 @@
               </a:lnSpc>
             </a:pPr>
             <a:r>
-              <a:rPr sz="1150" b="0">
+              <a:rPr sz="1150" b="0" i="0">
                 <a:solidFill>
                   <a:srgbClr val="1A1A1A"/>
                 </a:solidFill>
@@ -33833,7 +35414,7 @@
               </a:lnSpc>
             </a:pPr>
             <a:r>
-              <a:rPr sz="1150" b="0">
+              <a:rPr sz="1150" b="0" i="0">
                 <a:solidFill>
                   <a:srgbClr val="1A1A1A"/>
                 </a:solidFill>
@@ -34004,7 +35585,7 @@
               </a:lnSpc>
             </a:pPr>
             <a:r>
-              <a:rPr sz="1300" b="1">
+              <a:rPr sz="1300" b="1" i="0">
                 <a:solidFill>
                   <a:srgbClr val="FFFFFF"/>
                 </a:solidFill>
@@ -34043,7 +35624,7 @@
               </a:lnSpc>
             </a:pPr>
             <a:r>
-              <a:rPr sz="1150" b="0">
+              <a:rPr sz="1150" b="0" i="0">
                 <a:solidFill>
                   <a:srgbClr val="FFFFFF"/>
                 </a:solidFill>
@@ -34059,7 +35640,7 @@
               </a:lnSpc>
             </a:pPr>
             <a:r>
-              <a:rPr sz="1150" b="0">
+              <a:rPr sz="1150" b="0" i="0">
                 <a:solidFill>
                   <a:srgbClr val="FFFFFF"/>
                 </a:solidFill>
@@ -34075,7 +35656,7 @@
               </a:lnSpc>
             </a:pPr>
             <a:r>
-              <a:rPr sz="1150" b="0">
+              <a:rPr sz="1150" b="0" i="0">
                 <a:solidFill>
                   <a:srgbClr val="FFFFFF"/>
                 </a:solidFill>
@@ -34091,7 +35672,7 @@
               </a:lnSpc>
             </a:pPr>
             <a:r>
-              <a:rPr sz="1150" b="0">
+              <a:rPr sz="1150" b="0" i="0">
                 <a:solidFill>
                   <a:srgbClr val="FFFFFF"/>
                 </a:solidFill>
@@ -34107,7 +35688,7 @@
               </a:lnSpc>
             </a:pPr>
             <a:r>
-              <a:rPr sz="1150" b="0">
+              <a:rPr sz="1150" b="0" i="0">
                 <a:solidFill>
                   <a:srgbClr val="FFFFFF"/>
                 </a:solidFill>
@@ -34120,7 +35701,90 @@
       </p:sp>
       <p:sp>
         <p:nvSpPr>
-          <p:cNvPr id="23" name="TextBox 22"/>
+          <p:cNvPr id="23" name="Rectangle 22"/>
+          <p:cNvSpPr/>
+          <p:nvPr/>
+        </p:nvSpPr>
+        <p:spPr>
+          <a:xfrm>
+            <a:off x="457200" y="6080760"/>
+            <a:ext cx="11274552" cy="365760"/>
+          </a:xfrm>
+          <a:prstGeom prst="rect">
+            <a:avLst/>
+          </a:prstGeom>
+          <a:solidFill>
+            <a:srgbClr val="1A1A1A"/>
+          </a:solidFill>
+          <a:ln>
+            <a:noFill/>
+          </a:ln>
+          <a:effectLst/>
+        </p:spPr>
+        <p:style>
+          <a:lnRef idx="1">
+            <a:schemeClr val="accent1"/>
+          </a:lnRef>
+          <a:fillRef idx="3">
+            <a:schemeClr val="accent1"/>
+          </a:fillRef>
+          <a:effectRef idx="2">
+            <a:schemeClr val="accent1"/>
+          </a:effectRef>
+          <a:fontRef idx="minor">
+            <a:schemeClr val="lt1"/>
+          </a:fontRef>
+        </p:style>
+        <p:txBody>
+          <a:bodyPr rtlCol="0" anchor="ctr"/>
+          <a:lstStyle/>
+          <a:p>
+            <a:pPr algn="ctr"/>
+          </a:p>
+        </p:txBody>
+      </p:sp>
+      <p:sp>
+        <p:nvSpPr>
+          <p:cNvPr id="24" name="TextBox 23"/>
+          <p:cNvSpPr txBox="1"/>
+          <p:nvPr/>
+        </p:nvSpPr>
+        <p:spPr>
+          <a:xfrm>
+            <a:off x="457200" y="6126480"/>
+            <a:ext cx="11274552" cy="274320"/>
+          </a:xfrm>
+          <a:prstGeom prst="rect">
+            <a:avLst/>
+          </a:prstGeom>
+          <a:noFill/>
+        </p:spPr>
+        <p:txBody>
+          <a:bodyPr wrap="square" lIns="25400" rIns="25400" tIns="25400" bIns="25400">
+            <a:spAutoFit/>
+          </a:bodyPr>
+          <a:lstStyle/>
+          <a:p>
+            <a:pPr algn="ctr">
+              <a:lnSpc>
+                <a:spcPct val="120000"/>
+              </a:lnSpc>
+            </a:pPr>
+            <a:r>
+              <a:rPr sz="1100" b="1" i="0">
+                <a:solidFill>
+                  <a:srgbClr val="FFFFFF"/>
+                </a:solidFill>
+                <a:latin typeface="Calibri"/>
+              </a:rPr>
+              <a:t>Нужна управляемая система «город → режим → KPI», а не разовые корректировки по каждому случаю</a:t>
+            </a:r>
+          </a:p>
+        </p:txBody>
+      </p:sp>
+      <p:sp>
+        <p:nvSpPr>
+          <p:cNvPr id="25" name="TextBox 24"/>
           <p:cNvSpPr txBox="1"/>
           <p:nvPr/>
         </p:nvSpPr>
@@ -34154,7 +35818,7 @@
       </p:sp>
       <p:sp>
         <p:nvSpPr>
-          <p:cNvPr id="24" name="TextBox 23"/>
+          <p:cNvPr id="26" name="TextBox 25"/>
           <p:cNvSpPr txBox="1"/>
           <p:nvPr/>
         </p:nvSpPr>
